--- a/presentation/Kangeldieva_SMM.pptx
+++ b/presentation/Kangeldieva_SMM.pptx
@@ -117,13 +117,13 @@
   <p:extLst>
     <p:ext uri="{521415D9-36F7-43E2-AB2F-B90AF26B5E84}">
       <p14:sectionLst xmlns:p14="http://schemas.microsoft.com/office/powerpoint/2010/main">
-        <p14:section name="Кто я" id="{3b0f085a-60c3-806d-ecd4-5a736dc9e32e}">
+        <p14:section name="Кто я" id="{5db3e0a1-5061-8a1b-b5f7-31df463075d2}">
           <p14:sldIdLst>
             <p14:sldId id="256"/>
             <p14:sldId id="257"/>
           </p14:sldIdLst>
         </p14:section>
-        <p14:section name="Результаты и опыт" id="{10caa4d0-76b4-f832-5b18-15394226d513}">
+        <p14:section name="Результаты и опыт" id="{1cb78063-6c16-c738-397c-1055e8318edd}">
           <p14:sldIdLst>
             <p14:sldId id="258"/>
             <p14:sldId id="259"/>
@@ -132,13 +132,13 @@
             <p14:sldId id="262"/>
           </p14:sldIdLst>
         </p14:section>
-        <p14:section name="Компетенции" id="{2c917604-7dca-07c8-2770-dace02bc54cf}">
+        <p14:section name="Компетенции" id="{8594e18a-eeda-3a08-0421-6302d5e8feaf}">
           <p14:sldIdLst>
             <p14:sldId id="263"/>
             <p14:sldId id="264"/>
           </p14:sldIdLst>
         </p14:section>
-        <p14:section name="План и контакты" id="{46fafe8e-e465-fab8-e327-3401ecfdd404}">
+        <p14:section name="План и контакты" id="{4b721af8-d569-ef56-1afa-65110453f581}">
           <p14:sldIdLst>
             <p14:sldId id="265"/>
             <p14:sldId id="266"/>
@@ -4125,7 +4125,7 @@
                   <a:schemeClr val="tx2"/>
                 </a:solidFill>
               </a:rPr>
-              <a:t>Marketingová komunikace, 1-й курс, Прага</a:t>
+              <a:t>Бакалавриат</a:t>
             </a:r>
             <a:endParaRPr lang="en-US" sz="1600" dirty="0"/>
           </a:p>
@@ -4161,7 +4161,7 @@
                   <a:schemeClr val="tx2"/>
                 </a:solidFill>
               </a:rPr>
-              <a:t>Площадки: Instagram, TikTok, Facebook. Рынки: Центральная Азия, США. Сейчас учусь маркетинговой коммуникации в Праге.</a:t>
+              <a:t>Площадки: Instagram, TikTok, Facebook. Рынки: Центральная Азия, США. Живу в Праге.</a:t>
             </a:r>
             <a:endParaRPr lang="en-US" sz="1600" dirty="0"/>
           </a:p>

--- a/presentation/Kangeldieva_SMM.pptx
+++ b/presentation/Kangeldieva_SMM.pptx
@@ -117,13 +117,13 @@
   <p:extLst>
     <p:ext uri="{521415D9-36F7-43E2-AB2F-B90AF26B5E84}">
       <p14:sectionLst xmlns:p14="http://schemas.microsoft.com/office/powerpoint/2010/main">
-        <p14:section name="Кто я" id="{5db3e0a1-5061-8a1b-b5f7-31df463075d2}">
+        <p14:section name="Кто я" id="{58d39aa0-56f7-bef9-1af6-a555b6d126b5}">
           <p14:sldIdLst>
             <p14:sldId id="256"/>
             <p14:sldId id="257"/>
           </p14:sldIdLst>
         </p14:section>
-        <p14:section name="Результаты и опыт" id="{1cb78063-6c16-c738-397c-1055e8318edd}">
+        <p14:section name="Результаты и опыт" id="{e7890bd4-9617-996a-825a-42f69a9d7fe7}">
           <p14:sldIdLst>
             <p14:sldId id="258"/>
             <p14:sldId id="259"/>
@@ -132,13 +132,13 @@
             <p14:sldId id="262"/>
           </p14:sldIdLst>
         </p14:section>
-        <p14:section name="Компетенции" id="{8594e18a-eeda-3a08-0421-6302d5e8feaf}">
+        <p14:section name="Компетенции" id="{1b198af2-1d02-1573-2361-c3bae945c9e3}">
           <p14:sldIdLst>
             <p14:sldId id="263"/>
             <p14:sldId id="264"/>
           </p14:sldIdLst>
         </p14:section>
-        <p14:section name="План и контакты" id="{4b721af8-d569-ef56-1afa-65110453f581}">
+        <p14:section name="План и контакты" id="{85fb757b-bda2-e014-4280-bbf3648f365a}">
           <p14:sldIdLst>
             <p14:sldId id="265"/>
             <p14:sldId id="266"/>
@@ -2949,7 +2949,7 @@
       </p:sp>
       <p:sp>
         <p:nvSpPr>
-          <p:cNvPr id="4" name="card-149"/>
+          <p:cNvPr id="4" name="card-142"/>
           <p:cNvSpPr/>
           <p:nvPr/>
         </p:nvSpPr>
@@ -2976,7 +2976,7 @@
       </p:sp>
       <p:sp>
         <p:nvSpPr>
-          <p:cNvPr id="5" name="text-150"/>
+          <p:cNvPr id="5" name="text-143"/>
           <p:cNvSpPr txBox="1"/>
           <p:nvPr/>
         </p:nvSpPr>
@@ -3012,7 +3012,7 @@
       </p:sp>
       <p:sp>
         <p:nvSpPr>
-          <p:cNvPr id="6" name="text-151"/>
+          <p:cNvPr id="6" name="text-144"/>
           <p:cNvSpPr txBox="1"/>
           <p:nvPr/>
         </p:nvSpPr>
@@ -3048,7 +3048,7 @@
       </p:sp>
       <p:sp>
         <p:nvSpPr>
-          <p:cNvPr id="7" name="text-152"/>
+          <p:cNvPr id="7" name="text-145"/>
           <p:cNvSpPr txBox="1"/>
           <p:nvPr/>
         </p:nvSpPr>
@@ -3084,7 +3084,7 @@
       </p:sp>
       <p:sp>
         <p:nvSpPr>
-          <p:cNvPr id="8" name="card-153"/>
+          <p:cNvPr id="8" name="card-146"/>
           <p:cNvSpPr/>
           <p:nvPr/>
         </p:nvSpPr>
@@ -3111,7 +3111,7 @@
       </p:sp>
       <p:sp>
         <p:nvSpPr>
-          <p:cNvPr id="9" name="text-154"/>
+          <p:cNvPr id="9" name="text-147"/>
           <p:cNvSpPr txBox="1"/>
           <p:nvPr/>
         </p:nvSpPr>
@@ -3147,7 +3147,7 @@
       </p:sp>
       <p:sp>
         <p:nvSpPr>
-          <p:cNvPr id="10" name="text-155"/>
+          <p:cNvPr id="10" name="text-148"/>
           <p:cNvSpPr txBox="1"/>
           <p:nvPr/>
         </p:nvSpPr>
@@ -3183,7 +3183,7 @@
       </p:sp>
       <p:sp>
         <p:nvSpPr>
-          <p:cNvPr id="11" name="text-156"/>
+          <p:cNvPr id="11" name="text-149"/>
           <p:cNvSpPr txBox="1"/>
           <p:nvPr/>
         </p:nvSpPr>
@@ -3219,7 +3219,7 @@
       </p:sp>
       <p:sp>
         <p:nvSpPr>
-          <p:cNvPr id="12" name="card-157"/>
+          <p:cNvPr id="12" name="card-150"/>
           <p:cNvSpPr/>
           <p:nvPr/>
         </p:nvSpPr>
@@ -3246,7 +3246,7 @@
       </p:sp>
       <p:sp>
         <p:nvSpPr>
-          <p:cNvPr id="13" name="text-158"/>
+          <p:cNvPr id="13" name="text-151"/>
           <p:cNvSpPr txBox="1"/>
           <p:nvPr/>
         </p:nvSpPr>
@@ -3282,7 +3282,7 @@
       </p:sp>
       <p:sp>
         <p:nvSpPr>
-          <p:cNvPr id="14" name="text-159"/>
+          <p:cNvPr id="14" name="text-152"/>
           <p:cNvSpPr txBox="1"/>
           <p:nvPr/>
         </p:nvSpPr>
@@ -3318,7 +3318,7 @@
       </p:sp>
       <p:sp>
         <p:nvSpPr>
-          <p:cNvPr id="15" name="text-160"/>
+          <p:cNvPr id="15" name="text-153"/>
           <p:cNvSpPr txBox="1"/>
           <p:nvPr/>
         </p:nvSpPr>
@@ -3354,7 +3354,7 @@
       </p:sp>
       <p:sp>
         <p:nvSpPr>
-          <p:cNvPr id="16" name="text-161"/>
+          <p:cNvPr id="16" name="text-154"/>
           <p:cNvSpPr txBox="1"/>
           <p:nvPr/>
         </p:nvSpPr>
@@ -3460,7 +3460,7 @@
       </p:grpSpPr>
       <p:sp>
         <p:nvSpPr>
-          <p:cNvPr id="2" name="text-162"/>
+          <p:cNvPr id="2" name="text-155"/>
           <p:cNvSpPr txBox="1"/>
           <p:nvPr/>
         </p:nvSpPr>
@@ -3496,7 +3496,7 @@
       </p:sp>
       <p:sp>
         <p:nvSpPr>
-          <p:cNvPr id="3" name="text-163"/>
+          <p:cNvPr id="3" name="text-156"/>
           <p:cNvSpPr txBox="1"/>
           <p:nvPr/>
         </p:nvSpPr>
@@ -3552,7 +3552,7 @@
       </p:sp>
       <p:sp>
         <p:nvSpPr>
-          <p:cNvPr id="4" name="pill-164"/>
+          <p:cNvPr id="4" name="pill-157"/>
           <p:cNvSpPr/>
           <p:nvPr/>
         </p:nvSpPr>
@@ -3574,7 +3574,7 @@
       </p:sp>
       <p:sp>
         <p:nvSpPr>
-          <p:cNvPr id="5" name="text-165"/>
+          <p:cNvPr id="5" name="text-158"/>
           <p:cNvSpPr txBox="1"/>
           <p:nvPr/>
         </p:nvSpPr>
@@ -3610,7 +3610,7 @@
       </p:sp>
       <p:sp>
         <p:nvSpPr>
-          <p:cNvPr id="6" name="pill-166"/>
+          <p:cNvPr id="6" name="pill-159"/>
           <p:cNvSpPr/>
           <p:nvPr/>
         </p:nvSpPr>
@@ -3634,7 +3634,7 @@
       </p:sp>
       <p:sp>
         <p:nvSpPr>
-          <p:cNvPr id="7" name="text-167"/>
+          <p:cNvPr id="7" name="text-160"/>
           <p:cNvSpPr txBox="1"/>
           <p:nvPr/>
         </p:nvSpPr>
@@ -3670,7 +3670,7 @@
       </p:sp>
       <p:sp>
         <p:nvSpPr>
-          <p:cNvPr id="8" name="text-168"/>
+          <p:cNvPr id="8" name="text-161"/>
           <p:cNvSpPr txBox="1"/>
           <p:nvPr/>
         </p:nvSpPr>
@@ -4810,7 +4810,7 @@
                   <a:schemeClr val="accent1"/>
                 </a:solidFill>
               </a:rPr>
-              <a:t>ОПЫТ В SMM · 2022–2023</a:t>
+              <a:t>ОПЫТ В SMM И DIGITAL · 2022–2024</a:t>
             </a:r>
             <a:endParaRPr lang="en-US" sz="1400" dirty="0"/>
           </a:p>
@@ -4851,7 +4851,7 @@
                 <a:ea typeface="Arial" pitchFamily="34" charset="-122"/>
                 <a:cs typeface="Arial" pitchFamily="34" charset="-120"/>
               </a:rPr>
-              <a:t>SMM полного цикла в трёх брендах</a:t>
+              <a:t>SMM и digital в трёх брендах</a:t>
             </a:r>
             <a:endParaRPr lang="en-US" sz="3200" dirty="0"/>
           </a:p>
@@ -5271,7 +5271,7 @@
                 <a:ea typeface="Arial" pitchFamily="34" charset="-122"/>
                 <a:cs typeface="Arial" pitchFamily="34" charset="-120"/>
               </a:rPr>
-              <a:t>Innovat</a:t>
+              <a:t>DemirBank</a:t>
             </a:r>
             <a:endParaRPr lang="en-US" sz="1900" dirty="0"/>
           </a:p>
@@ -5307,7 +5307,7 @@
                   <a:schemeClr val="accent5"/>
                 </a:solidFill>
               </a:rPr>
-              <a:t>IT · Digital-маркетолог</a:t>
+              <a:t>Финтех · Digital-маркетолог</a:t>
             </a:r>
             <a:endParaRPr lang="en-US" sz="1200" dirty="0"/>
           </a:p>
@@ -5346,7 +5346,7 @@
                 <a:ea typeface="Arial" pitchFamily="34" charset="-122"/>
                 <a:cs typeface="Arial" pitchFamily="34" charset="-120"/>
               </a:rPr>
-              <a:t>+120%</a:t>
+              <a:t>+40%</a:t>
             </a:r>
             <a:endParaRPr lang="en-US" sz="2600" dirty="0"/>
           </a:p>
@@ -5382,7 +5382,7 @@
                   <a:schemeClr val="tx2"/>
                 </a:solidFill>
               </a:rPr>
-              <a:t>органического трафика. Руководила digital-командой: контент и соцсети.</a:t>
+              <a:t>установок приложения. Таргет и контент для B2B и B2C, аналитика в Firebase.</a:t>
             </a:r>
             <a:endParaRPr lang="en-US" sz="1400" dirty="0"/>
           </a:p>
@@ -6858,7 +6858,7 @@
                   <a:schemeClr val="accent1"/>
                 </a:solidFill>
               </a:rPr>
-              <a:t>ОПЫТ · 2024</a:t>
+              <a:t>ОПЫТ · 2024–2025</a:t>
             </a:r>
             <a:endParaRPr lang="en-US" sz="1400" dirty="0"/>
           </a:p>
@@ -6899,7 +6899,7 @@
                 <a:ea typeface="Arial" pitchFamily="34" charset="-122"/>
                 <a:cs typeface="Arial" pitchFamily="34" charset="-120"/>
               </a:rPr>
-              <a:t>Финтех и международный B2C</a:t>
+              <a:t>Международный B2C: Booking Lane</a:t>
             </a:r>
             <a:endParaRPr lang="en-US" sz="3200" dirty="0"/>
           </a:p>
@@ -6914,11 +6914,11 @@
         <p:spPr>
           <a:xfrm>
             <a:off x="812800" y="2286000"/>
-            <a:ext cx="5181600" cy="3175000"/>
+            <a:ext cx="6248400" cy="2540000"/>
           </a:xfrm>
           <a:prstGeom prst="roundRect">
             <a:avLst>
-              <a:gd name="adj" fmla="val 4800"/>
+              <a:gd name="adj" fmla="val 6000"/>
             </a:avLst>
           </a:prstGeom>
           <a:solidFill>
@@ -6935,47 +6935,141 @@
         </p:nvSpPr>
         <p:spPr>
           <a:xfrm>
-            <a:off x="1117600" y="2540000"/>
-            <a:ext cx="4572000" cy="381000"/>
-          </a:xfrm>
-          <a:prstGeom prst="rect">
-            <a:avLst/>
-          </a:prstGeom>
-          <a:noFill/>
-          <a:ln/>
-        </p:spPr>
-        <p:txBody>
-          <a:bodyPr wrap="square" lIns="0" tIns="0" rIns="0" bIns="0" rtlCol="0" anchor="t"/>
-          <a:lstStyle/>
-          <a:p>
-            <a:pPr indent="0" marL="0">
-              <a:buNone/>
-            </a:pPr>
-            <a:r>
-              <a:rPr lang="en-US" sz="2200" b="1" dirty="0">
-                <a:solidFill>
-                  <a:schemeClr val="tx1"/>
+            <a:off x="1117600" y="2590800"/>
+            <a:ext cx="5638800" cy="571500"/>
+          </a:xfrm>
+          <a:prstGeom prst="rect">
+            <a:avLst/>
+          </a:prstGeom>
+          <a:noFill/>
+          <a:ln/>
+        </p:spPr>
+        <p:txBody>
+          <a:bodyPr wrap="square" lIns="0" tIns="0" rIns="0" bIns="0" rtlCol="0" anchor="t"/>
+          <a:lstStyle/>
+          <a:p>
+            <a:pPr indent="0" marL="0">
+              <a:buNone/>
+            </a:pPr>
+            <a:r>
+              <a:rPr lang="en-US" sz="1400" dirty="0">
+                <a:solidFill>
+                  <a:schemeClr val="accent5"/>
+                </a:solidFill>
+              </a:rPr>
+              <a:t>Маркетолог, частичная занятость · премиальный букинг, США</a:t>
+            </a:r>
+            <a:endParaRPr lang="en-US" sz="1400" dirty="0"/>
+          </a:p>
+        </p:txBody>
+      </p:sp>
+      <p:sp>
+        <p:nvSpPr>
+          <p:cNvPr id="6" name="text-80"/>
+          <p:cNvSpPr txBox="1"/>
+          <p:nvPr/>
+        </p:nvSpPr>
+        <p:spPr>
+          <a:xfrm>
+            <a:off x="1117600" y="3302000"/>
+            <a:ext cx="5638800" cy="1397000"/>
+          </a:xfrm>
+          <a:prstGeom prst="rect">
+            <a:avLst/>
+          </a:prstGeom>
+          <a:noFill/>
+          <a:ln/>
+        </p:spPr>
+        <p:txBody>
+          <a:bodyPr wrap="square" lIns="0" tIns="0" rIns="0" bIns="0" rtlCol="0" anchor="t"/>
+          <a:lstStyle/>
+          <a:p>
+            <a:pPr indent="0" marL="0">
+              <a:buNone/>
+            </a:pPr>
+            <a:r>
+              <a:rPr lang="en-US" sz="1600" dirty="0">
+                <a:solidFill>
+                  <a:schemeClr val="tx2"/>
+                </a:solidFill>
+              </a:rPr>
+              <a:t>Англоязычный рынок: исследование аудитории, медиапланы, контекст и таргет, SEO, отчётность по Google Analytics.</a:t>
+            </a:r>
+            <a:endParaRPr lang="en-US" sz="1600" dirty="0"/>
+          </a:p>
+        </p:txBody>
+      </p:sp>
+      <p:sp>
+        <p:nvSpPr>
+          <p:cNvPr id="7" name="card-81"/>
+          <p:cNvSpPr/>
+          <p:nvPr/>
+        </p:nvSpPr>
+        <p:spPr>
+          <a:xfrm>
+            <a:off x="7264400" y="2286000"/>
+            <a:ext cx="2032000" cy="2540000"/>
+          </a:xfrm>
+          <a:prstGeom prst="roundRect">
+            <a:avLst>
+              <a:gd name="adj" fmla="val 7500"/>
+            </a:avLst>
+          </a:prstGeom>
+          <a:solidFill>
+            <a:schemeClr val="tx1"/>
+          </a:solidFill>
+          <a:ln/>
+        </p:spPr>
+      </p:sp>
+      <p:sp>
+        <p:nvSpPr>
+          <p:cNvPr id="8" name="text-82"/>
+          <p:cNvSpPr txBox="1"/>
+          <p:nvPr/>
+        </p:nvSpPr>
+        <p:spPr>
+          <a:xfrm>
+            <a:off x="7518400" y="2857500"/>
+            <a:ext cx="1524000" cy="635000"/>
+          </a:xfrm>
+          <a:prstGeom prst="rect">
+            <a:avLst/>
+          </a:prstGeom>
+          <a:noFill/>
+          <a:ln/>
+        </p:spPr>
+        <p:txBody>
+          <a:bodyPr wrap="square" lIns="0" tIns="0" rIns="0" bIns="0" rtlCol="0" anchor="t"/>
+          <a:lstStyle/>
+          <a:p>
+            <a:pPr indent="0" marL="0">
+              <a:buNone/>
+            </a:pPr>
+            <a:r>
+              <a:rPr lang="en-US" sz="3200" b="1" dirty="0">
+                <a:solidFill>
+                  <a:schemeClr val="accent2"/>
                 </a:solidFill>
                 <a:latin typeface="Arial" pitchFamily="34" charset="0"/>
                 <a:ea typeface="Arial" pitchFamily="34" charset="-122"/>
                 <a:cs typeface="Arial" pitchFamily="34" charset="-120"/>
               </a:rPr>
-              <a:t>DemirBank</a:t>
-            </a:r>
-            <a:endParaRPr lang="en-US" sz="2200" dirty="0"/>
-          </a:p>
-        </p:txBody>
-      </p:sp>
-      <p:sp>
-        <p:nvSpPr>
-          <p:cNvPr id="6" name="text-80"/>
-          <p:cNvSpPr txBox="1"/>
-          <p:nvPr/>
-        </p:nvSpPr>
-        <p:spPr>
-          <a:xfrm>
-            <a:off x="1117600" y="2984500"/>
-            <a:ext cx="4572000" cy="508000"/>
+              <a:t>4,2</a:t>
+            </a:r>
+            <a:endParaRPr lang="en-US" sz="3200" dirty="0"/>
+          </a:p>
+        </p:txBody>
+      </p:sp>
+      <p:sp>
+        <p:nvSpPr>
+          <p:cNvPr id="9" name="text-83"/>
+          <p:cNvSpPr txBox="1"/>
+          <p:nvPr/>
+        </p:nvSpPr>
+        <p:spPr>
+          <a:xfrm>
+            <a:off x="7518400" y="3619500"/>
+            <a:ext cx="1524000" cy="635000"/>
           </a:xfrm>
           <a:prstGeom prst="rect">
             <a:avLst/>
@@ -6993,10 +7087,10 @@
             <a:r>
               <a:rPr lang="en-US" sz="1400" dirty="0">
                 <a:solidFill>
-                  <a:schemeClr val="accent5"/>
-                </a:solidFill>
-              </a:rPr>
-              <a:t>Digital-маркетолог · первый международный банк Кыргызстана</a:t>
+                  <a:schemeClr val="accent6"/>
+                </a:solidFill>
+              </a:rPr>
+              <a:t>ROAS кампаний</a:t>
             </a:r>
             <a:endParaRPr lang="en-US" sz="1400" dirty="0"/>
           </a:p>
@@ -7004,164 +7098,75 @@
       </p:sp>
       <p:sp>
         <p:nvSpPr>
-          <p:cNvPr id="7" name="text-81"/>
-          <p:cNvSpPr txBox="1"/>
-          <p:nvPr/>
-        </p:nvSpPr>
-        <p:spPr>
-          <a:xfrm>
-            <a:off x="1117600" y="3619500"/>
-            <a:ext cx="2032000" cy="482600"/>
-          </a:xfrm>
-          <a:prstGeom prst="rect">
-            <a:avLst/>
-          </a:prstGeom>
-          <a:noFill/>
-          <a:ln/>
-        </p:spPr>
-        <p:txBody>
-          <a:bodyPr wrap="square" lIns="0" tIns="0" rIns="0" bIns="0" rtlCol="0" anchor="t"/>
-          <a:lstStyle/>
-          <a:p>
-            <a:pPr indent="0" marL="0">
-              <a:buNone/>
-            </a:pPr>
-            <a:r>
-              <a:rPr lang="en-US" sz="2800" b="1" dirty="0">
-                <a:solidFill>
-                  <a:schemeClr val="accent1"/>
+          <p:cNvPr id="10" name="card-84"/>
+          <p:cNvSpPr/>
+          <p:nvPr/>
+        </p:nvSpPr>
+        <p:spPr>
+          <a:xfrm>
+            <a:off x="9398000" y="2286000"/>
+            <a:ext cx="2032000" cy="2540000"/>
+          </a:xfrm>
+          <a:prstGeom prst="roundRect">
+            <a:avLst>
+              <a:gd name="adj" fmla="val 7500"/>
+            </a:avLst>
+          </a:prstGeom>
+          <a:solidFill>
+            <a:schemeClr val="tx1"/>
+          </a:solidFill>
+          <a:ln/>
+        </p:spPr>
+      </p:sp>
+      <p:sp>
+        <p:nvSpPr>
+          <p:cNvPr id="11" name="text-85"/>
+          <p:cNvSpPr txBox="1"/>
+          <p:nvPr/>
+        </p:nvSpPr>
+        <p:spPr>
+          <a:xfrm>
+            <a:off x="9652000" y="2857500"/>
+            <a:ext cx="1524000" cy="635000"/>
+          </a:xfrm>
+          <a:prstGeom prst="rect">
+            <a:avLst/>
+          </a:prstGeom>
+          <a:noFill/>
+          <a:ln/>
+        </p:spPr>
+        <p:txBody>
+          <a:bodyPr wrap="square" lIns="0" tIns="0" rIns="0" bIns="0" rtlCol="0" anchor="t"/>
+          <a:lstStyle/>
+          <a:p>
+            <a:pPr indent="0" marL="0">
+              <a:buNone/>
+            </a:pPr>
+            <a:r>
+              <a:rPr lang="en-US" sz="3200" b="1" dirty="0">
+                <a:solidFill>
+                  <a:schemeClr val="accent2"/>
                 </a:solidFill>
                 <a:latin typeface="Arial" pitchFamily="34" charset="0"/>
                 <a:ea typeface="Arial" pitchFamily="34" charset="-122"/>
                 <a:cs typeface="Arial" pitchFamily="34" charset="-120"/>
               </a:rPr>
-              <a:t>+40%</a:t>
-            </a:r>
-            <a:endParaRPr lang="en-US" sz="2800" dirty="0"/>
-          </a:p>
-        </p:txBody>
-      </p:sp>
-      <p:sp>
-        <p:nvSpPr>
-          <p:cNvPr id="8" name="text-82"/>
-          <p:cNvSpPr txBox="1"/>
-          <p:nvPr/>
-        </p:nvSpPr>
-        <p:spPr>
-          <a:xfrm>
-            <a:off x="1117600" y="4140200"/>
-            <a:ext cx="2032000" cy="254000"/>
-          </a:xfrm>
-          <a:prstGeom prst="rect">
-            <a:avLst/>
-          </a:prstGeom>
-          <a:noFill/>
-          <a:ln/>
-        </p:spPr>
-        <p:txBody>
-          <a:bodyPr wrap="square" lIns="0" tIns="0" rIns="0" bIns="0" rtlCol="0" anchor="t"/>
-          <a:lstStyle/>
-          <a:p>
-            <a:pPr indent="0" marL="0">
-              <a:buNone/>
-            </a:pPr>
-            <a:r>
-              <a:rPr lang="en-US" sz="1200" dirty="0">
-                <a:solidFill>
-                  <a:schemeClr val="tx2"/>
-                </a:solidFill>
-              </a:rPr>
-              <a:t>установок приложения</a:t>
-            </a:r>
-            <a:endParaRPr lang="en-US" sz="1200" dirty="0"/>
-          </a:p>
-        </p:txBody>
-      </p:sp>
-      <p:sp>
-        <p:nvSpPr>
-          <p:cNvPr id="9" name="text-83"/>
-          <p:cNvSpPr txBox="1"/>
-          <p:nvPr/>
-        </p:nvSpPr>
-        <p:spPr>
-          <a:xfrm>
-            <a:off x="3276600" y="3619500"/>
-            <a:ext cx="2032000" cy="482600"/>
-          </a:xfrm>
-          <a:prstGeom prst="rect">
-            <a:avLst/>
-          </a:prstGeom>
-          <a:noFill/>
-          <a:ln/>
-        </p:spPr>
-        <p:txBody>
-          <a:bodyPr wrap="square" lIns="0" tIns="0" rIns="0" bIns="0" rtlCol="0" anchor="t"/>
-          <a:lstStyle/>
-          <a:p>
-            <a:pPr indent="0" marL="0">
-              <a:buNone/>
-            </a:pPr>
-            <a:r>
-              <a:rPr lang="en-US" sz="2800" b="1" dirty="0">
-                <a:solidFill>
-                  <a:schemeClr val="accent1"/>
-                </a:solidFill>
-                <a:latin typeface="Arial" pitchFamily="34" charset="0"/>
-                <a:ea typeface="Arial" pitchFamily="34" charset="-122"/>
-                <a:cs typeface="Arial" pitchFamily="34" charset="-120"/>
-              </a:rPr>
-              <a:t>−25%</a:t>
-            </a:r>
-            <a:endParaRPr lang="en-US" sz="2800" dirty="0"/>
-          </a:p>
-        </p:txBody>
-      </p:sp>
-      <p:sp>
-        <p:nvSpPr>
-          <p:cNvPr id="10" name="text-84"/>
-          <p:cNvSpPr txBox="1"/>
-          <p:nvPr/>
-        </p:nvSpPr>
-        <p:spPr>
-          <a:xfrm>
-            <a:off x="3276600" y="4140200"/>
-            <a:ext cx="2032000" cy="254000"/>
-          </a:xfrm>
-          <a:prstGeom prst="rect">
-            <a:avLst/>
-          </a:prstGeom>
-          <a:noFill/>
-          <a:ln/>
-        </p:spPr>
-        <p:txBody>
-          <a:bodyPr wrap="square" lIns="0" tIns="0" rIns="0" bIns="0" rtlCol="0" anchor="t"/>
-          <a:lstStyle/>
-          <a:p>
-            <a:pPr indent="0" marL="0">
-              <a:buNone/>
-            </a:pPr>
-            <a:r>
-              <a:rPr lang="en-US" sz="1200" dirty="0">
-                <a:solidFill>
-                  <a:schemeClr val="tx2"/>
-                </a:solidFill>
-              </a:rPr>
-              <a:t>стоимость установки</a:t>
-            </a:r>
-            <a:endParaRPr lang="en-US" sz="1200" dirty="0"/>
-          </a:p>
-        </p:txBody>
-      </p:sp>
-      <p:sp>
-        <p:nvSpPr>
-          <p:cNvPr id="11" name="text-85"/>
-          <p:cNvSpPr txBox="1"/>
-          <p:nvPr/>
-        </p:nvSpPr>
-        <p:spPr>
-          <a:xfrm>
-            <a:off x="1117600" y="4635500"/>
-            <a:ext cx="4572000" cy="635000"/>
+              <a:t>+90%</a:t>
+            </a:r>
+            <a:endParaRPr lang="en-US" sz="3200" dirty="0"/>
+          </a:p>
+        </p:txBody>
+      </p:sp>
+      <p:sp>
+        <p:nvSpPr>
+          <p:cNvPr id="12" name="text-86"/>
+          <p:cNvSpPr txBox="1"/>
+          <p:nvPr/>
+        </p:nvSpPr>
+        <p:spPr>
+          <a:xfrm>
+            <a:off x="9652000" y="3619500"/>
+            <a:ext cx="1524000" cy="635000"/>
           </a:xfrm>
           <a:prstGeom prst="rect">
             <a:avLst/>
@@ -7179,293 +7184,10 @@
             <a:r>
               <a:rPr lang="en-US" sz="1400" dirty="0">
                 <a:solidFill>
-                  <a:schemeClr val="tx2"/>
-                </a:solidFill>
-              </a:rPr>
-              <a:t>Медиапланы, контекст и таргет, аналитика в GA и Firebase, SEO сайта.</a:t>
-            </a:r>
-            <a:endParaRPr lang="en-US" sz="1400" dirty="0"/>
-          </a:p>
-        </p:txBody>
-      </p:sp>
-      <p:sp>
-        <p:nvSpPr>
-          <p:cNvPr id="12" name="card-86"/>
-          <p:cNvSpPr/>
-          <p:nvPr/>
-        </p:nvSpPr>
-        <p:spPr>
-          <a:xfrm>
-            <a:off x="6197600" y="2286000"/>
-            <a:ext cx="5181600" cy="3175000"/>
-          </a:xfrm>
-          <a:prstGeom prst="roundRect">
-            <a:avLst>
-              <a:gd name="adj" fmla="val 4800"/>
-            </a:avLst>
-          </a:prstGeom>
-          <a:solidFill>
-            <a:schemeClr val="accent3"/>
-          </a:solidFill>
-          <a:ln/>
-        </p:spPr>
-      </p:sp>
-      <p:sp>
-        <p:nvSpPr>
-          <p:cNvPr id="13" name="text-87"/>
-          <p:cNvSpPr txBox="1"/>
-          <p:nvPr/>
-        </p:nvSpPr>
-        <p:spPr>
-          <a:xfrm>
-            <a:off x="6502400" y="2540000"/>
-            <a:ext cx="4572000" cy="381000"/>
-          </a:xfrm>
-          <a:prstGeom prst="rect">
-            <a:avLst/>
-          </a:prstGeom>
-          <a:noFill/>
-          <a:ln/>
-        </p:spPr>
-        <p:txBody>
-          <a:bodyPr wrap="square" lIns="0" tIns="0" rIns="0" bIns="0" rtlCol="0" anchor="t"/>
-          <a:lstStyle/>
-          <a:p>
-            <a:pPr indent="0" marL="0">
-              <a:buNone/>
-            </a:pPr>
-            <a:r>
-              <a:rPr lang="en-US" sz="2200" b="1" dirty="0">
-                <a:solidFill>
-                  <a:schemeClr val="tx1"/>
-                </a:solidFill>
-                <a:latin typeface="Arial" pitchFamily="34" charset="0"/>
-                <a:ea typeface="Arial" pitchFamily="34" charset="-122"/>
-                <a:cs typeface="Arial" pitchFamily="34" charset="-120"/>
-              </a:rPr>
-              <a:t>Booking Lane</a:t>
-            </a:r>
-            <a:endParaRPr lang="en-US" sz="2200" dirty="0"/>
-          </a:p>
-        </p:txBody>
-      </p:sp>
-      <p:sp>
-        <p:nvSpPr>
-          <p:cNvPr id="14" name="text-88"/>
-          <p:cNvSpPr txBox="1"/>
-          <p:nvPr/>
-        </p:nvSpPr>
-        <p:spPr>
-          <a:xfrm>
-            <a:off x="6502400" y="2984500"/>
-            <a:ext cx="4572000" cy="508000"/>
-          </a:xfrm>
-          <a:prstGeom prst="rect">
-            <a:avLst/>
-          </a:prstGeom>
-          <a:noFill/>
-          <a:ln/>
-        </p:spPr>
-        <p:txBody>
-          <a:bodyPr wrap="square" lIns="0" tIns="0" rIns="0" bIns="0" rtlCol="0" anchor="t"/>
-          <a:lstStyle/>
-          <a:p>
-            <a:pPr indent="0" marL="0">
-              <a:buNone/>
-            </a:pPr>
-            <a:r>
-              <a:rPr lang="en-US" sz="1400" dirty="0">
-                <a:solidFill>
-                  <a:schemeClr val="accent5"/>
-                </a:solidFill>
-              </a:rPr>
-              <a:t>Маркетолог, частичная занятость · премиальный букинг, США</a:t>
-            </a:r>
-            <a:endParaRPr lang="en-US" sz="1400" dirty="0"/>
-          </a:p>
-        </p:txBody>
-      </p:sp>
-      <p:sp>
-        <p:nvSpPr>
-          <p:cNvPr id="15" name="text-89"/>
-          <p:cNvSpPr txBox="1"/>
-          <p:nvPr/>
-        </p:nvSpPr>
-        <p:spPr>
-          <a:xfrm>
-            <a:off x="6502400" y="3619500"/>
-            <a:ext cx="2032000" cy="482600"/>
-          </a:xfrm>
-          <a:prstGeom prst="rect">
-            <a:avLst/>
-          </a:prstGeom>
-          <a:noFill/>
-          <a:ln/>
-        </p:spPr>
-        <p:txBody>
-          <a:bodyPr wrap="square" lIns="0" tIns="0" rIns="0" bIns="0" rtlCol="0" anchor="t"/>
-          <a:lstStyle/>
-          <a:p>
-            <a:pPr indent="0" marL="0">
-              <a:buNone/>
-            </a:pPr>
-            <a:r>
-              <a:rPr lang="en-US" sz="2800" b="1" dirty="0">
-                <a:solidFill>
-                  <a:schemeClr val="accent1"/>
-                </a:solidFill>
-                <a:latin typeface="Arial" pitchFamily="34" charset="0"/>
-                <a:ea typeface="Arial" pitchFamily="34" charset="-122"/>
-                <a:cs typeface="Arial" pitchFamily="34" charset="-120"/>
-              </a:rPr>
-              <a:t>4,2</a:t>
-            </a:r>
-            <a:endParaRPr lang="en-US" sz="2800" dirty="0"/>
-          </a:p>
-        </p:txBody>
-      </p:sp>
-      <p:sp>
-        <p:nvSpPr>
-          <p:cNvPr id="16" name="text-90"/>
-          <p:cNvSpPr txBox="1"/>
-          <p:nvPr/>
-        </p:nvSpPr>
-        <p:spPr>
-          <a:xfrm>
-            <a:off x="6502400" y="4140200"/>
-            <a:ext cx="2032000" cy="254000"/>
-          </a:xfrm>
-          <a:prstGeom prst="rect">
-            <a:avLst/>
-          </a:prstGeom>
-          <a:noFill/>
-          <a:ln/>
-        </p:spPr>
-        <p:txBody>
-          <a:bodyPr wrap="square" lIns="0" tIns="0" rIns="0" bIns="0" rtlCol="0" anchor="t"/>
-          <a:lstStyle/>
-          <a:p>
-            <a:pPr indent="0" marL="0">
-              <a:buNone/>
-            </a:pPr>
-            <a:r>
-              <a:rPr lang="en-US" sz="1200" dirty="0">
-                <a:solidFill>
-                  <a:schemeClr val="tx2"/>
-                </a:solidFill>
-              </a:rPr>
-              <a:t>ROAS кампаний</a:t>
-            </a:r>
-            <a:endParaRPr lang="en-US" sz="1200" dirty="0"/>
-          </a:p>
-        </p:txBody>
-      </p:sp>
-      <p:sp>
-        <p:nvSpPr>
-          <p:cNvPr id="17" name="text-91"/>
-          <p:cNvSpPr txBox="1"/>
-          <p:nvPr/>
-        </p:nvSpPr>
-        <p:spPr>
-          <a:xfrm>
-            <a:off x="8661400" y="3619500"/>
-            <a:ext cx="2032000" cy="482600"/>
-          </a:xfrm>
-          <a:prstGeom prst="rect">
-            <a:avLst/>
-          </a:prstGeom>
-          <a:noFill/>
-          <a:ln/>
-        </p:spPr>
-        <p:txBody>
-          <a:bodyPr wrap="square" lIns="0" tIns="0" rIns="0" bIns="0" rtlCol="0" anchor="t"/>
-          <a:lstStyle/>
-          <a:p>
-            <a:pPr indent="0" marL="0">
-              <a:buNone/>
-            </a:pPr>
-            <a:r>
-              <a:rPr lang="en-US" sz="2800" b="1" dirty="0">
-                <a:solidFill>
-                  <a:schemeClr val="accent1"/>
-                </a:solidFill>
-                <a:latin typeface="Arial" pitchFamily="34" charset="0"/>
-                <a:ea typeface="Arial" pitchFamily="34" charset="-122"/>
-                <a:cs typeface="Arial" pitchFamily="34" charset="-120"/>
-              </a:rPr>
-              <a:t>+90%</a:t>
-            </a:r>
-            <a:endParaRPr lang="en-US" sz="2800" dirty="0"/>
-          </a:p>
-        </p:txBody>
-      </p:sp>
-      <p:sp>
-        <p:nvSpPr>
-          <p:cNvPr id="18" name="text-92"/>
-          <p:cNvSpPr txBox="1"/>
-          <p:nvPr/>
-        </p:nvSpPr>
-        <p:spPr>
-          <a:xfrm>
-            <a:off x="8661400" y="4140200"/>
-            <a:ext cx="2032000" cy="254000"/>
-          </a:xfrm>
-          <a:prstGeom prst="rect">
-            <a:avLst/>
-          </a:prstGeom>
-          <a:noFill/>
-          <a:ln/>
-        </p:spPr>
-        <p:txBody>
-          <a:bodyPr wrap="square" lIns="0" tIns="0" rIns="0" bIns="0" rtlCol="0" anchor="t"/>
-          <a:lstStyle/>
-          <a:p>
-            <a:pPr indent="0" marL="0">
-              <a:buNone/>
-            </a:pPr>
-            <a:r>
-              <a:rPr lang="en-US" sz="1200" dirty="0">
-                <a:solidFill>
-                  <a:schemeClr val="tx2"/>
+                  <a:schemeClr val="accent6"/>
                 </a:solidFill>
               </a:rPr>
               <a:t>органики за 5 месяцев</a:t>
-            </a:r>
-            <a:endParaRPr lang="en-US" sz="1200" dirty="0"/>
-          </a:p>
-        </p:txBody>
-      </p:sp>
-      <p:sp>
-        <p:nvSpPr>
-          <p:cNvPr id="19" name="text-93"/>
-          <p:cNvSpPr txBox="1"/>
-          <p:nvPr/>
-        </p:nvSpPr>
-        <p:spPr>
-          <a:xfrm>
-            <a:off x="6502400" y="4635500"/>
-            <a:ext cx="4572000" cy="635000"/>
-          </a:xfrm>
-          <a:prstGeom prst="rect">
-            <a:avLst/>
-          </a:prstGeom>
-          <a:noFill/>
-          <a:ln/>
-        </p:spPr>
-        <p:txBody>
-          <a:bodyPr wrap="square" lIns="0" tIns="0" rIns="0" bIns="0" rtlCol="0" anchor="t"/>
-          <a:lstStyle/>
-          <a:p>
-            <a:pPr indent="0" marL="0">
-              <a:buNone/>
-            </a:pPr>
-            <a:r>
-              <a:rPr lang="en-US" sz="1400" dirty="0">
-                <a:solidFill>
-                  <a:schemeClr val="tx2"/>
-                </a:solidFill>
-              </a:rPr>
-              <a:t>Англоязычный рынок, исследование аудитории, SEO и отчётность по GA.</a:t>
             </a:r>
             <a:endParaRPr lang="en-US" sz="1400" dirty="0"/>
           </a:p>
@@ -7622,7 +7344,7 @@
       </p:sp>
       <p:sp>
         <p:nvSpPr>
-          <p:cNvPr id="4" name="rule-94"/>
+          <p:cNvPr id="4" name="rule-87"/>
           <p:cNvSpPr/>
           <p:nvPr/>
         </p:nvSpPr>
@@ -7645,7 +7367,7 @@
       </p:sp>
       <p:sp>
         <p:nvSpPr>
-          <p:cNvPr id="5" name="text-95"/>
+          <p:cNvPr id="5" name="text-88"/>
           <p:cNvSpPr txBox="1"/>
           <p:nvPr/>
         </p:nvSpPr>
@@ -7681,7 +7403,7 @@
       </p:sp>
       <p:sp>
         <p:nvSpPr>
-          <p:cNvPr id="6" name="text-96"/>
+          <p:cNvPr id="6" name="text-89"/>
           <p:cNvSpPr txBox="1"/>
           <p:nvPr/>
         </p:nvSpPr>
@@ -7717,7 +7439,7 @@
       </p:sp>
       <p:sp>
         <p:nvSpPr>
-          <p:cNvPr id="7" name="rule-97"/>
+          <p:cNvPr id="7" name="rule-90"/>
           <p:cNvSpPr/>
           <p:nvPr/>
         </p:nvSpPr>
@@ -7740,7 +7462,7 @@
       </p:sp>
       <p:sp>
         <p:nvSpPr>
-          <p:cNvPr id="8" name="text-98"/>
+          <p:cNvPr id="8" name="text-91"/>
           <p:cNvSpPr txBox="1"/>
           <p:nvPr/>
         </p:nvSpPr>
@@ -7776,7 +7498,7 @@
       </p:sp>
       <p:sp>
         <p:nvSpPr>
-          <p:cNvPr id="9" name="text-99"/>
+          <p:cNvPr id="9" name="text-92"/>
           <p:cNvSpPr txBox="1"/>
           <p:nvPr/>
         </p:nvSpPr>
@@ -7812,7 +7534,7 @@
       </p:sp>
       <p:sp>
         <p:nvSpPr>
-          <p:cNvPr id="10" name="rule-100"/>
+          <p:cNvPr id="10" name="rule-93"/>
           <p:cNvSpPr/>
           <p:nvPr/>
         </p:nvSpPr>
@@ -7835,7 +7557,7 @@
       </p:sp>
       <p:sp>
         <p:nvSpPr>
-          <p:cNvPr id="11" name="text-101"/>
+          <p:cNvPr id="11" name="text-94"/>
           <p:cNvSpPr txBox="1"/>
           <p:nvPr/>
         </p:nvSpPr>
@@ -7871,7 +7593,7 @@
       </p:sp>
       <p:sp>
         <p:nvSpPr>
-          <p:cNvPr id="12" name="text-102"/>
+          <p:cNvPr id="12" name="text-95"/>
           <p:cNvSpPr txBox="1"/>
           <p:nvPr/>
         </p:nvSpPr>
@@ -7907,7 +7629,7 @@
       </p:sp>
       <p:sp>
         <p:nvSpPr>
-          <p:cNvPr id="13" name="rule-103"/>
+          <p:cNvPr id="13" name="rule-96"/>
           <p:cNvSpPr/>
           <p:nvPr/>
         </p:nvSpPr>
@@ -7930,7 +7652,7 @@
       </p:sp>
       <p:sp>
         <p:nvSpPr>
-          <p:cNvPr id="14" name="text-104"/>
+          <p:cNvPr id="14" name="text-97"/>
           <p:cNvSpPr txBox="1"/>
           <p:nvPr/>
         </p:nvSpPr>
@@ -7966,7 +7688,7 @@
       </p:sp>
       <p:sp>
         <p:nvSpPr>
-          <p:cNvPr id="15" name="text-105"/>
+          <p:cNvPr id="15" name="text-98"/>
           <p:cNvSpPr txBox="1"/>
           <p:nvPr/>
         </p:nvSpPr>
@@ -8002,7 +7724,7 @@
       </p:sp>
       <p:sp>
         <p:nvSpPr>
-          <p:cNvPr id="16" name="rule-106"/>
+          <p:cNvPr id="16" name="rule-99"/>
           <p:cNvSpPr/>
           <p:nvPr/>
         </p:nvSpPr>
@@ -8025,7 +7747,7 @@
       </p:sp>
       <p:sp>
         <p:nvSpPr>
-          <p:cNvPr id="17" name="text-107"/>
+          <p:cNvPr id="17" name="text-100"/>
           <p:cNvSpPr txBox="1"/>
           <p:nvPr/>
         </p:nvSpPr>
@@ -8061,7 +7783,7 @@
       </p:sp>
       <p:sp>
         <p:nvSpPr>
-          <p:cNvPr id="18" name="text-108"/>
+          <p:cNvPr id="18" name="text-101"/>
           <p:cNvSpPr txBox="1"/>
           <p:nvPr/>
         </p:nvSpPr>
@@ -8097,7 +7819,7 @@
       </p:sp>
       <p:sp>
         <p:nvSpPr>
-          <p:cNvPr id="19" name="rule-109"/>
+          <p:cNvPr id="19" name="rule-102"/>
           <p:cNvSpPr/>
           <p:nvPr/>
         </p:nvSpPr>
@@ -8120,7 +7842,7 @@
       </p:sp>
       <p:sp>
         <p:nvSpPr>
-          <p:cNvPr id="20" name="text-110"/>
+          <p:cNvPr id="20" name="text-103"/>
           <p:cNvSpPr txBox="1"/>
           <p:nvPr/>
         </p:nvSpPr>
@@ -8156,7 +7878,7 @@
       </p:sp>
       <p:sp>
         <p:nvSpPr>
-          <p:cNvPr id="21" name="text-111"/>
+          <p:cNvPr id="21" name="text-104"/>
           <p:cNvSpPr txBox="1"/>
           <p:nvPr/>
         </p:nvSpPr>
@@ -8341,7 +8063,7 @@
       </p:sp>
       <p:sp>
         <p:nvSpPr>
-          <p:cNvPr id="5" name="text-112"/>
+          <p:cNvPr id="5" name="text-105"/>
           <p:cNvSpPr txBox="1"/>
           <p:nvPr/>
         </p:nvSpPr>
@@ -8377,7 +8099,7 @@
       </p:sp>
       <p:sp>
         <p:nvSpPr>
-          <p:cNvPr id="6" name="pill-113"/>
+          <p:cNvPr id="6" name="pill-106"/>
           <p:cNvSpPr/>
           <p:nvPr/>
         </p:nvSpPr>
@@ -8399,7 +8121,7 @@
       </p:sp>
       <p:sp>
         <p:nvSpPr>
-          <p:cNvPr id="7" name="text-114"/>
+          <p:cNvPr id="7" name="text-107"/>
           <p:cNvSpPr txBox="1"/>
           <p:nvPr/>
         </p:nvSpPr>
@@ -8435,7 +8157,7 @@
       </p:sp>
       <p:sp>
         <p:nvSpPr>
-          <p:cNvPr id="8" name="pill-115"/>
+          <p:cNvPr id="8" name="pill-108"/>
           <p:cNvSpPr/>
           <p:nvPr/>
         </p:nvSpPr>
@@ -8457,7 +8179,7 @@
       </p:sp>
       <p:sp>
         <p:nvSpPr>
-          <p:cNvPr id="9" name="text-116"/>
+          <p:cNvPr id="9" name="text-109"/>
           <p:cNvSpPr txBox="1"/>
           <p:nvPr/>
         </p:nvSpPr>
@@ -8493,7 +8215,7 @@
       </p:sp>
       <p:sp>
         <p:nvSpPr>
-          <p:cNvPr id="10" name="pill-117"/>
+          <p:cNvPr id="10" name="pill-110"/>
           <p:cNvSpPr/>
           <p:nvPr/>
         </p:nvSpPr>
@@ -8515,7 +8237,7 @@
       </p:sp>
       <p:sp>
         <p:nvSpPr>
-          <p:cNvPr id="11" name="text-118"/>
+          <p:cNvPr id="11" name="text-111"/>
           <p:cNvSpPr txBox="1"/>
           <p:nvPr/>
         </p:nvSpPr>
@@ -8551,7 +8273,7 @@
       </p:sp>
       <p:sp>
         <p:nvSpPr>
-          <p:cNvPr id="12" name="pill-119"/>
+          <p:cNvPr id="12" name="pill-112"/>
           <p:cNvSpPr/>
           <p:nvPr/>
         </p:nvSpPr>
@@ -8573,7 +8295,7 @@
       </p:sp>
       <p:sp>
         <p:nvSpPr>
-          <p:cNvPr id="13" name="text-120"/>
+          <p:cNvPr id="13" name="text-113"/>
           <p:cNvSpPr txBox="1"/>
           <p:nvPr/>
         </p:nvSpPr>
@@ -8609,7 +8331,7 @@
       </p:sp>
       <p:sp>
         <p:nvSpPr>
-          <p:cNvPr id="14" name="pill-121"/>
+          <p:cNvPr id="14" name="pill-114"/>
           <p:cNvSpPr/>
           <p:nvPr/>
         </p:nvSpPr>
@@ -8631,7 +8353,7 @@
       </p:sp>
       <p:sp>
         <p:nvSpPr>
-          <p:cNvPr id="15" name="text-122"/>
+          <p:cNvPr id="15" name="text-115"/>
           <p:cNvSpPr txBox="1"/>
           <p:nvPr/>
         </p:nvSpPr>
@@ -8667,7 +8389,7 @@
       </p:sp>
       <p:sp>
         <p:nvSpPr>
-          <p:cNvPr id="16" name="pill-123"/>
+          <p:cNvPr id="16" name="pill-116"/>
           <p:cNvSpPr/>
           <p:nvPr/>
         </p:nvSpPr>
@@ -8689,7 +8411,7 @@
       </p:sp>
       <p:sp>
         <p:nvSpPr>
-          <p:cNvPr id="17" name="text-124"/>
+          <p:cNvPr id="17" name="text-117"/>
           <p:cNvSpPr txBox="1"/>
           <p:nvPr/>
         </p:nvSpPr>
@@ -8725,7 +8447,7 @@
       </p:sp>
       <p:sp>
         <p:nvSpPr>
-          <p:cNvPr id="18" name="text-125"/>
+          <p:cNvPr id="18" name="text-118"/>
           <p:cNvSpPr txBox="1"/>
           <p:nvPr/>
         </p:nvSpPr>
@@ -8761,7 +8483,7 @@
       </p:sp>
       <p:sp>
         <p:nvSpPr>
-          <p:cNvPr id="19" name="pill-126"/>
+          <p:cNvPr id="19" name="pill-119"/>
           <p:cNvSpPr/>
           <p:nvPr/>
         </p:nvSpPr>
@@ -8783,7 +8505,7 @@
       </p:sp>
       <p:sp>
         <p:nvSpPr>
-          <p:cNvPr id="20" name="text-127"/>
+          <p:cNvPr id="20" name="text-120"/>
           <p:cNvSpPr txBox="1"/>
           <p:nvPr/>
         </p:nvSpPr>
@@ -8819,7 +8541,7 @@
       </p:sp>
       <p:sp>
         <p:nvSpPr>
-          <p:cNvPr id="21" name="pill-128"/>
+          <p:cNvPr id="21" name="pill-121"/>
           <p:cNvSpPr/>
           <p:nvPr/>
         </p:nvSpPr>
@@ -8841,7 +8563,7 @@
       </p:sp>
       <p:sp>
         <p:nvSpPr>
-          <p:cNvPr id="22" name="text-129"/>
+          <p:cNvPr id="22" name="text-122"/>
           <p:cNvSpPr txBox="1"/>
           <p:nvPr/>
         </p:nvSpPr>
@@ -8877,7 +8599,7 @@
       </p:sp>
       <p:sp>
         <p:nvSpPr>
-          <p:cNvPr id="23" name="pill-130"/>
+          <p:cNvPr id="23" name="pill-123"/>
           <p:cNvSpPr/>
           <p:nvPr/>
         </p:nvSpPr>
@@ -8899,7 +8621,7 @@
       </p:sp>
       <p:sp>
         <p:nvSpPr>
-          <p:cNvPr id="24" name="text-131"/>
+          <p:cNvPr id="24" name="text-124"/>
           <p:cNvSpPr txBox="1"/>
           <p:nvPr/>
         </p:nvSpPr>
@@ -8935,7 +8657,7 @@
       </p:sp>
       <p:sp>
         <p:nvSpPr>
-          <p:cNvPr id="25" name="pill-132"/>
+          <p:cNvPr id="25" name="pill-125"/>
           <p:cNvSpPr/>
           <p:nvPr/>
         </p:nvSpPr>
@@ -8957,7 +8679,7 @@
       </p:sp>
       <p:sp>
         <p:nvSpPr>
-          <p:cNvPr id="26" name="text-133"/>
+          <p:cNvPr id="26" name="text-126"/>
           <p:cNvSpPr txBox="1"/>
           <p:nvPr/>
         </p:nvSpPr>
@@ -8993,7 +8715,7 @@
       </p:sp>
       <p:sp>
         <p:nvSpPr>
-          <p:cNvPr id="27" name="text-134"/>
+          <p:cNvPr id="27" name="text-127"/>
           <p:cNvSpPr txBox="1"/>
           <p:nvPr/>
         </p:nvSpPr>
@@ -9029,7 +8751,7 @@
       </p:sp>
       <p:sp>
         <p:nvSpPr>
-          <p:cNvPr id="28" name="pill-135"/>
+          <p:cNvPr id="28" name="pill-128"/>
           <p:cNvSpPr/>
           <p:nvPr/>
         </p:nvSpPr>
@@ -9053,7 +8775,7 @@
       </p:sp>
       <p:sp>
         <p:nvSpPr>
-          <p:cNvPr id="29" name="text-136"/>
+          <p:cNvPr id="29" name="text-129"/>
           <p:cNvSpPr txBox="1"/>
           <p:nvPr/>
         </p:nvSpPr>
@@ -9089,7 +8811,7 @@
       </p:sp>
       <p:sp>
         <p:nvSpPr>
-          <p:cNvPr id="30" name="pill-137"/>
+          <p:cNvPr id="30" name="pill-130"/>
           <p:cNvSpPr/>
           <p:nvPr/>
         </p:nvSpPr>
@@ -9113,7 +8835,7 @@
       </p:sp>
       <p:sp>
         <p:nvSpPr>
-          <p:cNvPr id="31" name="text-138"/>
+          <p:cNvPr id="31" name="text-131"/>
           <p:cNvSpPr txBox="1"/>
           <p:nvPr/>
         </p:nvSpPr>
@@ -9149,7 +8871,7 @@
       </p:sp>
       <p:sp>
         <p:nvSpPr>
-          <p:cNvPr id="32" name="pill-139"/>
+          <p:cNvPr id="32" name="pill-132"/>
           <p:cNvSpPr/>
           <p:nvPr/>
         </p:nvSpPr>
@@ -9173,7 +8895,7 @@
       </p:sp>
       <p:sp>
         <p:nvSpPr>
-          <p:cNvPr id="33" name="text-140"/>
+          <p:cNvPr id="33" name="text-133"/>
           <p:cNvSpPr txBox="1"/>
           <p:nvPr/>
         </p:nvSpPr>
@@ -9209,7 +8931,7 @@
       </p:sp>
       <p:sp>
         <p:nvSpPr>
-          <p:cNvPr id="34" name="pill-141"/>
+          <p:cNvPr id="34" name="pill-134"/>
           <p:cNvSpPr/>
           <p:nvPr/>
         </p:nvSpPr>
@@ -9233,7 +8955,7 @@
       </p:sp>
       <p:sp>
         <p:nvSpPr>
-          <p:cNvPr id="35" name="text-142"/>
+          <p:cNvPr id="35" name="text-135"/>
           <p:cNvSpPr txBox="1"/>
           <p:nvPr/>
         </p:nvSpPr>
@@ -9269,7 +8991,7 @@
       </p:sp>
       <p:sp>
         <p:nvSpPr>
-          <p:cNvPr id="36" name="pill-143"/>
+          <p:cNvPr id="36" name="pill-136"/>
           <p:cNvSpPr/>
           <p:nvPr/>
         </p:nvSpPr>
@@ -9293,7 +9015,7 @@
       </p:sp>
       <p:sp>
         <p:nvSpPr>
-          <p:cNvPr id="37" name="text-144"/>
+          <p:cNvPr id="37" name="text-137"/>
           <p:cNvSpPr txBox="1"/>
           <p:nvPr/>
         </p:nvSpPr>
@@ -9329,7 +9051,7 @@
       </p:sp>
       <p:sp>
         <p:nvSpPr>
-          <p:cNvPr id="38" name="pill-145"/>
+          <p:cNvPr id="38" name="pill-138"/>
           <p:cNvSpPr/>
           <p:nvPr/>
         </p:nvSpPr>
@@ -9353,7 +9075,7 @@
       </p:sp>
       <p:sp>
         <p:nvSpPr>
-          <p:cNvPr id="39" name="text-146"/>
+          <p:cNvPr id="39" name="text-139"/>
           <p:cNvSpPr txBox="1"/>
           <p:nvPr/>
         </p:nvSpPr>
@@ -9389,7 +9111,7 @@
       </p:sp>
       <p:sp>
         <p:nvSpPr>
-          <p:cNvPr id="40" name="pill-147"/>
+          <p:cNvPr id="40" name="pill-140"/>
           <p:cNvSpPr/>
           <p:nvPr/>
         </p:nvSpPr>
@@ -9413,7 +9135,7 @@
       </p:sp>
       <p:sp>
         <p:nvSpPr>
-          <p:cNvPr id="41" name="text-148"/>
+          <p:cNvPr id="41" name="text-141"/>
           <p:cNvSpPr txBox="1"/>
           <p:nvPr/>
         </p:nvSpPr>

--- a/presentation/Kangeldieva_SMM.pptx
+++ b/presentation/Kangeldieva_SMM.pptx
@@ -117,13 +117,13 @@
   <p:extLst>
     <p:ext uri="{521415D9-36F7-43E2-AB2F-B90AF26B5E84}">
       <p14:sectionLst xmlns:p14="http://schemas.microsoft.com/office/powerpoint/2010/main">
-        <p14:section name="Кто я" id="{58d39aa0-56f7-bef9-1af6-a555b6d126b5}">
+        <p14:section name="Кто я" id="{d6e69f4e-0694-4190-0685-8a2defcebd84}">
           <p14:sldIdLst>
             <p14:sldId id="256"/>
             <p14:sldId id="257"/>
           </p14:sldIdLst>
         </p14:section>
-        <p14:section name="Результаты и опыт" id="{e7890bd4-9617-996a-825a-42f69a9d7fe7}">
+        <p14:section name="Результаты и опыт" id="{83e34d7d-1109-c891-3667-576689c4dec4}">
           <p14:sldIdLst>
             <p14:sldId id="258"/>
             <p14:sldId id="259"/>
@@ -132,13 +132,13 @@
             <p14:sldId id="262"/>
           </p14:sldIdLst>
         </p14:section>
-        <p14:section name="Компетенции" id="{1b198af2-1d02-1573-2361-c3bae945c9e3}">
+        <p14:section name="Компетенции" id="{24a2e077-245b-707a-edc3-3889062d2f8d}">
           <p14:sldIdLst>
             <p14:sldId id="263"/>
             <p14:sldId id="264"/>
           </p14:sldIdLst>
         </p14:section>
-        <p14:section name="План и контакты" id="{85fb757b-bda2-e014-4280-bbf3648f365a}">
+        <p14:section name="План и контакты" id="{9478c98b-1869-28d4-2b9a-25aefc85d454}">
           <p14:sldIdLst>
             <p14:sldId id="265"/>
             <p14:sldId id="266"/>
@@ -1428,7 +1428,7 @@
           <a:p>
             <a:r>
               <a:rPr lang="en-US" dirty="0"/>
-              <a:t>Инструменты в квадратных скобках указаны предположительно: в резюме их нет. Оставить только те, которыми реально владеешь.</a:t>
+              <a:t/>
             </a:r>
             <a:endParaRPr lang="en-US" dirty="0"/>
           </a:p>
@@ -8063,7 +8063,7 @@
       </p:sp>
       <p:sp>
         <p:nvSpPr>
-          <p:cNvPr id="5" name="text-105"/>
+          <p:cNvPr id="4" name="text-105"/>
           <p:cNvSpPr txBox="1"/>
           <p:nvPr/>
         </p:nvSpPr>
@@ -8099,7 +8099,7 @@
       </p:sp>
       <p:sp>
         <p:nvSpPr>
-          <p:cNvPr id="6" name="pill-106"/>
+          <p:cNvPr id="5" name="pill-106"/>
           <p:cNvSpPr/>
           <p:nvPr/>
         </p:nvSpPr>
@@ -8121,7 +8121,7 @@
       </p:sp>
       <p:sp>
         <p:nvSpPr>
-          <p:cNvPr id="7" name="text-107"/>
+          <p:cNvPr id="6" name="text-107"/>
           <p:cNvSpPr txBox="1"/>
           <p:nvPr/>
         </p:nvSpPr>
@@ -8157,7 +8157,7 @@
       </p:sp>
       <p:sp>
         <p:nvSpPr>
-          <p:cNvPr id="8" name="pill-108"/>
+          <p:cNvPr id="7" name="pill-108"/>
           <p:cNvSpPr/>
           <p:nvPr/>
         </p:nvSpPr>
@@ -8179,7 +8179,7 @@
       </p:sp>
       <p:sp>
         <p:nvSpPr>
-          <p:cNvPr id="9" name="text-109"/>
+          <p:cNvPr id="8" name="text-109"/>
           <p:cNvSpPr txBox="1"/>
           <p:nvPr/>
         </p:nvSpPr>
@@ -8215,7 +8215,7 @@
       </p:sp>
       <p:sp>
         <p:nvSpPr>
-          <p:cNvPr id="10" name="pill-110"/>
+          <p:cNvPr id="9" name="pill-110"/>
           <p:cNvSpPr/>
           <p:nvPr/>
         </p:nvSpPr>
@@ -8237,7 +8237,7 @@
       </p:sp>
       <p:sp>
         <p:nvSpPr>
-          <p:cNvPr id="11" name="text-111"/>
+          <p:cNvPr id="10" name="text-111"/>
           <p:cNvSpPr txBox="1"/>
           <p:nvPr/>
         </p:nvSpPr>
@@ -8273,7 +8273,7 @@
       </p:sp>
       <p:sp>
         <p:nvSpPr>
-          <p:cNvPr id="12" name="pill-112"/>
+          <p:cNvPr id="11" name="pill-112"/>
           <p:cNvSpPr/>
           <p:nvPr/>
         </p:nvSpPr>
@@ -8295,7 +8295,7 @@
       </p:sp>
       <p:sp>
         <p:nvSpPr>
-          <p:cNvPr id="13" name="text-113"/>
+          <p:cNvPr id="12" name="text-113"/>
           <p:cNvSpPr txBox="1"/>
           <p:nvPr/>
         </p:nvSpPr>
@@ -8331,7 +8331,7 @@
       </p:sp>
       <p:sp>
         <p:nvSpPr>
-          <p:cNvPr id="14" name="pill-114"/>
+          <p:cNvPr id="13" name="pill-114"/>
           <p:cNvSpPr/>
           <p:nvPr/>
         </p:nvSpPr>
@@ -8353,7 +8353,7 @@
       </p:sp>
       <p:sp>
         <p:nvSpPr>
-          <p:cNvPr id="15" name="text-115"/>
+          <p:cNvPr id="14" name="text-115"/>
           <p:cNvSpPr txBox="1"/>
           <p:nvPr/>
         </p:nvSpPr>
@@ -8389,7 +8389,7 @@
       </p:sp>
       <p:sp>
         <p:nvSpPr>
-          <p:cNvPr id="16" name="pill-116"/>
+          <p:cNvPr id="15" name="pill-116"/>
           <p:cNvSpPr/>
           <p:nvPr/>
         </p:nvSpPr>
@@ -8411,7 +8411,7 @@
       </p:sp>
       <p:sp>
         <p:nvSpPr>
-          <p:cNvPr id="17" name="text-117"/>
+          <p:cNvPr id="16" name="text-117"/>
           <p:cNvSpPr txBox="1"/>
           <p:nvPr/>
         </p:nvSpPr>
@@ -8447,7 +8447,7 @@
       </p:sp>
       <p:sp>
         <p:nvSpPr>
-          <p:cNvPr id="18" name="text-118"/>
+          <p:cNvPr id="17" name="text-118"/>
           <p:cNvSpPr txBox="1"/>
           <p:nvPr/>
         </p:nvSpPr>
@@ -8483,7 +8483,7 @@
       </p:sp>
       <p:sp>
         <p:nvSpPr>
-          <p:cNvPr id="19" name="pill-119"/>
+          <p:cNvPr id="18" name="pill-119"/>
           <p:cNvSpPr/>
           <p:nvPr/>
         </p:nvSpPr>
@@ -8505,7 +8505,7 @@
       </p:sp>
       <p:sp>
         <p:nvSpPr>
-          <p:cNvPr id="20" name="text-120"/>
+          <p:cNvPr id="19" name="text-120"/>
           <p:cNvSpPr txBox="1"/>
           <p:nvPr/>
         </p:nvSpPr>
@@ -8541,14 +8541,14 @@
       </p:sp>
       <p:sp>
         <p:nvSpPr>
-          <p:cNvPr id="21" name="pill-121"/>
+          <p:cNvPr id="20" name="pill-121"/>
           <p:cNvSpPr/>
           <p:nvPr/>
         </p:nvSpPr>
         <p:spPr>
           <a:xfrm>
             <a:off x="3917950" y="3302000"/>
-            <a:ext cx="1016000" cy="381000"/>
+            <a:ext cx="850900" cy="381000"/>
           </a:xfrm>
           <a:prstGeom prst="roundRect">
             <a:avLst>
@@ -8563,14 +8563,14 @@
       </p:sp>
       <p:sp>
         <p:nvSpPr>
-          <p:cNvPr id="22" name="text-122"/>
+          <p:cNvPr id="21" name="text-122"/>
           <p:cNvSpPr txBox="1"/>
           <p:nvPr/>
         </p:nvSpPr>
         <p:spPr>
           <a:xfrm>
             <a:off x="3917950" y="3302000"/>
-            <a:ext cx="1016000" cy="381000"/>
+            <a:ext cx="850900" cy="381000"/>
           </a:xfrm>
           <a:prstGeom prst="rect">
             <a:avLst/>
@@ -8591,7 +8591,7 @@
                   <a:schemeClr val="accent3"/>
                 </a:solidFill>
               </a:rPr>
-              <a:t>[CapCut]</a:t>
+              <a:t>CapCut</a:t>
             </a:r>
             <a:endParaRPr lang="en-US" sz="1300" dirty="0"/>
           </a:p>
@@ -8599,14 +8599,14 @@
       </p:sp>
       <p:sp>
         <p:nvSpPr>
-          <p:cNvPr id="23" name="pill-123"/>
+          <p:cNvPr id="22" name="pill-123"/>
           <p:cNvSpPr/>
           <p:nvPr/>
         </p:nvSpPr>
         <p:spPr>
           <a:xfrm>
-            <a:off x="5035550" y="3302000"/>
-            <a:ext cx="933450" cy="381000"/>
+            <a:off x="4870450" y="3302000"/>
+            <a:ext cx="768350" cy="381000"/>
           </a:xfrm>
           <a:prstGeom prst="roundRect">
             <a:avLst>
@@ -8621,14 +8621,14 @@
       </p:sp>
       <p:sp>
         <p:nvSpPr>
-          <p:cNvPr id="24" name="text-124"/>
-          <p:cNvSpPr txBox="1"/>
-          <p:nvPr/>
-        </p:nvSpPr>
-        <p:spPr>
-          <a:xfrm>
-            <a:off x="5035550" y="3302000"/>
-            <a:ext cx="933450" cy="381000"/>
+          <p:cNvPr id="23" name="text-124"/>
+          <p:cNvSpPr txBox="1"/>
+          <p:nvPr/>
+        </p:nvSpPr>
+        <p:spPr>
+          <a:xfrm>
+            <a:off x="4870450" y="3302000"/>
+            <a:ext cx="768350" cy="381000"/>
           </a:xfrm>
           <a:prstGeom prst="rect">
             <a:avLst/>
@@ -8649,7 +8649,7 @@
                   <a:schemeClr val="accent3"/>
                 </a:solidFill>
               </a:rPr>
-              <a:t>[Canva]</a:t>
+              <a:t>Canva</a:t>
             </a:r>
             <a:endParaRPr lang="en-US" sz="1300" dirty="0"/>
           </a:p>
@@ -8657,14 +8657,14 @@
       </p:sp>
       <p:sp>
         <p:nvSpPr>
-          <p:cNvPr id="25" name="pill-125"/>
+          <p:cNvPr id="24" name="pill-125"/>
           <p:cNvSpPr/>
           <p:nvPr/>
         </p:nvSpPr>
         <p:spPr>
           <a:xfrm>
-            <a:off x="6070600" y="3302000"/>
-            <a:ext cx="1924050" cy="381000"/>
+            <a:off x="5740400" y="3302000"/>
+            <a:ext cx="1758950" cy="381000"/>
           </a:xfrm>
           <a:prstGeom prst="roundRect">
             <a:avLst>
@@ -8679,14 +8679,14 @@
       </p:sp>
       <p:sp>
         <p:nvSpPr>
-          <p:cNvPr id="26" name="text-126"/>
-          <p:cNvSpPr txBox="1"/>
-          <p:nvPr/>
-        </p:nvSpPr>
-        <p:spPr>
-          <a:xfrm>
-            <a:off x="6070600" y="3302000"/>
-            <a:ext cx="1924050" cy="381000"/>
+          <p:cNvPr id="25" name="text-126"/>
+          <p:cNvSpPr txBox="1"/>
+          <p:nvPr/>
+        </p:nvSpPr>
+        <p:spPr>
+          <a:xfrm>
+            <a:off x="5740400" y="3302000"/>
+            <a:ext cx="1758950" cy="381000"/>
           </a:xfrm>
           <a:prstGeom prst="rect">
             <a:avLst/>
@@ -8707,7 +8707,7 @@
                   <a:schemeClr val="accent3"/>
                 </a:solidFill>
               </a:rPr>
-              <a:t>[Premiere / InShot]</a:t>
+              <a:t>Premiere / InShot</a:t>
             </a:r>
             <a:endParaRPr lang="en-US" sz="1300" dirty="0"/>
           </a:p>
@@ -8715,7 +8715,7 @@
       </p:sp>
       <p:sp>
         <p:nvSpPr>
-          <p:cNvPr id="27" name="text-127"/>
+          <p:cNvPr id="26" name="text-127"/>
           <p:cNvSpPr txBox="1"/>
           <p:nvPr/>
         </p:nvSpPr>
@@ -8751,7 +8751,7 @@
       </p:sp>
       <p:sp>
         <p:nvSpPr>
-          <p:cNvPr id="28" name="pill-128"/>
+          <p:cNvPr id="27" name="pill-128"/>
           <p:cNvSpPr/>
           <p:nvPr/>
         </p:nvSpPr>
@@ -8775,7 +8775,7 @@
       </p:sp>
       <p:sp>
         <p:nvSpPr>
-          <p:cNvPr id="29" name="text-129"/>
+          <p:cNvPr id="28" name="text-129"/>
           <p:cNvSpPr txBox="1"/>
           <p:nvPr/>
         </p:nvSpPr>
@@ -8811,7 +8811,7 @@
       </p:sp>
       <p:sp>
         <p:nvSpPr>
-          <p:cNvPr id="30" name="pill-130"/>
+          <p:cNvPr id="29" name="pill-130"/>
           <p:cNvSpPr/>
           <p:nvPr/>
         </p:nvSpPr>
@@ -8835,7 +8835,7 @@
       </p:sp>
       <p:sp>
         <p:nvSpPr>
-          <p:cNvPr id="31" name="text-131"/>
+          <p:cNvPr id="30" name="text-131"/>
           <p:cNvSpPr txBox="1"/>
           <p:nvPr/>
         </p:nvSpPr>
@@ -8871,7 +8871,7 @@
       </p:sp>
       <p:sp>
         <p:nvSpPr>
-          <p:cNvPr id="32" name="pill-132"/>
+          <p:cNvPr id="31" name="pill-132"/>
           <p:cNvSpPr/>
           <p:nvPr/>
         </p:nvSpPr>
@@ -8895,7 +8895,7 @@
       </p:sp>
       <p:sp>
         <p:nvSpPr>
-          <p:cNvPr id="33" name="text-133"/>
+          <p:cNvPr id="32" name="text-133"/>
           <p:cNvSpPr txBox="1"/>
           <p:nvPr/>
         </p:nvSpPr>
@@ -8931,7 +8931,7 @@
       </p:sp>
       <p:sp>
         <p:nvSpPr>
-          <p:cNvPr id="34" name="pill-134"/>
+          <p:cNvPr id="33" name="pill-134"/>
           <p:cNvSpPr/>
           <p:nvPr/>
         </p:nvSpPr>
@@ -8955,7 +8955,7 @@
       </p:sp>
       <p:sp>
         <p:nvSpPr>
-          <p:cNvPr id="35" name="text-135"/>
+          <p:cNvPr id="34" name="text-135"/>
           <p:cNvSpPr txBox="1"/>
           <p:nvPr/>
         </p:nvSpPr>
@@ -8991,7 +8991,7 @@
       </p:sp>
       <p:sp>
         <p:nvSpPr>
-          <p:cNvPr id="36" name="pill-136"/>
+          <p:cNvPr id="35" name="pill-136"/>
           <p:cNvSpPr/>
           <p:nvPr/>
         </p:nvSpPr>
@@ -9015,7 +9015,7 @@
       </p:sp>
       <p:sp>
         <p:nvSpPr>
-          <p:cNvPr id="37" name="text-137"/>
+          <p:cNvPr id="36" name="text-137"/>
           <p:cNvSpPr txBox="1"/>
           <p:nvPr/>
         </p:nvSpPr>
@@ -9051,7 +9051,7 @@
       </p:sp>
       <p:sp>
         <p:nvSpPr>
-          <p:cNvPr id="38" name="pill-138"/>
+          <p:cNvPr id="37" name="pill-138"/>
           <p:cNvSpPr/>
           <p:nvPr/>
         </p:nvSpPr>
@@ -9075,7 +9075,7 @@
       </p:sp>
       <p:sp>
         <p:nvSpPr>
-          <p:cNvPr id="39" name="text-139"/>
+          <p:cNvPr id="38" name="text-139"/>
           <p:cNvSpPr txBox="1"/>
           <p:nvPr/>
         </p:nvSpPr>
@@ -9111,7 +9111,7 @@
       </p:sp>
       <p:sp>
         <p:nvSpPr>
-          <p:cNvPr id="40" name="pill-140"/>
+          <p:cNvPr id="39" name="pill-140"/>
           <p:cNvSpPr/>
           <p:nvPr/>
         </p:nvSpPr>
@@ -9135,7 +9135,7 @@
       </p:sp>
       <p:sp>
         <p:nvSpPr>
-          <p:cNvPr id="41" name="text-141"/>
+          <p:cNvPr id="40" name="text-141"/>
           <p:cNvSpPr txBox="1"/>
           <p:nvPr/>
         </p:nvSpPr>

--- a/presentation/Kangeldieva_SMM.pptx
+++ b/presentation/Kangeldieva_SMM.pptx
@@ -15,10 +15,9 @@
     <p:sldId id="263" r:id="rId9"/>
     <p:sldId id="264" r:id="rId10"/>
     <p:sldId id="265" r:id="rId11"/>
-    <p:sldId id="266" r:id="rId12"/>
   </p:sldIdLst>
   <p:notesMasterIdLst>
-    <p:notesMasterId r:id="rId13"/>
+    <p:notesMasterId r:id="rId12"/>
   </p:notesMasterIdLst>
   <p:sldSz cx="12192000" cy="6858000"/>
   <p:notesSz cx="6858000" cy="12192000"/>
@@ -117,31 +116,30 @@
   <p:extLst>
     <p:ext uri="{521415D9-36F7-43E2-AB2F-B90AF26B5E84}">
       <p14:sectionLst xmlns:p14="http://schemas.microsoft.com/office/powerpoint/2010/main">
-        <p14:section name="Кто я" id="{d6e69f4e-0694-4190-0685-8a2defcebd84}">
+        <p14:section name="Кто я" id="{1c131640-0572-2375-8759-d2e0d6148f32}">
           <p14:sldIdLst>
             <p14:sldId id="256"/>
             <p14:sldId id="257"/>
           </p14:sldIdLst>
         </p14:section>
-        <p14:section name="Результаты и опыт" id="{83e34d7d-1109-c891-3667-576689c4dec4}">
+        <p14:section name="Результаты и опыт" id="{4217deab-0574-941e-8aec-015a2d56393e}">
           <p14:sldIdLst>
             <p14:sldId id="258"/>
             <p14:sldId id="259"/>
             <p14:sldId id="260"/>
             <p14:sldId id="261"/>
-            <p14:sldId id="262"/>
           </p14:sldIdLst>
         </p14:section>
-        <p14:section name="Компетенции" id="{24a2e077-245b-707a-edc3-3889062d2f8d}">
+        <p14:section name="Компетенции" id="{67e2439b-c6d5-864b-bc57-051ab45478da}">
           <p14:sldIdLst>
+            <p14:sldId id="262"/>
             <p14:sldId id="263"/>
-            <p14:sldId id="264"/>
           </p14:sldIdLst>
         </p14:section>
-        <p14:section name="План и контакты" id="{9478c98b-1869-28d4-2b9a-25aefc85d454}">
+        <p14:section name="План и контакты" id="{5cbd5e28-f723-a63c-703b-b25a540843ad}">
           <p14:sldIdLst>
+            <p14:sldId id="264"/>
             <p14:sldId id="265"/>
-            <p14:sldId id="266"/>
           </p14:sldIdLst>
         </p14:section>
       </p14:sectionLst>
@@ -548,7 +546,7 @@
           <a:p>
             <a:r>
               <a:rPr lang="en-US" dirty="0"/>
-              <a:t>Короткое представление: имя, специализация, одна фраза о подходе. Плейсхолдер справа заменить на фото.</a:t>
+              <a:t>Короткое представление: имя, специализация, площадки. Плейсхолдер справа заменить на фото.</a:t>
             </a:r>
             <a:endParaRPr lang="en-US" dirty="0"/>
           </a:p>
@@ -678,94 +676,6 @@
 </p:notes>
 </file>
 
-<file path=ppt/notesSlides/notesSlide11.xml><?xml version="1.0" encoding="utf-8"?>
-<p:notes xmlns:a="http://schemas.openxmlformats.org/drawingml/2006/main" xmlns:r="http://schemas.openxmlformats.org/officeDocument/2006/relationships" xmlns:p="http://schemas.openxmlformats.org/presentationml/2006/main">
-  <p:cSld>
-    <p:spTree>
-      <p:nvGrpSpPr>
-        <p:cNvPr id="1" name=""/>
-        <p:cNvGrpSpPr/>
-        <p:nvPr/>
-      </p:nvGrpSpPr>
-      <p:grpSpPr>
-        <a:xfrm>
-          <a:off x="0" y="0"/>
-          <a:ext cx="0" cy="0"/>
-          <a:chOff x="0" y="0"/>
-          <a:chExt cx="0" cy="0"/>
-        </a:xfrm>
-      </p:grpSpPr>
-      <p:sp>
-        <p:nvSpPr>
-          <p:cNvPr id="2" name="Slide Image Placeholder 1"/>
-          <p:cNvSpPr>
-            <a:spLocks noGrp="1" noRot="1" noChangeAspect="1"/>
-          </p:cNvSpPr>
-          <p:nvPr>
-            <p:ph type="sldImg"/>
-          </p:nvPr>
-        </p:nvSpPr>
-        <p:spPr/>
-      </p:sp>
-      <p:sp>
-        <p:nvSpPr>
-          <p:cNvPr id="3" name="Notes Placeholder 2"/>
-          <p:cNvSpPr>
-            <a:spLocks noGrp="1"/>
-          </p:cNvSpPr>
-          <p:nvPr>
-            <p:ph type="body" idx="1"/>
-          </p:nvPr>
-        </p:nvSpPr>
-        <p:spPr/>
-        <p:txBody>
-          <a:bodyPr/>
-          <a:lstStyle/>
-          <a:p>
-            <a:r>
-              <a:rPr lang="en-US" dirty="0"/>
-              <a:t/>
-            </a:r>
-            <a:endParaRPr lang="en-US" dirty="0"/>
-          </a:p>
-        </p:txBody>
-      </p:sp>
-      <p:sp>
-        <p:nvSpPr>
-          <p:cNvPr id="4" name="Slide Number Placeholder 3"/>
-          <p:cNvSpPr>
-            <a:spLocks noGrp="1"/>
-          </p:cNvSpPr>
-          <p:nvPr>
-            <p:ph type="sldNum" sz="quarter" idx="10"/>
-          </p:nvPr>
-        </p:nvSpPr>
-        <p:spPr/>
-        <p:txBody>
-          <a:bodyPr/>
-          <a:lstStyle/>
-          <a:p>
-            <a:fld id="{F7021451-1387-4CA6-816F-3879F97B5CBC}" type="slidenum">
-              <a:rPr lang="en-US"/>
-              <a:t>11</a:t>
-            </a:fld>
-            <a:endParaRPr lang="en-US"/>
-          </a:p>
-        </p:txBody>
-      </p:sp>
-    </p:spTree>
-    <p:extLst>
-      <p:ext uri="{BB962C8B-B14F-4D97-AF65-F5344CB8AC3E}">
-        <p14:creationId xmlns:p14="http://schemas.microsoft.com/office/powerpoint/2010/main" val="1024086991"/>
-      </p:ext>
-    </p:extLst>
-  </p:cSld>
-  <p:clrMapOvr>
-    <a:masterClrMapping/>
-  </p:clrMapOvr>
-</p:notes>
-</file>
-
 <file path=ppt/notesSlides/notesSlide2.xml><?xml version="1.0" encoding="utf-8"?>
 <p:notes xmlns:a="http://schemas.openxmlformats.org/drawingml/2006/main" xmlns:r="http://schemas.openxmlformats.org/officeDocument/2006/relationships" xmlns:p="http://schemas.openxmlformats.org/presentationml/2006/main">
   <p:cSld>
@@ -900,7 +810,7 @@
           <a:p>
             <a:r>
               <a:rPr lang="en-US" dirty="0"/>
-              <a:t>Цифры оценочные (реалистичные ориентиры). Перед отправкой сверить с реальными данными и быть готовой объяснить, как каждая получена.</a:t>
+              <a:t/>
             </a:r>
             <a:endParaRPr lang="en-US" dirty="0"/>
           </a:p>
@@ -2520,7 +2430,7 @@
                   <a:schemeClr val="accent1"/>
                 </a:solidFill>
               </a:rPr>
-              <a:t>SMM · КОНТЕНТ · КОРОТКИЕ ВИДЕО</a:t>
+              <a:t>SMM-МЕНЕДЖЕР · 3+ ГОДА ОПЫТА</a:t>
             </a:r>
             <a:endParaRPr lang="en-US" sz="1400" dirty="0"/>
           </a:p>
@@ -2597,7 +2507,7 @@
         <p:spPr>
           <a:xfrm>
             <a:off x="812800" y="3873500"/>
-            <a:ext cx="6223000" cy="1079500"/>
+            <a:ext cx="6350000" cy="1079500"/>
           </a:xfrm>
           <a:prstGeom prst="rect">
             <a:avLst/>
@@ -2621,7 +2531,7 @@
                   <a:schemeClr val="tx2"/>
                 </a:solidFill>
               </a:rPr>
-              <a:t>SMM-специалист и маркетолог. Делаю контент, который набирает охваты и превращается в продажи.</a:t>
+              <a:t>Instagram · TikTok · Telegram · Facebook · Threads. Стратегия, сценарии, съёмка и монтаж коротких видео.</a:t>
             </a:r>
             <a:endParaRPr lang="en-US" sz="2000" dirty="0"/>
           </a:p>
@@ -2694,7 +2604,7 @@
         <p:spPr>
           <a:xfrm>
             <a:off x="3060700" y="5143500"/>
-            <a:ext cx="2984500" cy="381000"/>
+            <a:ext cx="3302000" cy="381000"/>
           </a:xfrm>
           <a:prstGeom prst="roundRect">
             <a:avLst>
@@ -2718,7 +2628,7 @@
         <p:spPr>
           <a:xfrm>
             <a:off x="3060700" y="5143500"/>
-            <a:ext cx="2984500" cy="381000"/>
+            <a:ext cx="3302000" cy="381000"/>
           </a:xfrm>
           <a:prstGeom prst="rect">
             <a:avLst/>
@@ -2739,7 +2649,7 @@
                   <a:schemeClr val="tx1"/>
                 </a:solidFill>
               </a:rPr>
-              <a:t>melissakiiiiim@gmail.com</a:t>
+              <a:t>melisakangeldieva@icloud.com</a:t>
             </a:r>
             <a:endParaRPr lang="en-US" sz="1300" dirty="0"/>
           </a:p>
@@ -2870,16 +2780,14 @@
       </p:grpSpPr>
       <p:sp>
         <p:nvSpPr>
-          <p:cNvPr id="2" name="Text 1"/>
-          <p:cNvSpPr/>
-          <p:nvPr>
-            <p:ph idx="101" type="body" hasCustomPrompt="1"/>
-          </p:nvPr>
-        </p:nvSpPr>
-        <p:spPr>
-          <a:xfrm>
-            <a:off x="812800" y="762000"/>
-            <a:ext cx="10566400" cy="304800"/>
+          <p:cNvPr id="2" name="text-140"/>
+          <p:cNvSpPr txBox="1"/>
+          <p:nvPr/>
+        </p:nvSpPr>
+        <p:spPr>
+          <a:xfrm>
+            <a:off x="812800" y="1587500"/>
+            <a:ext cx="5080000" cy="279400"/>
           </a:xfrm>
           <a:prstGeom prst="rect">
             <a:avLst/>
@@ -2897,10 +2805,10 @@
             <a:r>
               <a:rPr lang="en-US" sz="1400" b="1" spc="400" kern="0" dirty="0">
                 <a:solidFill>
-                  <a:schemeClr val="accent1"/>
-                </a:solidFill>
-              </a:rPr>
-              <a:t>ПЛАН ДЛЯ KOVER SCHOOL</a:t>
+                  <a:schemeClr val="accent2"/>
+                </a:solidFill>
+              </a:rPr>
+              <a:t>КОНТАКТЫ</a:t>
             </a:r>
             <a:endParaRPr lang="en-US" sz="1400" dirty="0"/>
           </a:p>
@@ -2908,612 +2816,41 @@
       </p:sp>
       <p:sp>
         <p:nvSpPr>
-          <p:cNvPr id="3" name="Text 1"/>
-          <p:cNvSpPr/>
-          <p:nvPr>
-            <p:ph idx="102" type="title" hasCustomPrompt="1"/>
-          </p:nvPr>
-        </p:nvSpPr>
-        <p:spPr>
-          <a:xfrm>
-            <a:off x="812800" y="1117600"/>
-            <a:ext cx="10566400" cy="1079500"/>
-          </a:xfrm>
-          <a:prstGeom prst="rect">
-            <a:avLst/>
-          </a:prstGeom>
-          <a:noFill/>
-          <a:ln/>
-        </p:spPr>
-        <p:txBody>
-          <a:bodyPr wrap="square" lIns="0" tIns="0" rIns="0" bIns="0" rtlCol="0" anchor="t"/>
-          <a:lstStyle/>
-          <a:p>
-            <a:pPr algn="l" indent="0" marL="0">
-              <a:buNone/>
-            </a:pPr>
-            <a:r>
-              <a:rPr lang="en-US" sz="3200" b="1" dirty="0">
-                <a:solidFill>
-                  <a:schemeClr val="tx1"/>
+          <p:cNvPr id="3" name="text-141"/>
+          <p:cNvSpPr txBox="1"/>
+          <p:nvPr/>
+        </p:nvSpPr>
+        <p:spPr>
+          <a:xfrm>
+            <a:off x="812800" y="2032000"/>
+            <a:ext cx="10566400" cy="1524000"/>
+          </a:xfrm>
+          <a:prstGeom prst="rect">
+            <a:avLst/>
+          </a:prstGeom>
+          <a:noFill/>
+          <a:ln/>
+        </p:spPr>
+        <p:txBody>
+          <a:bodyPr wrap="square" lIns="0" tIns="0" rIns="0" bIns="0" rtlCol="0" anchor="t"/>
+          <a:lstStyle/>
+          <a:p>
+            <a:pPr indent="0" marL="0">
+              <a:buNone/>
+            </a:pPr>
+            <a:r>
+              <a:rPr lang="en-US" sz="4400" b="1" dirty="0">
+                <a:solidFill>
+                  <a:schemeClr val="bg1"/>
                 </a:solidFill>
                 <a:latin typeface="Arial" pitchFamily="34" charset="0"/>
                 <a:ea typeface="Arial" pitchFamily="34" charset="-122"/>
                 <a:cs typeface="Arial" pitchFamily="34" charset="-120"/>
               </a:rPr>
-              <a:t>Первые 60 дней в роли</a:t>
-            </a:r>
-            <a:endParaRPr lang="en-US" sz="3200" dirty="0"/>
-          </a:p>
-        </p:txBody>
-      </p:sp>
-      <p:sp>
-        <p:nvSpPr>
-          <p:cNvPr id="4" name="card-142"/>
-          <p:cNvSpPr/>
-          <p:nvPr/>
-        </p:nvSpPr>
-        <p:spPr>
-          <a:xfrm>
-            <a:off x="812800" y="2286000"/>
-            <a:ext cx="3384550" cy="2476500"/>
-          </a:xfrm>
-          <a:prstGeom prst="roundRect">
-            <a:avLst>
-              <a:gd name="adj" fmla="val 6154"/>
-            </a:avLst>
-          </a:prstGeom>
-          <a:solidFill>
-            <a:schemeClr val="accent3"/>
-          </a:solidFill>
-          <a:ln w="9525">
-            <a:solidFill>
-              <a:schemeClr val="accent4"/>
-            </a:solidFill>
-            <a:prstDash val="solid"/>
-          </a:ln>
-        </p:spPr>
-      </p:sp>
-      <p:sp>
-        <p:nvSpPr>
-          <p:cNvPr id="5" name="text-143"/>
-          <p:cNvSpPr txBox="1"/>
-          <p:nvPr/>
-        </p:nvSpPr>
-        <p:spPr>
-          <a:xfrm>
-            <a:off x="1066800" y="2540000"/>
-            <a:ext cx="2876550" cy="228600"/>
-          </a:xfrm>
-          <a:prstGeom prst="rect">
-            <a:avLst/>
-          </a:prstGeom>
-          <a:noFill/>
-          <a:ln/>
-        </p:spPr>
-        <p:txBody>
-          <a:bodyPr wrap="square" lIns="0" tIns="0" rIns="0" bIns="0" rtlCol="0" anchor="t"/>
-          <a:lstStyle/>
-          <a:p>
-            <a:pPr indent="0" marL="0">
-              <a:buNone/>
-            </a:pPr>
-            <a:r>
-              <a:rPr lang="en-US" sz="1200" b="1" spc="200" kern="0" dirty="0">
-                <a:solidFill>
-                  <a:schemeClr val="accent1"/>
-                </a:solidFill>
-              </a:rPr>
-              <a:t>НЕДЕЛИ 1–2</a:t>
-            </a:r>
-            <a:endParaRPr lang="en-US" sz="1200" dirty="0"/>
-          </a:p>
-        </p:txBody>
-      </p:sp>
-      <p:sp>
-        <p:nvSpPr>
-          <p:cNvPr id="6" name="text-144"/>
-          <p:cNvSpPr txBox="1"/>
-          <p:nvPr/>
-        </p:nvSpPr>
-        <p:spPr>
-          <a:xfrm>
-            <a:off x="1066800" y="2844800"/>
-            <a:ext cx="2876550" cy="355600"/>
-          </a:xfrm>
-          <a:prstGeom prst="rect">
-            <a:avLst/>
-          </a:prstGeom>
-          <a:noFill/>
-          <a:ln/>
-        </p:spPr>
-        <p:txBody>
-          <a:bodyPr wrap="square" lIns="0" tIns="0" rIns="0" bIns="0" rtlCol="0" anchor="t"/>
-          <a:lstStyle/>
-          <a:p>
-            <a:pPr indent="0" marL="0">
-              <a:buNone/>
-            </a:pPr>
-            <a:r>
-              <a:rPr lang="en-US" sz="1800" b="1" dirty="0">
-                <a:solidFill>
-                  <a:schemeClr val="tx1"/>
-                </a:solidFill>
-              </a:rPr>
-              <a:t>Аудит</a:t>
-            </a:r>
-            <a:endParaRPr lang="en-US" sz="1800" dirty="0"/>
-          </a:p>
-        </p:txBody>
-      </p:sp>
-      <p:sp>
-        <p:nvSpPr>
-          <p:cNvPr id="7" name="text-145"/>
-          <p:cNvSpPr txBox="1"/>
-          <p:nvPr/>
-        </p:nvSpPr>
-        <p:spPr>
-          <a:xfrm>
-            <a:off x="1066800" y="3302000"/>
-            <a:ext cx="2876550" cy="1333500"/>
-          </a:xfrm>
-          <a:prstGeom prst="rect">
-            <a:avLst/>
-          </a:prstGeom>
-          <a:noFill/>
-          <a:ln/>
-        </p:spPr>
-        <p:txBody>
-          <a:bodyPr wrap="square" lIns="0" tIns="0" rIns="0" bIns="0" rtlCol="0" anchor="t"/>
-          <a:lstStyle/>
-          <a:p>
-            <a:pPr indent="0" marL="0">
-              <a:buNone/>
-            </a:pPr>
-            <a:r>
-              <a:rPr lang="en-US" sz="1400" dirty="0">
-                <a:solidFill>
-                  <a:schemeClr val="tx2"/>
-                </a:solidFill>
-              </a:rPr>
-              <a:t>Разбор всех 6 площадок, аудитории и конкурентов в EdTech. Рубрикатор и контент-план.</a:t>
-            </a:r>
-            <a:endParaRPr lang="en-US" sz="1400" dirty="0"/>
-          </a:p>
-        </p:txBody>
-      </p:sp>
-      <p:sp>
-        <p:nvSpPr>
-          <p:cNvPr id="8" name="card-146"/>
-          <p:cNvSpPr/>
-          <p:nvPr/>
-        </p:nvSpPr>
-        <p:spPr>
-          <a:xfrm>
-            <a:off x="4400550" y="2286000"/>
-            <a:ext cx="3384550" cy="2476500"/>
-          </a:xfrm>
-          <a:prstGeom prst="roundRect">
-            <a:avLst>
-              <a:gd name="adj" fmla="val 6154"/>
-            </a:avLst>
-          </a:prstGeom>
-          <a:solidFill>
-            <a:schemeClr val="accent3"/>
-          </a:solidFill>
-          <a:ln w="9525">
-            <a:solidFill>
-              <a:schemeClr val="accent4"/>
-            </a:solidFill>
-            <a:prstDash val="solid"/>
-          </a:ln>
-        </p:spPr>
-      </p:sp>
-      <p:sp>
-        <p:nvSpPr>
-          <p:cNvPr id="9" name="text-147"/>
-          <p:cNvSpPr txBox="1"/>
-          <p:nvPr/>
-        </p:nvSpPr>
-        <p:spPr>
-          <a:xfrm>
-            <a:off x="4654550" y="2540000"/>
-            <a:ext cx="2876550" cy="228600"/>
-          </a:xfrm>
-          <a:prstGeom prst="rect">
-            <a:avLst/>
-          </a:prstGeom>
-          <a:noFill/>
-          <a:ln/>
-        </p:spPr>
-        <p:txBody>
-          <a:bodyPr wrap="square" lIns="0" tIns="0" rIns="0" bIns="0" rtlCol="0" anchor="t"/>
-          <a:lstStyle/>
-          <a:p>
-            <a:pPr indent="0" marL="0">
-              <a:buNone/>
-            </a:pPr>
-            <a:r>
-              <a:rPr lang="en-US" sz="1200" b="1" spc="200" kern="0" dirty="0">
-                <a:solidFill>
-                  <a:schemeClr val="accent1"/>
-                </a:solidFill>
-              </a:rPr>
-              <a:t>НЕДЕЛИ 3–6</a:t>
-            </a:r>
-            <a:endParaRPr lang="en-US" sz="1200" dirty="0"/>
-          </a:p>
-        </p:txBody>
-      </p:sp>
-      <p:sp>
-        <p:nvSpPr>
-          <p:cNvPr id="10" name="text-148"/>
-          <p:cNvSpPr txBox="1"/>
-          <p:nvPr/>
-        </p:nvSpPr>
-        <p:spPr>
-          <a:xfrm>
-            <a:off x="4654550" y="2844800"/>
-            <a:ext cx="2876550" cy="355600"/>
-          </a:xfrm>
-          <a:prstGeom prst="rect">
-            <a:avLst/>
-          </a:prstGeom>
-          <a:noFill/>
-          <a:ln/>
-        </p:spPr>
-        <p:txBody>
-          <a:bodyPr wrap="square" lIns="0" tIns="0" rIns="0" bIns="0" rtlCol="0" anchor="t"/>
-          <a:lstStyle/>
-          <a:p>
-            <a:pPr indent="0" marL="0">
-              <a:buNone/>
-            </a:pPr>
-            <a:r>
-              <a:rPr lang="en-US" sz="1800" b="1" dirty="0">
-                <a:solidFill>
-                  <a:schemeClr val="tx1"/>
-                </a:solidFill>
-              </a:rPr>
-              <a:t>Тест форматов</a:t>
-            </a:r>
-            <a:endParaRPr lang="en-US" sz="1800" dirty="0"/>
-          </a:p>
-        </p:txBody>
-      </p:sp>
-      <p:sp>
-        <p:nvSpPr>
-          <p:cNvPr id="11" name="text-149"/>
-          <p:cNvSpPr txBox="1"/>
-          <p:nvPr/>
-        </p:nvSpPr>
-        <p:spPr>
-          <a:xfrm>
-            <a:off x="4654550" y="3302000"/>
-            <a:ext cx="2876550" cy="1333500"/>
-          </a:xfrm>
-          <a:prstGeom prst="rect">
-            <a:avLst/>
-          </a:prstGeom>
-          <a:noFill/>
-          <a:ln/>
-        </p:spPr>
-        <p:txBody>
-          <a:bodyPr wrap="square" lIns="0" tIns="0" rIns="0" bIns="0" rtlCol="0" anchor="t"/>
-          <a:lstStyle/>
-          <a:p>
-            <a:pPr indent="0" marL="0">
-              <a:buNone/>
-            </a:pPr>
-            <a:r>
-              <a:rPr lang="en-US" sz="1400" dirty="0">
-                <a:solidFill>
-                  <a:schemeClr val="tx2"/>
-                </a:solidFill>
-              </a:rPr>
-              <a:t>3–4 Reels/TikTok в неделю: экспертные, трендовые, отзывы учеников. Личный бренд преподавателей.</a:t>
-            </a:r>
-            <a:endParaRPr lang="en-US" sz="1400" dirty="0"/>
-          </a:p>
-        </p:txBody>
-      </p:sp>
-      <p:sp>
-        <p:nvSpPr>
-          <p:cNvPr id="12" name="card-150"/>
-          <p:cNvSpPr/>
-          <p:nvPr/>
-        </p:nvSpPr>
-        <p:spPr>
-          <a:xfrm>
-            <a:off x="7988300" y="2286000"/>
-            <a:ext cx="3384550" cy="2476500"/>
-          </a:xfrm>
-          <a:prstGeom prst="roundRect">
-            <a:avLst>
-              <a:gd name="adj" fmla="val 6154"/>
-            </a:avLst>
-          </a:prstGeom>
-          <a:solidFill>
-            <a:schemeClr val="accent3"/>
-          </a:solidFill>
-          <a:ln w="9525">
-            <a:solidFill>
-              <a:schemeClr val="accent4"/>
-            </a:solidFill>
-            <a:prstDash val="solid"/>
-          </a:ln>
-        </p:spPr>
-      </p:sp>
-      <p:sp>
-        <p:nvSpPr>
-          <p:cNvPr id="13" name="text-151"/>
-          <p:cNvSpPr txBox="1"/>
-          <p:nvPr/>
-        </p:nvSpPr>
-        <p:spPr>
-          <a:xfrm>
-            <a:off x="8242300" y="2540000"/>
-            <a:ext cx="2876550" cy="228600"/>
-          </a:xfrm>
-          <a:prstGeom prst="rect">
-            <a:avLst/>
-          </a:prstGeom>
-          <a:noFill/>
-          <a:ln/>
-        </p:spPr>
-        <p:txBody>
-          <a:bodyPr wrap="square" lIns="0" tIns="0" rIns="0" bIns="0" rtlCol="0" anchor="t"/>
-          <a:lstStyle/>
-          <a:p>
-            <a:pPr indent="0" marL="0">
-              <a:buNone/>
-            </a:pPr>
-            <a:r>
-              <a:rPr lang="en-US" sz="1200" b="1" spc="200" kern="0" dirty="0">
-                <a:solidFill>
-                  <a:schemeClr val="accent1"/>
-                </a:solidFill>
-              </a:rPr>
-              <a:t>НЕДЕЛИ 7–8</a:t>
-            </a:r>
-            <a:endParaRPr lang="en-US" sz="1200" dirty="0"/>
-          </a:p>
-        </p:txBody>
-      </p:sp>
-      <p:sp>
-        <p:nvSpPr>
-          <p:cNvPr id="14" name="text-152"/>
-          <p:cNvSpPr txBox="1"/>
-          <p:nvPr/>
-        </p:nvSpPr>
-        <p:spPr>
-          <a:xfrm>
-            <a:off x="8242300" y="2844800"/>
-            <a:ext cx="2876550" cy="355600"/>
-          </a:xfrm>
-          <a:prstGeom prst="rect">
-            <a:avLst/>
-          </a:prstGeom>
-          <a:noFill/>
-          <a:ln/>
-        </p:spPr>
-        <p:txBody>
-          <a:bodyPr wrap="square" lIns="0" tIns="0" rIns="0" bIns="0" rtlCol="0" anchor="t"/>
-          <a:lstStyle/>
-          <a:p>
-            <a:pPr indent="0" marL="0">
-              <a:buNone/>
-            </a:pPr>
-            <a:r>
-              <a:rPr lang="en-US" sz="1800" b="1" dirty="0">
-                <a:solidFill>
-                  <a:schemeClr val="tx1"/>
-                </a:solidFill>
-              </a:rPr>
-              <a:t>Масштаб</a:t>
-            </a:r>
-            <a:endParaRPr lang="en-US" sz="1800" dirty="0"/>
-          </a:p>
-        </p:txBody>
-      </p:sp>
-      <p:sp>
-        <p:nvSpPr>
-          <p:cNvPr id="15" name="text-153"/>
-          <p:cNvSpPr txBox="1"/>
-          <p:nvPr/>
-        </p:nvSpPr>
-        <p:spPr>
-          <a:xfrm>
-            <a:off x="8242300" y="3302000"/>
-            <a:ext cx="2876550" cy="1333500"/>
-          </a:xfrm>
-          <a:prstGeom prst="rect">
-            <a:avLst/>
-          </a:prstGeom>
-          <a:noFill/>
-          <a:ln/>
-        </p:spPr>
-        <p:txBody>
-          <a:bodyPr wrap="square" lIns="0" tIns="0" rIns="0" bIns="0" rtlCol="0" anchor="t"/>
-          <a:lstStyle/>
-          <a:p>
-            <a:pPr indent="0" marL="0">
-              <a:buNone/>
-            </a:pPr>
-            <a:r>
-              <a:rPr lang="en-US" sz="1400" dirty="0">
-                <a:solidFill>
-                  <a:schemeClr val="tx2"/>
-                </a:solidFill>
-              </a:rPr>
-              <a:t>Усиливаю лучшие форматы, связываю контент с заявками на курсы, отчёт по KPI.</a:t>
-            </a:r>
-            <a:endParaRPr lang="en-US" sz="1400" dirty="0"/>
-          </a:p>
-        </p:txBody>
-      </p:sp>
-      <p:sp>
-        <p:nvSpPr>
-          <p:cNvPr id="16" name="text-154"/>
-          <p:cNvSpPr txBox="1"/>
-          <p:nvPr/>
-        </p:nvSpPr>
-        <p:spPr>
-          <a:xfrm>
-            <a:off x="812800" y="5080000"/>
-            <a:ext cx="10566400" cy="381000"/>
-          </a:xfrm>
-          <a:prstGeom prst="rect">
-            <a:avLst/>
-          </a:prstGeom>
-          <a:noFill/>
-          <a:ln/>
-        </p:spPr>
-        <p:txBody>
-          <a:bodyPr wrap="square" lIns="0" tIns="0" rIns="0" bIns="0" rtlCol="0" anchor="t"/>
-          <a:lstStyle/>
-          <a:p>
-            <a:pPr indent="0" marL="0">
-              <a:buNone/>
-            </a:pPr>
-            <a:r>
-              <a:rPr lang="en-US" sz="1600" dirty="0">
-                <a:solidFill>
-                  <a:schemeClr val="tx2"/>
-                </a:solidFill>
-              </a:rPr>
-              <a:t>Опыт с экспертным контентом, чешский и русский языки, понимание связки «контент → продажи».</a:t>
-            </a:r>
-            <a:endParaRPr lang="en-US" sz="1600" dirty="0"/>
-          </a:p>
-        </p:txBody>
-      </p:sp>
-      <p:sp>
-        <p:nvSpPr>
-          <p:cNvPr id="25" name="Slide Number Placeholder 0"/>
-          <p:cNvSpPr>
-            <a:spLocks noGrp="1"/>
-          </p:cNvSpPr>
-          <p:nvPr>
-            <p:ph type="sldNum" sz="quarter" idx="4294967295"/>
-          </p:nvPr>
-        </p:nvSpPr>
-        <p:spPr>
-          <a:xfrm>
-            <a:off x="10744200" y="6146800"/>
-            <a:ext cx="635000" cy="254000"/>
-          </a:xfrm>
-          <a:prstGeom prst="rect">
-            <a:avLst/>
-          </a:prstGeom>
-          <a:extLst>
-            <a:ext uri="{C572A759-6A51-4108-AA02-DFA0A04FC94B}">
-              <ma14:wrappingTextBoxFlag xmlns:ma14="http://schemas.microsoft.com/office/mac/drawingml/2011/main" val="0"/>
-            </a:ext>
-          </a:extLst>
-        </p:spPr>
-        <p:txBody>
-          <a:bodyPr lIns="0" tIns="0" rIns="0" bIns="0"/>
-          <a:lstStyle>
-            <a:lvl1pPr>
-              <a:defRPr sz="1200">
-                <a:solidFill>
-                  <a:schemeClr val="accent5"/>
-                </a:solidFill>
-              </a:defRPr>
-            </a:lvl1pPr>
-          </a:lstStyle>
-          <a:p>
-            <a:pPr algn="r"/>
-            <a:fld id="{F7021451-1387-4CA6-816F-3879F97B5CBC}" type="slidenum">
-              <a:rPr b="0" lang="en-US"/>
-              <a:t>10</a:t>
-            </a:fld>
-            <a:endParaRPr lang="en-US"/>
-          </a:p>
-        </p:txBody>
-      </p:sp>
-    </p:spTree>
-  </p:cSld>
-  <p:clrMapOvr>
-    <a:masterClrMapping/>
-  </p:clrMapOvr>
-</p:sld>
-</file>
-
-<file path=ppt/slides/slide11.xml><?xml version="1.0" encoding="utf-8"?>
-<p:sld xmlns:a="http://schemas.openxmlformats.org/drawingml/2006/main" xmlns:r="http://schemas.openxmlformats.org/officeDocument/2006/relationships" xmlns:p="http://schemas.openxmlformats.org/presentationml/2006/main">
-  <p:cSld name="Slide 11">
-    <p:spTree>
-      <p:nvGrpSpPr>
-        <p:cNvPr id="1" name=""/>
-        <p:cNvGrpSpPr/>
-        <p:nvPr/>
-      </p:nvGrpSpPr>
-      <p:grpSpPr>
-        <a:xfrm>
-          <a:off x="0" y="0"/>
-          <a:ext cx="0" cy="0"/>
-          <a:chOff x="0" y="0"/>
-          <a:chExt cx="0" cy="0"/>
-        </a:xfrm>
-      </p:grpSpPr>
-      <p:sp>
-        <p:nvSpPr>
-          <p:cNvPr id="2" name="text-155"/>
-          <p:cNvSpPr txBox="1"/>
-          <p:nvPr/>
-        </p:nvSpPr>
-        <p:spPr>
-          <a:xfrm>
-            <a:off x="812800" y="1587500"/>
-            <a:ext cx="5080000" cy="279400"/>
-          </a:xfrm>
-          <a:prstGeom prst="rect">
-            <a:avLst/>
-          </a:prstGeom>
-          <a:noFill/>
-          <a:ln/>
-        </p:spPr>
-        <p:txBody>
-          <a:bodyPr wrap="square" lIns="0" tIns="0" rIns="0" bIns="0" rtlCol="0" anchor="t"/>
-          <a:lstStyle/>
-          <a:p>
-            <a:pPr indent="0" marL="0">
-              <a:buNone/>
-            </a:pPr>
-            <a:r>
-              <a:rPr lang="en-US" sz="1400" b="1" spc="400" kern="0" dirty="0">
-                <a:solidFill>
-                  <a:schemeClr val="accent2"/>
-                </a:solidFill>
-              </a:rPr>
-              <a:t>КОНТАКТЫ</a:t>
-            </a:r>
-            <a:endParaRPr lang="en-US" sz="1400" dirty="0"/>
-          </a:p>
-        </p:txBody>
-      </p:sp>
-      <p:sp>
-        <p:nvSpPr>
-          <p:cNvPr id="3" name="text-156"/>
-          <p:cNvSpPr txBox="1"/>
-          <p:nvPr/>
-        </p:nvSpPr>
-        <p:spPr>
-          <a:xfrm>
-            <a:off x="812800" y="2032000"/>
-            <a:ext cx="10566400" cy="1524000"/>
-          </a:xfrm>
-          <a:prstGeom prst="rect">
-            <a:avLst/>
-          </a:prstGeom>
-          <a:noFill/>
-          <a:ln/>
-        </p:spPr>
-        <p:txBody>
-          <a:bodyPr wrap="square" lIns="0" tIns="0" rIns="0" bIns="0" rtlCol="0" anchor="t"/>
-          <a:lstStyle/>
+              <a:t>Давайте обсудим,</a:t>
+            </a:r>
+            <a:endParaRPr lang="en-US" sz="4400" dirty="0"/>
+          </a:p>
           <a:p>
             <a:pPr indent="0" marL="0">
               <a:buNone/>
@@ -3527,32 +2864,15 @@
                 <a:ea typeface="Arial" pitchFamily="34" charset="-122"/>
                 <a:cs typeface="Arial" pitchFamily="34" charset="-120"/>
               </a:rPr>
-              <a:t>Давайте обсудим,</a:t>
+              <a:t>как вырастить ваши соцсети</a:t>
             </a:r>
             <a:endParaRPr lang="en-US" sz="4400" dirty="0"/>
           </a:p>
-          <a:p>
-            <a:pPr indent="0" marL="0">
-              <a:buNone/>
-            </a:pPr>
-            <a:r>
-              <a:rPr lang="en-US" sz="4400" b="1" dirty="0">
-                <a:solidFill>
-                  <a:schemeClr val="bg1"/>
-                </a:solidFill>
-                <a:latin typeface="Arial" pitchFamily="34" charset="0"/>
-                <a:ea typeface="Arial" pitchFamily="34" charset="-122"/>
-                <a:cs typeface="Arial" pitchFamily="34" charset="-120"/>
-              </a:rPr>
-              <a:t>как вырастить ваш маркетинг</a:t>
-            </a:r>
-            <a:endParaRPr lang="en-US" sz="4400" dirty="0"/>
-          </a:p>
-        </p:txBody>
-      </p:sp>
-      <p:sp>
-        <p:nvSpPr>
-          <p:cNvPr id="4" name="pill-157"/>
+        </p:txBody>
+      </p:sp>
+      <p:sp>
+        <p:nvSpPr>
+          <p:cNvPr id="4" name="pill-142"/>
           <p:cNvSpPr/>
           <p:nvPr/>
         </p:nvSpPr>
@@ -3574,7 +2894,7 @@
       </p:sp>
       <p:sp>
         <p:nvSpPr>
-          <p:cNvPr id="5" name="text-158"/>
+          <p:cNvPr id="5" name="text-143"/>
           <p:cNvSpPr txBox="1"/>
           <p:nvPr/>
         </p:nvSpPr>
@@ -3610,14 +2930,14 @@
       </p:sp>
       <p:sp>
         <p:nvSpPr>
-          <p:cNvPr id="6" name="pill-159"/>
+          <p:cNvPr id="6" name="pill-144"/>
           <p:cNvSpPr/>
           <p:nvPr/>
         </p:nvSpPr>
         <p:spPr>
           <a:xfrm>
             <a:off x="3251200" y="3937000"/>
-            <a:ext cx="3175000" cy="381000"/>
+            <a:ext cx="3556000" cy="381000"/>
           </a:xfrm>
           <a:prstGeom prst="roundRect">
             <a:avLst>
@@ -3634,14 +2954,14 @@
       </p:sp>
       <p:sp>
         <p:nvSpPr>
-          <p:cNvPr id="7" name="text-160"/>
+          <p:cNvPr id="7" name="text-145"/>
           <p:cNvSpPr txBox="1"/>
           <p:nvPr/>
         </p:nvSpPr>
         <p:spPr>
           <a:xfrm>
             <a:off x="3251200" y="3937000"/>
-            <a:ext cx="3175000" cy="381000"/>
+            <a:ext cx="3556000" cy="381000"/>
           </a:xfrm>
           <a:prstGeom prst="rect">
             <a:avLst/>
@@ -3662,7 +2982,7 @@
                   <a:schemeClr val="bg1"/>
                 </a:solidFill>
               </a:rPr>
-              <a:t>melissakiiiiim@gmail.com</a:t>
+              <a:t>melisakangeldieva@icloud.com</a:t>
             </a:r>
             <a:endParaRPr lang="en-US" sz="1300" dirty="0"/>
           </a:p>
@@ -3670,7 +2990,7 @@
       </p:sp>
       <p:sp>
         <p:nvSpPr>
-          <p:cNvPr id="8" name="text-161"/>
+          <p:cNvPr id="8" name="text-146"/>
           <p:cNvSpPr txBox="1"/>
           <p:nvPr/>
         </p:nvSpPr>
@@ -3698,7 +3018,7 @@
                   <a:schemeClr val="accent6"/>
                 </a:solidFill>
               </a:rPr>
-              <a:t>Мелисса Кангельдиева · Прага</a:t>
+              <a:t>Мелисса Кангельдиева · Чехия</a:t>
             </a:r>
             <a:endParaRPr lang="en-US" sz="1600" dirty="0"/>
           </a:p>
@@ -3802,7 +3122,7 @@
                 <a:ea typeface="Arial" pitchFamily="34" charset="-122"/>
                 <a:cs typeface="Arial" pitchFamily="34" charset="-120"/>
               </a:rPr>
-              <a:t>SMM, который понимает</a:t>
+              <a:t>Креатив плюс подход,</a:t>
             </a:r>
             <a:endParaRPr lang="en-US" sz="3200" dirty="0"/>
           </a:p>
@@ -3819,7 +3139,7 @@
                 <a:ea typeface="Arial" pitchFamily="34" charset="-122"/>
                 <a:cs typeface="Arial" pitchFamily="34" charset="-120"/>
               </a:rPr>
-              <a:t>воронку и продажи</a:t>
+              <a:t>ориентированный на результат</a:t>
             </a:r>
             <a:endParaRPr lang="en-US" sz="3200" dirty="0"/>
           </a:p>
@@ -3877,7 +3197,7 @@
               <a:buNone/>
             </a:pPr>
             <a:r>
-              <a:rPr lang="en-US" sz="3200" b="1" dirty="0">
+              <a:rPr lang="en-US" sz="3000" b="1" dirty="0">
                 <a:solidFill>
                   <a:schemeClr val="accent1"/>
                 </a:solidFill>
@@ -3887,7 +3207,7 @@
               </a:rPr>
               <a:t>3+ года</a:t>
             </a:r>
-            <a:endParaRPr lang="en-US" sz="3200" dirty="0"/>
+            <a:endParaRPr lang="en-US" sz="3000" dirty="0"/>
           </a:p>
         </p:txBody>
       </p:sp>
@@ -3921,7 +3241,7 @@
                   <a:schemeClr val="tx2"/>
                 </a:solidFill>
               </a:rPr>
-              <a:t>в маркетинге и SMM: 6 компаний, от контента до руководства отделом</a:t>
+              <a:t>в SMM и создании контента</a:t>
             </a:r>
             <a:endParaRPr lang="en-US" sz="1600" dirty="0"/>
           </a:p>
@@ -3979,7 +3299,7 @@
               <a:buNone/>
             </a:pPr>
             <a:r>
-              <a:rPr lang="en-US" sz="3200" b="1" dirty="0">
+              <a:rPr lang="en-US" sz="3000" b="1" dirty="0">
                 <a:solidFill>
                   <a:schemeClr val="accent1"/>
                 </a:solidFill>
@@ -3987,9 +3307,9 @@
                 <a:ea typeface="Arial" pitchFamily="34" charset="-122"/>
                 <a:cs typeface="Arial" pitchFamily="34" charset="-120"/>
               </a:rPr>
-              <a:t>3 языка</a:t>
-            </a:r>
-            <a:endParaRPr lang="en-US" sz="3200" dirty="0"/>
+              <a:t>4 бренда</a:t>
+            </a:r>
+            <a:endParaRPr lang="en-US" sz="3000" dirty="0"/>
           </a:p>
         </p:txBody>
       </p:sp>
@@ -4023,7 +3343,7 @@
                   <a:schemeClr val="tx2"/>
                 </a:solidFill>
               </a:rPr>
-              <a:t>русский C2 · чешский B2 · английский B2</a:t>
+              <a:t>банк, B2B SaaS, логистика и личный бренд</a:t>
             </a:r>
             <a:endParaRPr lang="en-US" sz="1600" dirty="0"/>
           </a:p>
@@ -4081,7 +3401,7 @@
               <a:buNone/>
             </a:pPr>
             <a:r>
-              <a:rPr lang="en-US" sz="3200" b="1" dirty="0">
+              <a:rPr lang="en-US" sz="3000" b="1" dirty="0">
                 <a:solidFill>
                   <a:schemeClr val="accent1"/>
                 </a:solidFill>
@@ -4091,7 +3411,7 @@
               </a:rPr>
               <a:t>VŠFS</a:t>
             </a:r>
-            <a:endParaRPr lang="en-US" sz="3200" dirty="0"/>
+            <a:endParaRPr lang="en-US" sz="3000" dirty="0"/>
           </a:p>
         </p:txBody>
       </p:sp>
@@ -4161,7 +3481,7 @@
                   <a:schemeClr val="tx2"/>
                 </a:solidFill>
               </a:rPr>
-              <a:t>Площадки: Instagram, TikTok, Facebook. Рынки: Центральная Азия, США. Живу в Праге.</a:t>
+              <a:t>Фокус: рост аудитории, вовлечённость, узнаваемость бренда и контент, который работает на бизнес-цели.</a:t>
             </a:r>
             <a:endParaRPr lang="en-US" sz="1600" dirty="0"/>
           </a:p>
@@ -4310,7 +3630,7 @@
                 <a:ea typeface="Arial" pitchFamily="34" charset="-122"/>
                 <a:cs typeface="Arial" pitchFamily="34" charset="-120"/>
               </a:rPr>
-              <a:t>Охваты, вовлечённость, продажи</a:t>
+              <a:t>Просмотры, которые я сделала</a:t>
             </a:r>
             <a:endParaRPr lang="en-US" sz="3200" dirty="0"/>
           </a:p>
@@ -4318,7 +3638,7 @@
       </p:sp>
       <p:sp>
         <p:nvSpPr>
-          <p:cNvPr id="5" name="rule-19"/>
+          <p:cNvPr id="4" name="rule-19"/>
           <p:cNvSpPr/>
           <p:nvPr/>
         </p:nvSpPr>
@@ -4341,7 +3661,7 @@
       </p:sp>
       <p:sp>
         <p:nvSpPr>
-          <p:cNvPr id="6" name="text-20"/>
+          <p:cNvPr id="5" name="text-20"/>
           <p:cNvSpPr txBox="1"/>
           <p:nvPr/>
         </p:nvSpPr>
@@ -4364,7 +3684,7 @@
               <a:buNone/>
             </a:pPr>
             <a:r>
-              <a:rPr lang="en-US" sz="4000" b="1" dirty="0">
+              <a:rPr lang="en-US" sz="3600" b="1" dirty="0">
                 <a:solidFill>
                   <a:schemeClr val="accent2"/>
                 </a:solidFill>
@@ -4372,15 +3692,15 @@
                 <a:ea typeface="Arial" pitchFamily="34" charset="-122"/>
                 <a:cs typeface="Arial" pitchFamily="34" charset="-120"/>
               </a:rPr>
-              <a:t>×3</a:t>
-            </a:r>
-            <a:endParaRPr lang="en-US" sz="4000" dirty="0"/>
-          </a:p>
-        </p:txBody>
-      </p:sp>
-      <p:sp>
-        <p:nvSpPr>
-          <p:cNvPr id="7" name="text-21"/>
+              <a:t>4M</a:t>
+            </a:r>
+            <a:endParaRPr lang="en-US" sz="3600" dirty="0"/>
+          </a:p>
+        </p:txBody>
+      </p:sp>
+      <p:sp>
+        <p:nvSpPr>
+          <p:cNvPr id="6" name="text-21"/>
           <p:cNvSpPr txBox="1"/>
           <p:nvPr/>
         </p:nvSpPr>
@@ -4408,7 +3728,7 @@
                   <a:schemeClr val="accent6"/>
                 </a:solidFill>
               </a:rPr>
-              <a:t>рост охватов в соцсетях за 6 месяцев (Caps Logistics)</a:t>
+              <a:t>просмотров кампании с таргетом (DemirBank)</a:t>
             </a:r>
             <a:endParaRPr lang="en-US" sz="1500" dirty="0"/>
           </a:p>
@@ -4416,7 +3736,7 @@
       </p:sp>
       <p:sp>
         <p:nvSpPr>
-          <p:cNvPr id="8" name="rule-22"/>
+          <p:cNvPr id="7" name="rule-22"/>
           <p:cNvSpPr/>
           <p:nvPr/>
         </p:nvSpPr>
@@ -4439,7 +3759,7 @@
       </p:sp>
       <p:sp>
         <p:nvSpPr>
-          <p:cNvPr id="9" name="text-23"/>
+          <p:cNvPr id="8" name="text-23"/>
           <p:cNvSpPr txBox="1"/>
           <p:nvPr/>
         </p:nvSpPr>
@@ -4462,7 +3782,7 @@
               <a:buNone/>
             </a:pPr>
             <a:r>
-              <a:rPr lang="en-US" sz="4000" b="1" dirty="0">
+              <a:rPr lang="en-US" sz="3600" b="1" dirty="0">
                 <a:solidFill>
                   <a:schemeClr val="accent2"/>
                 </a:solidFill>
@@ -4470,15 +3790,15 @@
                 <a:ea typeface="Arial" pitchFamily="34" charset="-122"/>
                 <a:cs typeface="Arial" pitchFamily="34" charset="-120"/>
               </a:rPr>
-              <a:t>6,8%</a:t>
-            </a:r>
-            <a:endParaRPr lang="en-US" sz="4000" dirty="0"/>
-          </a:p>
-        </p:txBody>
-      </p:sp>
-      <p:sp>
-        <p:nvSpPr>
-          <p:cNvPr id="10" name="text-24"/>
+              <a:t>630K+</a:t>
+            </a:r>
+            <a:endParaRPr lang="en-US" sz="3600" dirty="0"/>
+          </a:p>
+        </p:txBody>
+      </p:sp>
+      <p:sp>
+        <p:nvSpPr>
+          <p:cNvPr id="9" name="text-24"/>
           <p:cNvSpPr txBox="1"/>
           <p:nvPr/>
         </p:nvSpPr>
@@ -4506,7 +3826,7 @@
                   <a:schemeClr val="accent6"/>
                 </a:solidFill>
               </a:rPr>
-              <a:t>средний ER в Instagram при норме для B2B 1–3% (Inwork)</a:t>
+              <a:t>органических просмотров вирусного Reels (InWork)</a:t>
             </a:r>
             <a:endParaRPr lang="en-US" sz="1500" dirty="0"/>
           </a:p>
@@ -4514,7 +3834,7 @@
       </p:sp>
       <p:sp>
         <p:nvSpPr>
-          <p:cNvPr id="11" name="rule-25"/>
+          <p:cNvPr id="10" name="rule-25"/>
           <p:cNvSpPr/>
           <p:nvPr/>
         </p:nvSpPr>
@@ -4537,7 +3857,7 @@
       </p:sp>
       <p:sp>
         <p:nvSpPr>
-          <p:cNvPr id="12" name="text-26"/>
+          <p:cNvPr id="11" name="text-26"/>
           <p:cNvSpPr txBox="1"/>
           <p:nvPr/>
         </p:nvSpPr>
@@ -4560,7 +3880,7 @@
               <a:buNone/>
             </a:pPr>
             <a:r>
-              <a:rPr lang="en-US" sz="4000" b="1" dirty="0">
+              <a:rPr lang="en-US" sz="3600" b="1" dirty="0">
                 <a:solidFill>
                   <a:schemeClr val="accent2"/>
                 </a:solidFill>
@@ -4568,15 +3888,15 @@
                 <a:ea typeface="Arial" pitchFamily="34" charset="-122"/>
                 <a:cs typeface="Arial" pitchFamily="34" charset="-120"/>
               </a:rPr>
-              <a:t>+12K</a:t>
-            </a:r>
-            <a:endParaRPr lang="en-US" sz="4000" dirty="0"/>
-          </a:p>
-        </p:txBody>
-      </p:sp>
-      <p:sp>
-        <p:nvSpPr>
-          <p:cNvPr id="13" name="text-27"/>
+              <a:t>290K</a:t>
+            </a:r>
+            <a:endParaRPr lang="en-US" sz="3600" dirty="0"/>
+          </a:p>
+        </p:txBody>
+      </p:sp>
+      <p:sp>
+        <p:nvSpPr>
+          <p:cNvPr id="12" name="text-27"/>
           <p:cNvSpPr txBox="1"/>
           <p:nvPr/>
         </p:nvSpPr>
@@ -4604,7 +3924,7 @@
                   <a:schemeClr val="accent6"/>
                 </a:solidFill>
               </a:rPr>
-              <a:t>новых подписчиков в Instagram и TikTok за год</a:t>
+              <a:t>органических просмотров без рекламы (DemirBank)</a:t>
             </a:r>
             <a:endParaRPr lang="en-US" sz="1500" dirty="0"/>
           </a:p>
@@ -4612,7 +3932,7 @@
       </p:sp>
       <p:sp>
         <p:nvSpPr>
-          <p:cNvPr id="14" name="rule-28"/>
+          <p:cNvPr id="13" name="rule-28"/>
           <p:cNvSpPr/>
           <p:nvPr/>
         </p:nvSpPr>
@@ -4635,7 +3955,7 @@
       </p:sp>
       <p:sp>
         <p:nvSpPr>
-          <p:cNvPr id="15" name="text-29"/>
+          <p:cNvPr id="14" name="text-29"/>
           <p:cNvSpPr txBox="1"/>
           <p:nvPr/>
         </p:nvSpPr>
@@ -4658,7 +3978,7 @@
               <a:buNone/>
             </a:pPr>
             <a:r>
-              <a:rPr lang="en-US" sz="4000" b="1" dirty="0">
+              <a:rPr lang="en-US" sz="3600" b="1" dirty="0">
                 <a:solidFill>
                   <a:schemeClr val="accent2"/>
                 </a:solidFill>
@@ -4666,15 +3986,15 @@
                 <a:ea typeface="Arial" pitchFamily="34" charset="-122"/>
                 <a:cs typeface="Arial" pitchFamily="34" charset="-120"/>
               </a:rPr>
-              <a:t>−40%</a:t>
-            </a:r>
-            <a:endParaRPr lang="en-US" sz="4000" dirty="0"/>
-          </a:p>
-        </p:txBody>
-      </p:sp>
-      <p:sp>
-        <p:nvSpPr>
-          <p:cNvPr id="16" name="text-30"/>
+              <a:t>30K</a:t>
+            </a:r>
+            <a:endParaRPr lang="en-US" sz="3600" dirty="0"/>
+          </a:p>
+        </p:txBody>
+      </p:sp>
+      <p:sp>
+        <p:nvSpPr>
+          <p:cNvPr id="15" name="text-30"/>
           <p:cNvSpPr txBox="1"/>
           <p:nvPr/>
         </p:nvSpPr>
@@ -4702,7 +4022,7 @@
                   <a:schemeClr val="accent6"/>
                 </a:solidFill>
               </a:rPr>
-              <a:t>стоимость лида из соцсетей (Google Ads и Meta Ads)</a:t>
+              <a:t>органических просмотров Reels личного бренда</a:t>
             </a:r>
             <a:endParaRPr lang="en-US" sz="1500" dirty="0"/>
           </a:p>
@@ -4810,7 +4130,7 @@
                   <a:schemeClr val="accent1"/>
                 </a:solidFill>
               </a:rPr>
-              <a:t>ОПЫТ В SMM И DIGITAL · 2022–2024</a:t>
+              <a:t>ОПЫТ · 10/2024 — СЕЙЧАС · @DEMIRBANKKG</a:t>
             </a:r>
             <a:endParaRPr lang="en-US" sz="1400" dirty="0"/>
           </a:p>
@@ -4851,7 +4171,7 @@
                 <a:ea typeface="Arial" pitchFamily="34" charset="-122"/>
                 <a:cs typeface="Arial" pitchFamily="34" charset="-120"/>
               </a:rPr>
-              <a:t>SMM и digital в трёх брендах</a:t>
+              <a:t>DemirBank</a:t>
             </a:r>
             <a:endParaRPr lang="en-US" sz="3200" dirty="0"/>
           </a:p>
@@ -4865,23 +4185,18 @@
         </p:nvSpPr>
         <p:spPr>
           <a:xfrm>
-            <a:off x="812800" y="2413000"/>
-            <a:ext cx="3384550" cy="2921000"/>
+            <a:off x="812800" y="2095500"/>
+            <a:ext cx="7823200" cy="3302000"/>
           </a:xfrm>
           <a:prstGeom prst="roundRect">
             <a:avLst>
-              <a:gd name="adj" fmla="val 5217"/>
+              <a:gd name="adj" fmla="val 4615"/>
             </a:avLst>
           </a:prstGeom>
           <a:solidFill>
             <a:schemeClr val="accent3"/>
           </a:solidFill>
-          <a:ln w="9525">
-            <a:solidFill>
-              <a:schemeClr val="accent4"/>
-            </a:solidFill>
-            <a:prstDash val="solid"/>
-          </a:ln>
+          <a:ln/>
         </p:spPr>
       </p:sp>
       <p:sp>
@@ -4892,388 +4207,369 @@
         </p:nvSpPr>
         <p:spPr>
           <a:xfrm>
-            <a:off x="1066800" y="2667000"/>
-            <a:ext cx="2876550" cy="381000"/>
-          </a:xfrm>
-          <a:prstGeom prst="rect">
-            <a:avLst/>
-          </a:prstGeom>
-          <a:noFill/>
-          <a:ln/>
-        </p:spPr>
-        <p:txBody>
-          <a:bodyPr wrap="square" lIns="0" tIns="0" rIns="0" bIns="0" rtlCol="0" anchor="t"/>
-          <a:lstStyle/>
-          <a:p>
-            <a:pPr indent="0" marL="0">
-              <a:buNone/>
-            </a:pPr>
-            <a:r>
-              <a:rPr lang="en-US" sz="1900" b="1" dirty="0">
+            <a:off x="1117600" y="2374900"/>
+            <a:ext cx="7213600" cy="317500"/>
+          </a:xfrm>
+          <a:prstGeom prst="rect">
+            <a:avLst/>
+          </a:prstGeom>
+          <a:noFill/>
+          <a:ln/>
+        </p:spPr>
+        <p:txBody>
+          <a:bodyPr wrap="square" lIns="0" tIns="0" rIns="0" bIns="0" rtlCol="0" anchor="t"/>
+          <a:lstStyle/>
+          <a:p>
+            <a:pPr indent="0" marL="0">
+              <a:buNone/>
+            </a:pPr>
+            <a:r>
+              <a:rPr lang="en-US" sz="1600" b="1" dirty="0">
                 <a:solidFill>
                   <a:schemeClr val="tx1"/>
+                </a:solidFill>
+              </a:rPr>
+              <a:t>Стратегия и полный цикл</a:t>
+            </a:r>
+            <a:endParaRPr lang="en-US" sz="1600" dirty="0"/>
+          </a:p>
+        </p:txBody>
+      </p:sp>
+      <p:sp>
+        <p:nvSpPr>
+          <p:cNvPr id="6" name="text-33"/>
+          <p:cNvSpPr txBox="1"/>
+          <p:nvPr/>
+        </p:nvSpPr>
+        <p:spPr>
+          <a:xfrm>
+            <a:off x="1117600" y="2717800"/>
+            <a:ext cx="7213600" cy="571500"/>
+          </a:xfrm>
+          <a:prstGeom prst="rect">
+            <a:avLst/>
+          </a:prstGeom>
+          <a:noFill/>
+          <a:ln/>
+        </p:spPr>
+        <p:txBody>
+          <a:bodyPr wrap="square" lIns="0" tIns="0" rIns="0" bIns="0" rtlCol="0" anchor="t"/>
+          <a:lstStyle/>
+          <a:p>
+            <a:pPr indent="0" marL="0">
+              <a:buNone/>
+            </a:pPr>
+            <a:r>
+              <a:rPr lang="en-US" sz="1400" dirty="0">
+                <a:solidFill>
+                  <a:schemeClr val="tx2"/>
+                </a:solidFill>
+              </a:rPr>
+              <a:t>От трендов и концепций до сценария, съёмки, монтажа, публикации и анализа</a:t>
+            </a:r>
+            <a:endParaRPr lang="en-US" sz="1400" dirty="0"/>
+          </a:p>
+        </p:txBody>
+      </p:sp>
+      <p:sp>
+        <p:nvSpPr>
+          <p:cNvPr id="7" name="text-34"/>
+          <p:cNvSpPr txBox="1"/>
+          <p:nvPr/>
+        </p:nvSpPr>
+        <p:spPr>
+          <a:xfrm>
+            <a:off x="1117600" y="3365500"/>
+            <a:ext cx="7213600" cy="317500"/>
+          </a:xfrm>
+          <a:prstGeom prst="rect">
+            <a:avLst/>
+          </a:prstGeom>
+          <a:noFill/>
+          <a:ln/>
+        </p:spPr>
+        <p:txBody>
+          <a:bodyPr wrap="square" lIns="0" tIns="0" rIns="0" bIns="0" rtlCol="0" anchor="t"/>
+          <a:lstStyle/>
+          <a:p>
+            <a:pPr indent="0" marL="0">
+              <a:buNone/>
+            </a:pPr>
+            <a:r>
+              <a:rPr lang="en-US" sz="1600" b="1" dirty="0">
+                <a:solidFill>
+                  <a:schemeClr val="tx1"/>
+                </a:solidFill>
+              </a:rPr>
+              <a:t>Форматы</a:t>
+            </a:r>
+            <a:endParaRPr lang="en-US" sz="1600" dirty="0"/>
+          </a:p>
+        </p:txBody>
+      </p:sp>
+      <p:sp>
+        <p:nvSpPr>
+          <p:cNvPr id="8" name="text-35"/>
+          <p:cNvSpPr txBox="1"/>
+          <p:nvPr/>
+        </p:nvSpPr>
+        <p:spPr>
+          <a:xfrm>
+            <a:off x="1117600" y="3708400"/>
+            <a:ext cx="7213600" cy="571500"/>
+          </a:xfrm>
+          <a:prstGeom prst="rect">
+            <a:avLst/>
+          </a:prstGeom>
+          <a:noFill/>
+          <a:ln/>
+        </p:spPr>
+        <p:txBody>
+          <a:bodyPr wrap="square" lIns="0" tIns="0" rIns="0" bIns="0" rtlCol="0" anchor="t"/>
+          <a:lstStyle/>
+          <a:p>
+            <a:pPr indent="0" marL="0">
+              <a:buNone/>
+            </a:pPr>
+            <a:r>
+              <a:rPr lang="en-US" sz="1400" dirty="0">
+                <a:solidFill>
+                  <a:schemeClr val="tx2"/>
+                </a:solidFill>
+              </a:rPr>
+              <a:t>Reels, Stories, промо и обучающий контент на охват, вовлечённость и конверсию</a:t>
+            </a:r>
+            <a:endParaRPr lang="en-US" sz="1400" dirty="0"/>
+          </a:p>
+        </p:txBody>
+      </p:sp>
+      <p:sp>
+        <p:nvSpPr>
+          <p:cNvPr id="9" name="text-36"/>
+          <p:cNvSpPr txBox="1"/>
+          <p:nvPr/>
+        </p:nvSpPr>
+        <p:spPr>
+          <a:xfrm>
+            <a:off x="1117600" y="4356100"/>
+            <a:ext cx="7213600" cy="317500"/>
+          </a:xfrm>
+          <a:prstGeom prst="rect">
+            <a:avLst/>
+          </a:prstGeom>
+          <a:noFill/>
+          <a:ln/>
+        </p:spPr>
+        <p:txBody>
+          <a:bodyPr wrap="square" lIns="0" tIns="0" rIns="0" bIns="0" rtlCol="0" anchor="t"/>
+          <a:lstStyle/>
+          <a:p>
+            <a:pPr indent="0" marL="0">
+              <a:buNone/>
+            </a:pPr>
+            <a:r>
+              <a:rPr lang="en-US" sz="1600" b="1" dirty="0">
+                <a:solidFill>
+                  <a:schemeClr val="tx1"/>
+                </a:solidFill>
+              </a:rPr>
+              <a:t>Тесты</a:t>
+            </a:r>
+            <a:endParaRPr lang="en-US" sz="1600" dirty="0"/>
+          </a:p>
+        </p:txBody>
+      </p:sp>
+      <p:sp>
+        <p:nvSpPr>
+          <p:cNvPr id="10" name="text-37"/>
+          <p:cNvSpPr txBox="1"/>
+          <p:nvPr/>
+        </p:nvSpPr>
+        <p:spPr>
+          <a:xfrm>
+            <a:off x="1117600" y="4699000"/>
+            <a:ext cx="7213600" cy="571500"/>
+          </a:xfrm>
+          <a:prstGeom prst="rect">
+            <a:avLst/>
+          </a:prstGeom>
+          <a:noFill/>
+          <a:ln/>
+        </p:spPr>
+        <p:txBody>
+          <a:bodyPr wrap="square" lIns="0" tIns="0" rIns="0" bIns="0" rtlCol="0" anchor="t"/>
+          <a:lstStyle/>
+          <a:p>
+            <a:pPr indent="0" marL="0">
+              <a:buNone/>
+            </a:pPr>
+            <a:r>
+              <a:rPr lang="en-US" sz="1400" dirty="0">
+                <a:solidFill>
+                  <a:schemeClr val="tx2"/>
+                </a:solidFill>
+              </a:rPr>
+              <a:t>Постоянно проверяю новые хуки, форматы, тренды и креативные гипотезы</a:t>
+            </a:r>
+            <a:endParaRPr lang="en-US" sz="1400" dirty="0"/>
+          </a:p>
+        </p:txBody>
+      </p:sp>
+      <p:sp>
+        <p:nvSpPr>
+          <p:cNvPr id="11" name="card-38"/>
+          <p:cNvSpPr/>
+          <p:nvPr/>
+        </p:nvSpPr>
+        <p:spPr>
+          <a:xfrm>
+            <a:off x="8839200" y="2095500"/>
+            <a:ext cx="2540000" cy="1549400"/>
+          </a:xfrm>
+          <a:prstGeom prst="roundRect">
+            <a:avLst>
+              <a:gd name="adj" fmla="val 9836"/>
+            </a:avLst>
+          </a:prstGeom>
+          <a:solidFill>
+            <a:schemeClr val="tx1"/>
+          </a:solidFill>
+          <a:ln/>
+        </p:spPr>
+      </p:sp>
+      <p:sp>
+        <p:nvSpPr>
+          <p:cNvPr id="12" name="text-39"/>
+          <p:cNvSpPr txBox="1"/>
+          <p:nvPr/>
+        </p:nvSpPr>
+        <p:spPr>
+          <a:xfrm>
+            <a:off x="9093200" y="2324100"/>
+            <a:ext cx="2032000" cy="571500"/>
+          </a:xfrm>
+          <a:prstGeom prst="rect">
+            <a:avLst/>
+          </a:prstGeom>
+          <a:noFill/>
+          <a:ln/>
+        </p:spPr>
+        <p:txBody>
+          <a:bodyPr wrap="square" lIns="0" tIns="0" rIns="0" bIns="0" rtlCol="0" anchor="t"/>
+          <a:lstStyle/>
+          <a:p>
+            <a:pPr indent="0" marL="0">
+              <a:buNone/>
+            </a:pPr>
+            <a:r>
+              <a:rPr lang="en-US" sz="3200" b="1" dirty="0">
+                <a:solidFill>
+                  <a:schemeClr val="accent2"/>
                 </a:solidFill>
                 <a:latin typeface="Arial" pitchFamily="34" charset="0"/>
                 <a:ea typeface="Arial" pitchFamily="34" charset="-122"/>
                 <a:cs typeface="Arial" pitchFamily="34" charset="-120"/>
               </a:rPr>
-              <a:t>Inwork</a:t>
-            </a:r>
-            <a:endParaRPr lang="en-US" sz="1900" dirty="0"/>
-          </a:p>
-        </p:txBody>
-      </p:sp>
-      <p:sp>
-        <p:nvSpPr>
-          <p:cNvPr id="6" name="text-33"/>
-          <p:cNvSpPr txBox="1"/>
-          <p:nvPr/>
-        </p:nvSpPr>
-        <p:spPr>
-          <a:xfrm>
-            <a:off x="1066800" y="3073400"/>
-            <a:ext cx="2876550" cy="254000"/>
-          </a:xfrm>
-          <a:prstGeom prst="rect">
-            <a:avLst/>
-          </a:prstGeom>
-          <a:noFill/>
-          <a:ln/>
-        </p:spPr>
-        <p:txBody>
-          <a:bodyPr wrap="square" lIns="0" tIns="0" rIns="0" bIns="0" rtlCol="0" anchor="t"/>
-          <a:lstStyle/>
-          <a:p>
-            <a:pPr indent="0" marL="0">
-              <a:buNone/>
-            </a:pPr>
-            <a:r>
-              <a:rPr lang="en-US" sz="1200" dirty="0">
-                <a:solidFill>
-                  <a:schemeClr val="accent5"/>
-                </a:solidFill>
-              </a:rPr>
-              <a:t>SaaS · Digital-маркетолог, SMM</a:t>
-            </a:r>
-            <a:endParaRPr lang="en-US" sz="1200" dirty="0"/>
-          </a:p>
-        </p:txBody>
-      </p:sp>
-      <p:sp>
-        <p:nvSpPr>
-          <p:cNvPr id="7" name="text-34"/>
-          <p:cNvSpPr txBox="1"/>
-          <p:nvPr/>
-        </p:nvSpPr>
-        <p:spPr>
-          <a:xfrm>
-            <a:off x="1066800" y="3403600"/>
-            <a:ext cx="2876550" cy="508000"/>
-          </a:xfrm>
-          <a:prstGeom prst="rect">
-            <a:avLst/>
-          </a:prstGeom>
-          <a:noFill/>
-          <a:ln/>
-        </p:spPr>
-        <p:txBody>
-          <a:bodyPr wrap="square" lIns="0" tIns="0" rIns="0" bIns="0" rtlCol="0" anchor="t"/>
-          <a:lstStyle/>
-          <a:p>
-            <a:pPr indent="0" marL="0">
-              <a:buNone/>
-            </a:pPr>
-            <a:r>
-              <a:rPr lang="en-US" sz="2600" b="1" dirty="0">
-                <a:solidFill>
-                  <a:schemeClr val="accent1"/>
+              <a:t>290K</a:t>
+            </a:r>
+            <a:endParaRPr lang="en-US" sz="3200" dirty="0"/>
+          </a:p>
+        </p:txBody>
+      </p:sp>
+      <p:sp>
+        <p:nvSpPr>
+          <p:cNvPr id="13" name="text-40"/>
+          <p:cNvSpPr txBox="1"/>
+          <p:nvPr/>
+        </p:nvSpPr>
+        <p:spPr>
+          <a:xfrm>
+            <a:off x="9093200" y="2959100"/>
+            <a:ext cx="2032000" cy="571500"/>
+          </a:xfrm>
+          <a:prstGeom prst="rect">
+            <a:avLst/>
+          </a:prstGeom>
+          <a:noFill/>
+          <a:ln/>
+        </p:spPr>
+        <p:txBody>
+          <a:bodyPr wrap="square" lIns="0" tIns="0" rIns="0" bIns="0" rtlCol="0" anchor="t"/>
+          <a:lstStyle/>
+          <a:p>
+            <a:pPr indent="0" marL="0">
+              <a:buNone/>
+            </a:pPr>
+            <a:r>
+              <a:rPr lang="en-US" sz="1300" dirty="0">
+                <a:solidFill>
+                  <a:schemeClr val="accent6"/>
+                </a:solidFill>
+              </a:rPr>
+              <a:t>органических просмотров без рекламы</a:t>
+            </a:r>
+            <a:endParaRPr lang="en-US" sz="1300" dirty="0"/>
+          </a:p>
+        </p:txBody>
+      </p:sp>
+      <p:sp>
+        <p:nvSpPr>
+          <p:cNvPr id="14" name="card-41"/>
+          <p:cNvSpPr/>
+          <p:nvPr/>
+        </p:nvSpPr>
+        <p:spPr>
+          <a:xfrm>
+            <a:off x="8839200" y="3848100"/>
+            <a:ext cx="2540000" cy="1549400"/>
+          </a:xfrm>
+          <a:prstGeom prst="roundRect">
+            <a:avLst>
+              <a:gd name="adj" fmla="val 9836"/>
+            </a:avLst>
+          </a:prstGeom>
+          <a:solidFill>
+            <a:schemeClr val="tx1"/>
+          </a:solidFill>
+          <a:ln/>
+        </p:spPr>
+      </p:sp>
+      <p:sp>
+        <p:nvSpPr>
+          <p:cNvPr id="15" name="text-42"/>
+          <p:cNvSpPr txBox="1"/>
+          <p:nvPr/>
+        </p:nvSpPr>
+        <p:spPr>
+          <a:xfrm>
+            <a:off x="9093200" y="4076700"/>
+            <a:ext cx="2032000" cy="571500"/>
+          </a:xfrm>
+          <a:prstGeom prst="rect">
+            <a:avLst/>
+          </a:prstGeom>
+          <a:noFill/>
+          <a:ln/>
+        </p:spPr>
+        <p:txBody>
+          <a:bodyPr wrap="square" lIns="0" tIns="0" rIns="0" bIns="0" rtlCol="0" anchor="t"/>
+          <a:lstStyle/>
+          <a:p>
+            <a:pPr indent="0" marL="0">
+              <a:buNone/>
+            </a:pPr>
+            <a:r>
+              <a:rPr lang="en-US" sz="3200" b="1" dirty="0">
+                <a:solidFill>
+                  <a:schemeClr val="accent2"/>
                 </a:solidFill>
                 <a:latin typeface="Arial" pitchFamily="34" charset="0"/>
                 <a:ea typeface="Arial" pitchFamily="34" charset="-122"/>
                 <a:cs typeface="Arial" pitchFamily="34" charset="-120"/>
               </a:rPr>
-              <a:t>ER 6,8%</a:t>
-            </a:r>
-            <a:endParaRPr lang="en-US" sz="2600" dirty="0"/>
-          </a:p>
-        </p:txBody>
-      </p:sp>
-      <p:sp>
-        <p:nvSpPr>
-          <p:cNvPr id="8" name="text-35"/>
-          <p:cNvSpPr txBox="1"/>
-          <p:nvPr/>
-        </p:nvSpPr>
-        <p:spPr>
-          <a:xfrm>
-            <a:off x="1066800" y="4000500"/>
-            <a:ext cx="2876550" cy="1143000"/>
-          </a:xfrm>
-          <a:prstGeom prst="rect">
-            <a:avLst/>
-          </a:prstGeom>
-          <a:noFill/>
-          <a:ln/>
-        </p:spPr>
-        <p:txBody>
-          <a:bodyPr wrap="square" lIns="0" tIns="0" rIns="0" bIns="0" rtlCol="0" anchor="t"/>
-          <a:lstStyle/>
-          <a:p>
-            <a:pPr indent="0" marL="0">
-              <a:buNone/>
-            </a:pPr>
-            <a:r>
-              <a:rPr lang="en-US" sz="1400" dirty="0">
-                <a:solidFill>
-                  <a:schemeClr val="tx2"/>
-                </a:solidFill>
-              </a:rPr>
-              <a:t>Контент-план и его реализация в Instagram, TikTok, Facebook. Экспертный контент о продукте.</a:t>
-            </a:r>
-            <a:endParaRPr lang="en-US" sz="1400" dirty="0"/>
-          </a:p>
-        </p:txBody>
-      </p:sp>
-      <p:sp>
-        <p:nvSpPr>
-          <p:cNvPr id="9" name="card-36"/>
-          <p:cNvSpPr/>
-          <p:nvPr/>
-        </p:nvSpPr>
-        <p:spPr>
-          <a:xfrm>
-            <a:off x="4400550" y="2413000"/>
-            <a:ext cx="3384550" cy="2921000"/>
-          </a:xfrm>
-          <a:prstGeom prst="roundRect">
-            <a:avLst>
-              <a:gd name="adj" fmla="val 5217"/>
-            </a:avLst>
-          </a:prstGeom>
-          <a:solidFill>
-            <a:schemeClr val="accent3"/>
-          </a:solidFill>
-          <a:ln w="9525">
-            <a:solidFill>
-              <a:schemeClr val="accent4"/>
-            </a:solidFill>
-            <a:prstDash val="solid"/>
-          </a:ln>
-        </p:spPr>
-      </p:sp>
-      <p:sp>
-        <p:nvSpPr>
-          <p:cNvPr id="10" name="text-37"/>
-          <p:cNvSpPr txBox="1"/>
-          <p:nvPr/>
-        </p:nvSpPr>
-        <p:spPr>
-          <a:xfrm>
-            <a:off x="4654550" y="2667000"/>
-            <a:ext cx="2876550" cy="381000"/>
-          </a:xfrm>
-          <a:prstGeom prst="rect">
-            <a:avLst/>
-          </a:prstGeom>
-          <a:noFill/>
-          <a:ln/>
-        </p:spPr>
-        <p:txBody>
-          <a:bodyPr wrap="square" lIns="0" tIns="0" rIns="0" bIns="0" rtlCol="0" anchor="t"/>
-          <a:lstStyle/>
-          <a:p>
-            <a:pPr indent="0" marL="0">
-              <a:buNone/>
-            </a:pPr>
-            <a:r>
-              <a:rPr lang="en-US" sz="1900" b="1" dirty="0">
-                <a:solidFill>
-                  <a:schemeClr val="tx1"/>
-                </a:solidFill>
-                <a:latin typeface="Arial" pitchFamily="34" charset="0"/>
-                <a:ea typeface="Arial" pitchFamily="34" charset="-122"/>
-                <a:cs typeface="Arial" pitchFamily="34" charset="-120"/>
-              </a:rPr>
-              <a:t>Caps Logistics</a:t>
-            </a:r>
-            <a:endParaRPr lang="en-US" sz="1900" dirty="0"/>
-          </a:p>
-        </p:txBody>
-      </p:sp>
-      <p:sp>
-        <p:nvSpPr>
-          <p:cNvPr id="11" name="text-38"/>
-          <p:cNvSpPr txBox="1"/>
-          <p:nvPr/>
-        </p:nvSpPr>
-        <p:spPr>
-          <a:xfrm>
-            <a:off x="4654550" y="3073400"/>
-            <a:ext cx="2876550" cy="254000"/>
-          </a:xfrm>
-          <a:prstGeom prst="rect">
-            <a:avLst/>
-          </a:prstGeom>
-          <a:noFill/>
-          <a:ln/>
-        </p:spPr>
-        <p:txBody>
-          <a:bodyPr wrap="square" lIns="0" tIns="0" rIns="0" bIns="0" rtlCol="0" anchor="t"/>
-          <a:lstStyle/>
-          <a:p>
-            <a:pPr indent="0" marL="0">
-              <a:buNone/>
-            </a:pPr>
-            <a:r>
-              <a:rPr lang="en-US" sz="1200" dirty="0">
-                <a:solidFill>
-                  <a:schemeClr val="accent5"/>
-                </a:solidFill>
-              </a:rPr>
-              <a:t>Логистика · Digital-маркетолог, SMM</a:t>
-            </a:r>
-            <a:endParaRPr lang="en-US" sz="1200" dirty="0"/>
-          </a:p>
-        </p:txBody>
-      </p:sp>
-      <p:sp>
-        <p:nvSpPr>
-          <p:cNvPr id="12" name="text-39"/>
-          <p:cNvSpPr txBox="1"/>
-          <p:nvPr/>
-        </p:nvSpPr>
-        <p:spPr>
-          <a:xfrm>
-            <a:off x="4654550" y="3403600"/>
-            <a:ext cx="2876550" cy="508000"/>
-          </a:xfrm>
-          <a:prstGeom prst="rect">
-            <a:avLst/>
-          </a:prstGeom>
-          <a:noFill/>
-          <a:ln/>
-        </p:spPr>
-        <p:txBody>
-          <a:bodyPr wrap="square" lIns="0" tIns="0" rIns="0" bIns="0" rtlCol="0" anchor="t"/>
-          <a:lstStyle/>
-          <a:p>
-            <a:pPr indent="0" marL="0">
-              <a:buNone/>
-            </a:pPr>
-            <a:r>
-              <a:rPr lang="en-US" sz="2600" b="1" dirty="0">
-                <a:solidFill>
-                  <a:schemeClr val="accent1"/>
-                </a:solidFill>
-                <a:latin typeface="Arial" pitchFamily="34" charset="0"/>
-                <a:ea typeface="Arial" pitchFamily="34" charset="-122"/>
-                <a:cs typeface="Arial" pitchFamily="34" charset="-120"/>
-              </a:rPr>
-              <a:t>×3 охват</a:t>
-            </a:r>
-            <a:endParaRPr lang="en-US" sz="2600" dirty="0"/>
-          </a:p>
-        </p:txBody>
-      </p:sp>
-      <p:sp>
-        <p:nvSpPr>
-          <p:cNvPr id="13" name="text-40"/>
-          <p:cNvSpPr txBox="1"/>
-          <p:nvPr/>
-        </p:nvSpPr>
-        <p:spPr>
-          <a:xfrm>
-            <a:off x="4654550" y="4000500"/>
-            <a:ext cx="2876550" cy="1143000"/>
-          </a:xfrm>
-          <a:prstGeom prst="rect">
-            <a:avLst/>
-          </a:prstGeom>
-          <a:noFill/>
-          <a:ln/>
-        </p:spPr>
-        <p:txBody>
-          <a:bodyPr wrap="square" lIns="0" tIns="0" rIns="0" bIns="0" rtlCol="0" anchor="t"/>
-          <a:lstStyle/>
-          <a:p>
-            <a:pPr indent="0" marL="0">
-              <a:buNone/>
-            </a:pPr>
-            <a:r>
-              <a:rPr lang="en-US" sz="1400" dirty="0">
-                <a:solidFill>
-                  <a:schemeClr val="tx2"/>
-                </a:solidFill>
-              </a:rPr>
-              <a:t>Короткие видео о процессах «за кадром», платное продвижение, стратегия бренда.</a:t>
-            </a:r>
-            <a:endParaRPr lang="en-US" sz="1400" dirty="0"/>
-          </a:p>
-        </p:txBody>
-      </p:sp>
-      <p:sp>
-        <p:nvSpPr>
-          <p:cNvPr id="14" name="card-41"/>
-          <p:cNvSpPr/>
-          <p:nvPr/>
-        </p:nvSpPr>
-        <p:spPr>
-          <a:xfrm>
-            <a:off x="7988300" y="2413000"/>
-            <a:ext cx="3384550" cy="2921000"/>
-          </a:xfrm>
-          <a:prstGeom prst="roundRect">
-            <a:avLst>
-              <a:gd name="adj" fmla="val 5217"/>
-            </a:avLst>
-          </a:prstGeom>
-          <a:solidFill>
-            <a:schemeClr val="accent3"/>
-          </a:solidFill>
-          <a:ln w="9525">
-            <a:solidFill>
-              <a:schemeClr val="accent4"/>
-            </a:solidFill>
-            <a:prstDash val="solid"/>
-          </a:ln>
-        </p:spPr>
-      </p:sp>
-      <p:sp>
-        <p:nvSpPr>
-          <p:cNvPr id="15" name="text-42"/>
-          <p:cNvSpPr txBox="1"/>
-          <p:nvPr/>
-        </p:nvSpPr>
-        <p:spPr>
-          <a:xfrm>
-            <a:off x="8242300" y="2667000"/>
-            <a:ext cx="2876550" cy="381000"/>
-          </a:xfrm>
-          <a:prstGeom prst="rect">
-            <a:avLst/>
-          </a:prstGeom>
-          <a:noFill/>
-          <a:ln/>
-        </p:spPr>
-        <p:txBody>
-          <a:bodyPr wrap="square" lIns="0" tIns="0" rIns="0" bIns="0" rtlCol="0" anchor="t"/>
-          <a:lstStyle/>
-          <a:p>
-            <a:pPr indent="0" marL="0">
-              <a:buNone/>
-            </a:pPr>
-            <a:r>
-              <a:rPr lang="en-US" sz="1900" b="1" dirty="0">
-                <a:solidFill>
-                  <a:schemeClr val="tx1"/>
-                </a:solidFill>
-                <a:latin typeface="Arial" pitchFamily="34" charset="0"/>
-                <a:ea typeface="Arial" pitchFamily="34" charset="-122"/>
-                <a:cs typeface="Arial" pitchFamily="34" charset="-120"/>
-              </a:rPr>
-              <a:t>DemirBank</a:t>
-            </a:r>
-            <a:endParaRPr lang="en-US" sz="1900" dirty="0"/>
+              <a:t>4M</a:t>
+            </a:r>
+            <a:endParaRPr lang="en-US" sz="3200" dirty="0"/>
           </a:p>
         </p:txBody>
       </p:sp>
@@ -5285,106 +4581,31 @@
         </p:nvSpPr>
         <p:spPr>
           <a:xfrm>
-            <a:off x="8242300" y="3073400"/>
-            <a:ext cx="2876550" cy="254000"/>
-          </a:xfrm>
-          <a:prstGeom prst="rect">
-            <a:avLst/>
-          </a:prstGeom>
-          <a:noFill/>
-          <a:ln/>
-        </p:spPr>
-        <p:txBody>
-          <a:bodyPr wrap="square" lIns="0" tIns="0" rIns="0" bIns="0" rtlCol="0" anchor="t"/>
-          <a:lstStyle/>
-          <a:p>
-            <a:pPr indent="0" marL="0">
-              <a:buNone/>
-            </a:pPr>
-            <a:r>
-              <a:rPr lang="en-US" sz="1200" dirty="0">
-                <a:solidFill>
-                  <a:schemeClr val="accent5"/>
-                </a:solidFill>
-              </a:rPr>
-              <a:t>Финтех · Digital-маркетолог</a:t>
-            </a:r>
-            <a:endParaRPr lang="en-US" sz="1200" dirty="0"/>
-          </a:p>
-        </p:txBody>
-      </p:sp>
-      <p:sp>
-        <p:nvSpPr>
-          <p:cNvPr id="17" name="text-44"/>
-          <p:cNvSpPr txBox="1"/>
-          <p:nvPr/>
-        </p:nvSpPr>
-        <p:spPr>
-          <a:xfrm>
-            <a:off x="8242300" y="3403600"/>
-            <a:ext cx="2876550" cy="508000"/>
-          </a:xfrm>
-          <a:prstGeom prst="rect">
-            <a:avLst/>
-          </a:prstGeom>
-          <a:noFill/>
-          <a:ln/>
-        </p:spPr>
-        <p:txBody>
-          <a:bodyPr wrap="square" lIns="0" tIns="0" rIns="0" bIns="0" rtlCol="0" anchor="t"/>
-          <a:lstStyle/>
-          <a:p>
-            <a:pPr indent="0" marL="0">
-              <a:buNone/>
-            </a:pPr>
-            <a:r>
-              <a:rPr lang="en-US" sz="2600" b="1" dirty="0">
-                <a:solidFill>
-                  <a:schemeClr val="accent1"/>
-                </a:solidFill>
-                <a:latin typeface="Arial" pitchFamily="34" charset="0"/>
-                <a:ea typeface="Arial" pitchFamily="34" charset="-122"/>
-                <a:cs typeface="Arial" pitchFamily="34" charset="-120"/>
-              </a:rPr>
-              <a:t>+40%</a:t>
-            </a:r>
-            <a:endParaRPr lang="en-US" sz="2600" dirty="0"/>
-          </a:p>
-        </p:txBody>
-      </p:sp>
-      <p:sp>
-        <p:nvSpPr>
-          <p:cNvPr id="18" name="text-45"/>
-          <p:cNvSpPr txBox="1"/>
-          <p:nvPr/>
-        </p:nvSpPr>
-        <p:spPr>
-          <a:xfrm>
-            <a:off x="8242300" y="4000500"/>
-            <a:ext cx="2876550" cy="1143000"/>
-          </a:xfrm>
-          <a:prstGeom prst="rect">
-            <a:avLst/>
-          </a:prstGeom>
-          <a:noFill/>
-          <a:ln/>
-        </p:spPr>
-        <p:txBody>
-          <a:bodyPr wrap="square" lIns="0" tIns="0" rIns="0" bIns="0" rtlCol="0" anchor="t"/>
-          <a:lstStyle/>
-          <a:p>
-            <a:pPr indent="0" marL="0">
-              <a:buNone/>
-            </a:pPr>
-            <a:r>
-              <a:rPr lang="en-US" sz="1400" dirty="0">
-                <a:solidFill>
-                  <a:schemeClr val="tx2"/>
-                </a:solidFill>
-              </a:rPr>
-              <a:t>установок приложения. Таргет и контент для B2B и B2C, аналитика в Firebase.</a:t>
-            </a:r>
-            <a:endParaRPr lang="en-US" sz="1400" dirty="0"/>
+            <a:off x="9093200" y="4711700"/>
+            <a:ext cx="2032000" cy="571500"/>
+          </a:xfrm>
+          <a:prstGeom prst="rect">
+            <a:avLst/>
+          </a:prstGeom>
+          <a:noFill/>
+          <a:ln/>
+        </p:spPr>
+        <p:txBody>
+          <a:bodyPr wrap="square" lIns="0" tIns="0" rIns="0" bIns="0" rtlCol="0" anchor="t"/>
+          <a:lstStyle/>
+          <a:p>
+            <a:pPr indent="0" marL="0">
+              <a:buNone/>
+            </a:pPr>
+            <a:r>
+              <a:rPr lang="en-US" sz="1300" dirty="0">
+                <a:solidFill>
+                  <a:schemeClr val="accent6"/>
+                </a:solidFill>
+              </a:rPr>
+              <a:t>просмотров кампании: органика + таргет</a:t>
+            </a:r>
+            <a:endParaRPr lang="en-US" sz="1300" dirty="0"/>
           </a:p>
         </p:txBody>
       </p:sp>
@@ -5490,7 +4711,7 @@
                   <a:schemeClr val="accent1"/>
                 </a:solidFill>
               </a:rPr>
-              <a:t>КАК Я РАБОТАЮ</a:t>
+              <a:t>ОПЫТ · 09/2023 — 10/2024</a:t>
             </a:r>
             <a:endParaRPr lang="en-US" sz="1400" dirty="0"/>
           </a:p>
@@ -5531,7 +4752,7 @@
                 <a:ea typeface="Arial" pitchFamily="34" charset="-122"/>
                 <a:cs typeface="Arial" pitchFamily="34" charset="-120"/>
               </a:rPr>
-              <a:t>От идеи до анализа — сама</a:t>
+              <a:t>B2B, логистика и личный бренд</a:t>
             </a:r>
             <a:endParaRPr lang="en-US" sz="3200" dirty="0"/>
           </a:p>
@@ -5539,451 +4760,486 @@
       </p:sp>
       <p:sp>
         <p:nvSpPr>
-          <p:cNvPr id="4" name="card-46"/>
+          <p:cNvPr id="4" name="card-44"/>
           <p:cNvSpPr/>
           <p:nvPr/>
         </p:nvSpPr>
         <p:spPr>
           <a:xfrm>
-            <a:off x="812800" y="2286000"/>
-            <a:ext cx="2006600" cy="2286000"/>
+            <a:off x="812800" y="2413000"/>
+            <a:ext cx="3384550" cy="3048000"/>
           </a:xfrm>
           <a:prstGeom prst="roundRect">
             <a:avLst>
-              <a:gd name="adj" fmla="val 7595"/>
+              <a:gd name="adj" fmla="val 5000"/>
             </a:avLst>
           </a:prstGeom>
           <a:solidFill>
             <a:schemeClr val="accent3"/>
           </a:solidFill>
-          <a:ln/>
-        </p:spPr>
-      </p:sp>
-      <p:sp>
-        <p:nvSpPr>
-          <p:cNvPr id="5" name="text-47"/>
-          <p:cNvSpPr txBox="1"/>
-          <p:nvPr/>
-        </p:nvSpPr>
-        <p:spPr>
-          <a:xfrm>
-            <a:off x="1016000" y="2489200"/>
-            <a:ext cx="1600200" cy="406400"/>
-          </a:xfrm>
-          <a:prstGeom prst="rect">
-            <a:avLst/>
-          </a:prstGeom>
-          <a:noFill/>
-          <a:ln/>
-        </p:spPr>
-        <p:txBody>
-          <a:bodyPr wrap="square" lIns="0" tIns="0" rIns="0" bIns="0" rtlCol="0" anchor="t"/>
-          <a:lstStyle/>
-          <a:p>
-            <a:pPr indent="0" marL="0">
-              <a:buNone/>
-            </a:pPr>
-            <a:r>
-              <a:rPr lang="en-US" sz="2200" b="1" dirty="0">
-                <a:solidFill>
-                  <a:schemeClr val="accent1"/>
+          <a:ln w="9525">
+            <a:solidFill>
+              <a:schemeClr val="accent4"/>
+            </a:solidFill>
+            <a:prstDash val="solid"/>
+          </a:ln>
+        </p:spPr>
+      </p:sp>
+      <p:sp>
+        <p:nvSpPr>
+          <p:cNvPr id="5" name="text-45"/>
+          <p:cNvSpPr txBox="1"/>
+          <p:nvPr/>
+        </p:nvSpPr>
+        <p:spPr>
+          <a:xfrm>
+            <a:off x="1066800" y="2667000"/>
+            <a:ext cx="2876550" cy="381000"/>
+          </a:xfrm>
+          <a:prstGeom prst="rect">
+            <a:avLst/>
+          </a:prstGeom>
+          <a:noFill/>
+          <a:ln/>
+        </p:spPr>
+        <p:txBody>
+          <a:bodyPr wrap="square" lIns="0" tIns="0" rIns="0" bIns="0" rtlCol="0" anchor="t"/>
+          <a:lstStyle/>
+          <a:p>
+            <a:pPr indent="0" marL="0">
+              <a:buNone/>
+            </a:pPr>
+            <a:r>
+              <a:rPr lang="en-US" sz="1800" b="1" dirty="0">
+                <a:solidFill>
+                  <a:schemeClr val="tx1"/>
                 </a:solidFill>
                 <a:latin typeface="Arial" pitchFamily="34" charset="0"/>
                 <a:ea typeface="Arial" pitchFamily="34" charset="-122"/>
                 <a:cs typeface="Arial" pitchFamily="34" charset="-120"/>
               </a:rPr>
-              <a:t>01</a:t>
-            </a:r>
-            <a:endParaRPr lang="en-US" sz="2200" dirty="0"/>
-          </a:p>
-        </p:txBody>
-      </p:sp>
-      <p:sp>
-        <p:nvSpPr>
-          <p:cNvPr id="6" name="text-48"/>
-          <p:cNvSpPr txBox="1"/>
-          <p:nvPr/>
-        </p:nvSpPr>
-        <p:spPr>
-          <a:xfrm>
-            <a:off x="1016000" y="3022600"/>
-            <a:ext cx="1600200" cy="317500"/>
-          </a:xfrm>
-          <a:prstGeom prst="rect">
-            <a:avLst/>
-          </a:prstGeom>
-          <a:noFill/>
-          <a:ln/>
-        </p:spPr>
-        <p:txBody>
-          <a:bodyPr wrap="square" lIns="0" tIns="0" rIns="0" bIns="0" rtlCol="0" anchor="t"/>
-          <a:lstStyle/>
-          <a:p>
-            <a:pPr indent="0" marL="0">
-              <a:buNone/>
-            </a:pPr>
-            <a:r>
-              <a:rPr lang="en-US" sz="1600" b="1" dirty="0">
-                <a:solidFill>
-                  <a:schemeClr val="tx1"/>
-                </a:solidFill>
-              </a:rPr>
-              <a:t>Тренды</a:t>
-            </a:r>
-            <a:endParaRPr lang="en-US" sz="1600" dirty="0"/>
-          </a:p>
-        </p:txBody>
-      </p:sp>
-      <p:sp>
-        <p:nvSpPr>
-          <p:cNvPr id="7" name="text-49"/>
-          <p:cNvSpPr txBox="1"/>
-          <p:nvPr/>
-        </p:nvSpPr>
-        <p:spPr>
-          <a:xfrm>
-            <a:off x="1016000" y="3429000"/>
-            <a:ext cx="1600200" cy="1016000"/>
-          </a:xfrm>
-          <a:prstGeom prst="rect">
-            <a:avLst/>
-          </a:prstGeom>
-          <a:noFill/>
-          <a:ln/>
-        </p:spPr>
-        <p:txBody>
-          <a:bodyPr wrap="square" lIns="0" tIns="0" rIns="0" bIns="0" rtlCol="0" anchor="t"/>
-          <a:lstStyle/>
-          <a:p>
-            <a:pPr indent="0" marL="0">
-              <a:buNone/>
-            </a:pPr>
-            <a:r>
-              <a:rPr lang="en-US" sz="1300" dirty="0">
+              <a:t>InWork</a:t>
+            </a:r>
+            <a:endParaRPr lang="en-US" sz="1800" dirty="0"/>
+          </a:p>
+        </p:txBody>
+      </p:sp>
+      <p:sp>
+        <p:nvSpPr>
+          <p:cNvPr id="6" name="text-46"/>
+          <p:cNvSpPr txBox="1"/>
+          <p:nvPr/>
+        </p:nvSpPr>
+        <p:spPr>
+          <a:xfrm>
+            <a:off x="1066800" y="3073400"/>
+            <a:ext cx="2876550" cy="254000"/>
+          </a:xfrm>
+          <a:prstGeom prst="rect">
+            <a:avLst/>
+          </a:prstGeom>
+          <a:noFill/>
+          <a:ln/>
+        </p:spPr>
+        <p:txBody>
+          <a:bodyPr wrap="square" lIns="0" tIns="0" rIns="0" bIns="0" rtlCol="0" anchor="t"/>
+          <a:lstStyle/>
+          <a:p>
+            <a:pPr indent="0" marL="0">
+              <a:buNone/>
+            </a:pPr>
+            <a:r>
+              <a:rPr lang="en-US" sz="1200" dirty="0">
+                <a:solidFill>
+                  <a:schemeClr val="accent5"/>
+                </a:solidFill>
+              </a:rPr>
+              <a:t>CRM-платформа · @inwork.live</a:t>
+            </a:r>
+            <a:endParaRPr lang="en-US" sz="1200" dirty="0"/>
+          </a:p>
+        </p:txBody>
+      </p:sp>
+      <p:sp>
+        <p:nvSpPr>
+          <p:cNvPr id="7" name="text-47"/>
+          <p:cNvSpPr txBox="1"/>
+          <p:nvPr/>
+        </p:nvSpPr>
+        <p:spPr>
+          <a:xfrm>
+            <a:off x="1066800" y="3403600"/>
+            <a:ext cx="2876550" cy="508000"/>
+          </a:xfrm>
+          <a:prstGeom prst="rect">
+            <a:avLst/>
+          </a:prstGeom>
+          <a:noFill/>
+          <a:ln/>
+        </p:spPr>
+        <p:txBody>
+          <a:bodyPr wrap="square" lIns="0" tIns="0" rIns="0" bIns="0" rtlCol="0" anchor="t"/>
+          <a:lstStyle/>
+          <a:p>
+            <a:pPr indent="0" marL="0">
+              <a:buNone/>
+            </a:pPr>
+            <a:r>
+              <a:rPr lang="en-US" sz="2600" b="1" dirty="0">
+                <a:solidFill>
+                  <a:schemeClr val="accent1"/>
+                </a:solidFill>
+                <a:latin typeface="Arial" pitchFamily="34" charset="0"/>
+                <a:ea typeface="Arial" pitchFamily="34" charset="-122"/>
+                <a:cs typeface="Arial" pitchFamily="34" charset="-120"/>
+              </a:rPr>
+              <a:t>630K+</a:t>
+            </a:r>
+            <a:endParaRPr lang="en-US" sz="2600" dirty="0"/>
+          </a:p>
+        </p:txBody>
+      </p:sp>
+      <p:sp>
+        <p:nvSpPr>
+          <p:cNvPr id="8" name="text-48"/>
+          <p:cNvSpPr txBox="1"/>
+          <p:nvPr/>
+        </p:nvSpPr>
+        <p:spPr>
+          <a:xfrm>
+            <a:off x="1066800" y="4000500"/>
+            <a:ext cx="2876550" cy="1270000"/>
+          </a:xfrm>
+          <a:prstGeom prst="rect">
+            <a:avLst/>
+          </a:prstGeom>
+          <a:noFill/>
+          <a:ln/>
+        </p:spPr>
+        <p:txBody>
+          <a:bodyPr wrap="square" lIns="0" tIns="0" rIns="0" bIns="0" rtlCol="0" anchor="t"/>
+          <a:lstStyle/>
+          <a:p>
+            <a:pPr indent="0" marL="0">
+              <a:buNone/>
+            </a:pPr>
+            <a:r>
+              <a:rPr lang="en-US" sz="1400" dirty="0">
                 <a:solidFill>
                   <a:schemeClr val="tx2"/>
                 </a:solidFill>
               </a:rPr>
-              <a:t>Темы, референсы, анализ конкурентов</a:t>
-            </a:r>
-            <a:endParaRPr lang="en-US" sz="1300" dirty="0"/>
-          </a:p>
-        </p:txBody>
-      </p:sp>
-      <p:sp>
-        <p:nvSpPr>
-          <p:cNvPr id="8" name="card-50"/>
+              <a:t>органических просмотров мемного Reels: сама сняла и смонтировала. B2B-продукт — понятным языком.</a:t>
+            </a:r>
+            <a:endParaRPr lang="en-US" sz="1400" dirty="0"/>
+          </a:p>
+        </p:txBody>
+      </p:sp>
+      <p:sp>
+        <p:nvSpPr>
+          <p:cNvPr id="9" name="card-49"/>
           <p:cNvSpPr/>
           <p:nvPr/>
         </p:nvSpPr>
         <p:spPr>
           <a:xfrm>
-            <a:off x="2952750" y="2286000"/>
-            <a:ext cx="2006600" cy="2286000"/>
+            <a:off x="4400550" y="2413000"/>
+            <a:ext cx="3384550" cy="3048000"/>
           </a:xfrm>
           <a:prstGeom prst="roundRect">
             <a:avLst>
-              <a:gd name="adj" fmla="val 7595"/>
+              <a:gd name="adj" fmla="val 5000"/>
             </a:avLst>
           </a:prstGeom>
           <a:solidFill>
             <a:schemeClr val="accent3"/>
           </a:solidFill>
-          <a:ln/>
-        </p:spPr>
-      </p:sp>
-      <p:sp>
-        <p:nvSpPr>
-          <p:cNvPr id="9" name="text-51"/>
-          <p:cNvSpPr txBox="1"/>
-          <p:nvPr/>
-        </p:nvSpPr>
-        <p:spPr>
-          <a:xfrm>
-            <a:off x="3155950" y="2489200"/>
-            <a:ext cx="1600200" cy="406400"/>
-          </a:xfrm>
-          <a:prstGeom prst="rect">
-            <a:avLst/>
-          </a:prstGeom>
-          <a:noFill/>
-          <a:ln/>
-        </p:spPr>
-        <p:txBody>
-          <a:bodyPr wrap="square" lIns="0" tIns="0" rIns="0" bIns="0" rtlCol="0" anchor="t"/>
-          <a:lstStyle/>
-          <a:p>
-            <a:pPr indent="0" marL="0">
-              <a:buNone/>
-            </a:pPr>
-            <a:r>
-              <a:rPr lang="en-US" sz="2200" b="1" dirty="0">
-                <a:solidFill>
-                  <a:schemeClr val="accent1"/>
+          <a:ln w="9525">
+            <a:solidFill>
+              <a:schemeClr val="accent4"/>
+            </a:solidFill>
+            <a:prstDash val="solid"/>
+          </a:ln>
+        </p:spPr>
+      </p:sp>
+      <p:sp>
+        <p:nvSpPr>
+          <p:cNvPr id="10" name="text-50"/>
+          <p:cNvSpPr txBox="1"/>
+          <p:nvPr/>
+        </p:nvSpPr>
+        <p:spPr>
+          <a:xfrm>
+            <a:off x="4654550" y="2667000"/>
+            <a:ext cx="2876550" cy="381000"/>
+          </a:xfrm>
+          <a:prstGeom prst="rect">
+            <a:avLst/>
+          </a:prstGeom>
+          <a:noFill/>
+          <a:ln/>
+        </p:spPr>
+        <p:txBody>
+          <a:bodyPr wrap="square" lIns="0" tIns="0" rIns="0" bIns="0" rtlCol="0" anchor="t"/>
+          <a:lstStyle/>
+          <a:p>
+            <a:pPr indent="0" marL="0">
+              <a:buNone/>
+            </a:pPr>
+            <a:r>
+              <a:rPr lang="en-US" sz="1800" b="1" dirty="0">
+                <a:solidFill>
+                  <a:schemeClr val="tx1"/>
                 </a:solidFill>
                 <a:latin typeface="Arial" pitchFamily="34" charset="0"/>
                 <a:ea typeface="Arial" pitchFamily="34" charset="-122"/>
                 <a:cs typeface="Arial" pitchFamily="34" charset="-120"/>
               </a:rPr>
-              <a:t>02</a:t>
-            </a:r>
-            <a:endParaRPr lang="en-US" sz="2200" dirty="0"/>
-          </a:p>
-        </p:txBody>
-      </p:sp>
-      <p:sp>
-        <p:nvSpPr>
-          <p:cNvPr id="10" name="text-52"/>
-          <p:cNvSpPr txBox="1"/>
-          <p:nvPr/>
-        </p:nvSpPr>
-        <p:spPr>
-          <a:xfrm>
-            <a:off x="3155950" y="3022600"/>
-            <a:ext cx="1600200" cy="317500"/>
-          </a:xfrm>
-          <a:prstGeom prst="rect">
-            <a:avLst/>
-          </a:prstGeom>
-          <a:noFill/>
-          <a:ln/>
-        </p:spPr>
-        <p:txBody>
-          <a:bodyPr wrap="square" lIns="0" tIns="0" rIns="0" bIns="0" rtlCol="0" anchor="t"/>
-          <a:lstStyle/>
-          <a:p>
-            <a:pPr indent="0" marL="0">
-              <a:buNone/>
-            </a:pPr>
-            <a:r>
-              <a:rPr lang="en-US" sz="1600" b="1" dirty="0">
-                <a:solidFill>
-                  <a:schemeClr val="tx1"/>
-                </a:solidFill>
-              </a:rPr>
-              <a:t>Сценарий</a:t>
-            </a:r>
-            <a:endParaRPr lang="en-US" sz="1600" dirty="0"/>
-          </a:p>
-        </p:txBody>
-      </p:sp>
-      <p:sp>
-        <p:nvSpPr>
-          <p:cNvPr id="11" name="text-53"/>
-          <p:cNvSpPr txBox="1"/>
-          <p:nvPr/>
-        </p:nvSpPr>
-        <p:spPr>
-          <a:xfrm>
-            <a:off x="3155950" y="3429000"/>
-            <a:ext cx="1600200" cy="1016000"/>
-          </a:xfrm>
-          <a:prstGeom prst="rect">
-            <a:avLst/>
-          </a:prstGeom>
-          <a:noFill/>
-          <a:ln/>
-        </p:spPr>
-        <p:txBody>
-          <a:bodyPr wrap="square" lIns="0" tIns="0" rIns="0" bIns="0" rtlCol="0" anchor="t"/>
-          <a:lstStyle/>
-          <a:p>
-            <a:pPr indent="0" marL="0">
-              <a:buNone/>
-            </a:pPr>
-            <a:r>
-              <a:rPr lang="en-US" sz="1300" dirty="0">
+              <a:t>CAPS Logistics</a:t>
+            </a:r>
+            <a:endParaRPr lang="en-US" sz="1800" dirty="0"/>
+          </a:p>
+        </p:txBody>
+      </p:sp>
+      <p:sp>
+        <p:nvSpPr>
+          <p:cNvPr id="11" name="text-51"/>
+          <p:cNvSpPr txBox="1"/>
+          <p:nvPr/>
+        </p:nvSpPr>
+        <p:spPr>
+          <a:xfrm>
+            <a:off x="4654550" y="3073400"/>
+            <a:ext cx="2876550" cy="254000"/>
+          </a:xfrm>
+          <a:prstGeom prst="rect">
+            <a:avLst/>
+          </a:prstGeom>
+          <a:noFill/>
+          <a:ln/>
+        </p:spPr>
+        <p:txBody>
+          <a:bodyPr wrap="square" lIns="0" tIns="0" rIns="0" bIns="0" rtlCol="0" anchor="t"/>
+          <a:lstStyle/>
+          <a:p>
+            <a:pPr indent="0" marL="0">
+              <a:buNone/>
+            </a:pPr>
+            <a:r>
+              <a:rPr lang="en-US" sz="1200" dirty="0">
+                <a:solidFill>
+                  <a:schemeClr val="accent5"/>
+                </a:solidFill>
+              </a:rPr>
+              <a:t>Логистика · @caps_logistics</a:t>
+            </a:r>
+            <a:endParaRPr lang="en-US" sz="1200" dirty="0"/>
+          </a:p>
+        </p:txBody>
+      </p:sp>
+      <p:sp>
+        <p:nvSpPr>
+          <p:cNvPr id="12" name="text-52"/>
+          <p:cNvSpPr txBox="1"/>
+          <p:nvPr/>
+        </p:nvSpPr>
+        <p:spPr>
+          <a:xfrm>
+            <a:off x="4654550" y="3403600"/>
+            <a:ext cx="2876550" cy="508000"/>
+          </a:xfrm>
+          <a:prstGeom prst="rect">
+            <a:avLst/>
+          </a:prstGeom>
+          <a:noFill/>
+          <a:ln/>
+        </p:spPr>
+        <p:txBody>
+          <a:bodyPr wrap="square" lIns="0" tIns="0" rIns="0" bIns="0" rtlCol="0" anchor="t"/>
+          <a:lstStyle/>
+          <a:p>
+            <a:pPr indent="0" marL="0">
+              <a:buNone/>
+            </a:pPr>
+            <a:r>
+              <a:rPr lang="en-US" sz="2000" b="1" dirty="0">
+                <a:solidFill>
+                  <a:schemeClr val="accent1"/>
+                </a:solidFill>
+                <a:latin typeface="Arial" pitchFamily="34" charset="0"/>
+                <a:ea typeface="Arial" pitchFamily="34" charset="-122"/>
+                <a:cs typeface="Arial" pitchFamily="34" charset="-120"/>
+              </a:rPr>
+              <a:t>Полный цикл</a:t>
+            </a:r>
+            <a:endParaRPr lang="en-US" sz="2000" dirty="0"/>
+          </a:p>
+        </p:txBody>
+      </p:sp>
+      <p:sp>
+        <p:nvSpPr>
+          <p:cNvPr id="13" name="text-53"/>
+          <p:cNvSpPr txBox="1"/>
+          <p:nvPr/>
+        </p:nvSpPr>
+        <p:spPr>
+          <a:xfrm>
+            <a:off x="4654550" y="4000500"/>
+            <a:ext cx="2876550" cy="1270000"/>
+          </a:xfrm>
+          <a:prstGeom prst="rect">
+            <a:avLst/>
+          </a:prstGeom>
+          <a:noFill/>
+          <a:ln/>
+        </p:spPr>
+        <p:txBody>
+          <a:bodyPr wrap="square" lIns="0" tIns="0" rIns="0" bIns="0" rtlCol="0" anchor="t"/>
+          <a:lstStyle/>
+          <a:p>
+            <a:pPr indent="0" marL="0">
+              <a:buNone/>
+            </a:pPr>
+            <a:r>
+              <a:rPr lang="en-US" sz="1400" dirty="0">
                 <a:solidFill>
                   <a:schemeClr val="tx2"/>
                 </a:solidFill>
               </a:rPr>
-              <a:t>Хук в первые 3 секунды, текст, раскадровка</a:t>
-            </a:r>
-            <a:endParaRPr lang="en-US" sz="1300" dirty="0"/>
-          </a:p>
-        </p:txBody>
-      </p:sp>
-      <p:sp>
-        <p:nvSpPr>
-          <p:cNvPr id="12" name="card-54"/>
+              <a:t>Контент-план, концепции, Reels, Stories и промо. Отраслевые темы в доступном формате.</a:t>
+            </a:r>
+            <a:endParaRPr lang="en-US" sz="1400" dirty="0"/>
+          </a:p>
+        </p:txBody>
+      </p:sp>
+      <p:sp>
+        <p:nvSpPr>
+          <p:cNvPr id="14" name="card-54"/>
           <p:cNvSpPr/>
           <p:nvPr/>
         </p:nvSpPr>
         <p:spPr>
           <a:xfrm>
-            <a:off x="5092700" y="2286000"/>
-            <a:ext cx="2006600" cy="2286000"/>
+            <a:off x="7988300" y="2413000"/>
+            <a:ext cx="3384550" cy="3048000"/>
           </a:xfrm>
           <a:prstGeom prst="roundRect">
             <a:avLst>
-              <a:gd name="adj" fmla="val 7595"/>
+              <a:gd name="adj" fmla="val 5000"/>
             </a:avLst>
           </a:prstGeom>
           <a:solidFill>
             <a:schemeClr val="accent3"/>
           </a:solidFill>
-          <a:ln/>
-        </p:spPr>
-      </p:sp>
-      <p:sp>
-        <p:nvSpPr>
-          <p:cNvPr id="13" name="text-55"/>
-          <p:cNvSpPr txBox="1"/>
-          <p:nvPr/>
-        </p:nvSpPr>
-        <p:spPr>
-          <a:xfrm>
-            <a:off x="5295900" y="2489200"/>
-            <a:ext cx="1600200" cy="406400"/>
-          </a:xfrm>
-          <a:prstGeom prst="rect">
-            <a:avLst/>
-          </a:prstGeom>
-          <a:noFill/>
-          <a:ln/>
-        </p:spPr>
-        <p:txBody>
-          <a:bodyPr wrap="square" lIns="0" tIns="0" rIns="0" bIns="0" rtlCol="0" anchor="t"/>
-          <a:lstStyle/>
-          <a:p>
-            <a:pPr indent="0" marL="0">
-              <a:buNone/>
-            </a:pPr>
-            <a:r>
-              <a:rPr lang="en-US" sz="2200" b="1" dirty="0">
-                <a:solidFill>
-                  <a:schemeClr val="accent1"/>
+          <a:ln w="9525">
+            <a:solidFill>
+              <a:schemeClr val="accent4"/>
+            </a:solidFill>
+            <a:prstDash val="solid"/>
+          </a:ln>
+        </p:spPr>
+      </p:sp>
+      <p:sp>
+        <p:nvSpPr>
+          <p:cNvPr id="15" name="text-55"/>
+          <p:cNvSpPr txBox="1"/>
+          <p:nvPr/>
+        </p:nvSpPr>
+        <p:spPr>
+          <a:xfrm>
+            <a:off x="8242300" y="2667000"/>
+            <a:ext cx="2876550" cy="381000"/>
+          </a:xfrm>
+          <a:prstGeom prst="rect">
+            <a:avLst/>
+          </a:prstGeom>
+          <a:noFill/>
+          <a:ln/>
+        </p:spPr>
+        <p:txBody>
+          <a:bodyPr wrap="square" lIns="0" tIns="0" rIns="0" bIns="0" rtlCol="0" anchor="t"/>
+          <a:lstStyle/>
+          <a:p>
+            <a:pPr indent="0" marL="0">
+              <a:buNone/>
+            </a:pPr>
+            <a:r>
+              <a:rPr lang="en-US" sz="1800" b="1" dirty="0">
+                <a:solidFill>
+                  <a:schemeClr val="tx1"/>
                 </a:solidFill>
                 <a:latin typeface="Arial" pitchFamily="34" charset="0"/>
                 <a:ea typeface="Arial" pitchFamily="34" charset="-122"/>
                 <a:cs typeface="Arial" pitchFamily="34" charset="-120"/>
               </a:rPr>
-              <a:t>03</a:t>
-            </a:r>
-            <a:endParaRPr lang="en-US" sz="2200" dirty="0"/>
-          </a:p>
-        </p:txBody>
-      </p:sp>
-      <p:sp>
-        <p:nvSpPr>
-          <p:cNvPr id="14" name="text-56"/>
-          <p:cNvSpPr txBox="1"/>
-          <p:nvPr/>
-        </p:nvSpPr>
-        <p:spPr>
-          <a:xfrm>
-            <a:off x="5295900" y="3022600"/>
-            <a:ext cx="1600200" cy="317500"/>
-          </a:xfrm>
-          <a:prstGeom prst="rect">
-            <a:avLst/>
-          </a:prstGeom>
-          <a:noFill/>
-          <a:ln/>
-        </p:spPr>
-        <p:txBody>
-          <a:bodyPr wrap="square" lIns="0" tIns="0" rIns="0" bIns="0" rtlCol="0" anchor="t"/>
-          <a:lstStyle/>
-          <a:p>
-            <a:pPr indent="0" marL="0">
-              <a:buNone/>
-            </a:pPr>
-            <a:r>
-              <a:rPr lang="en-US" sz="1600" b="1" dirty="0">
-                <a:solidFill>
-                  <a:schemeClr val="tx1"/>
-                </a:solidFill>
-              </a:rPr>
-              <a:t>Съёмка</a:t>
-            </a:r>
-            <a:endParaRPr lang="en-US" sz="1600" dirty="0"/>
-          </a:p>
-        </p:txBody>
-      </p:sp>
-      <p:sp>
-        <p:nvSpPr>
-          <p:cNvPr id="15" name="text-57"/>
-          <p:cNvSpPr txBox="1"/>
-          <p:nvPr/>
-        </p:nvSpPr>
-        <p:spPr>
-          <a:xfrm>
-            <a:off x="5295900" y="3429000"/>
-            <a:ext cx="1600200" cy="1016000"/>
-          </a:xfrm>
-          <a:prstGeom prst="rect">
-            <a:avLst/>
-          </a:prstGeom>
-          <a:noFill/>
-          <a:ln/>
-        </p:spPr>
-        <p:txBody>
-          <a:bodyPr wrap="square" lIns="0" tIns="0" rIns="0" bIns="0" rtlCol="0" anchor="t"/>
-          <a:lstStyle/>
-          <a:p>
-            <a:pPr indent="0" marL="0">
-              <a:buNone/>
-            </a:pPr>
-            <a:r>
-              <a:rPr lang="en-US" sz="1300" dirty="0">
-                <a:solidFill>
-                  <a:schemeClr val="tx2"/>
-                </a:solidFill>
-              </a:rPr>
-              <a:t>Reels, TikTok, Shorts, Stories и монтаж</a:t>
-            </a:r>
-            <a:endParaRPr lang="en-US" sz="1300" dirty="0"/>
-          </a:p>
-        </p:txBody>
-      </p:sp>
-      <p:sp>
-        <p:nvSpPr>
-          <p:cNvPr id="16" name="card-58"/>
-          <p:cNvSpPr/>
-          <p:nvPr/>
-        </p:nvSpPr>
-        <p:spPr>
-          <a:xfrm>
-            <a:off x="7232650" y="2286000"/>
-            <a:ext cx="2006600" cy="2286000"/>
-          </a:xfrm>
-          <a:prstGeom prst="roundRect">
-            <a:avLst>
-              <a:gd name="adj" fmla="val 7595"/>
-            </a:avLst>
-          </a:prstGeom>
-          <a:solidFill>
-            <a:schemeClr val="accent3"/>
-          </a:solidFill>
-          <a:ln/>
-        </p:spPr>
-      </p:sp>
-      <p:sp>
-        <p:nvSpPr>
-          <p:cNvPr id="17" name="text-59"/>
-          <p:cNvSpPr txBox="1"/>
-          <p:nvPr/>
-        </p:nvSpPr>
-        <p:spPr>
-          <a:xfrm>
-            <a:off x="7435850" y="2489200"/>
-            <a:ext cx="1600200" cy="406400"/>
-          </a:xfrm>
-          <a:prstGeom prst="rect">
-            <a:avLst/>
-          </a:prstGeom>
-          <a:noFill/>
-          <a:ln/>
-        </p:spPr>
-        <p:txBody>
-          <a:bodyPr wrap="square" lIns="0" tIns="0" rIns="0" bIns="0" rtlCol="0" anchor="t"/>
-          <a:lstStyle/>
-          <a:p>
-            <a:pPr indent="0" marL="0">
-              <a:buNone/>
-            </a:pPr>
-            <a:r>
-              <a:rPr lang="en-US" sz="2200" b="1" dirty="0">
+              <a:t>Бакыт Ирсалиев</a:t>
+            </a:r>
+            <a:endParaRPr lang="en-US" sz="1800" dirty="0"/>
+          </a:p>
+        </p:txBody>
+      </p:sp>
+      <p:sp>
+        <p:nvSpPr>
+          <p:cNvPr id="16" name="text-56"/>
+          <p:cNvSpPr txBox="1"/>
+          <p:nvPr/>
+        </p:nvSpPr>
+        <p:spPr>
+          <a:xfrm>
+            <a:off x="8242300" y="3073400"/>
+            <a:ext cx="2876550" cy="254000"/>
+          </a:xfrm>
+          <a:prstGeom prst="rect">
+            <a:avLst/>
+          </a:prstGeom>
+          <a:noFill/>
+          <a:ln/>
+        </p:spPr>
+        <p:txBody>
+          <a:bodyPr wrap="square" lIns="0" tIns="0" rIns="0" bIns="0" rtlCol="0" anchor="t"/>
+          <a:lstStyle/>
+          <a:p>
+            <a:pPr indent="0" marL="0">
+              <a:buNone/>
+            </a:pPr>
+            <a:r>
+              <a:rPr lang="en-US" sz="1200" dirty="0">
+                <a:solidFill>
+                  <a:schemeClr val="accent5"/>
+                </a:solidFill>
+              </a:rPr>
+              <a:t>Личный бренд · @bakyt_irsaliev</a:t>
+            </a:r>
+            <a:endParaRPr lang="en-US" sz="1200" dirty="0"/>
+          </a:p>
+        </p:txBody>
+      </p:sp>
+      <p:sp>
+        <p:nvSpPr>
+          <p:cNvPr id="17" name="text-57"/>
+          <p:cNvSpPr txBox="1"/>
+          <p:nvPr/>
+        </p:nvSpPr>
+        <p:spPr>
+          <a:xfrm>
+            <a:off x="8242300" y="3403600"/>
+            <a:ext cx="2876550" cy="508000"/>
+          </a:xfrm>
+          <a:prstGeom prst="rect">
+            <a:avLst/>
+          </a:prstGeom>
+          <a:noFill/>
+          <a:ln/>
+        </p:spPr>
+        <p:txBody>
+          <a:bodyPr wrap="square" lIns="0" tIns="0" rIns="0" bIns="0" rtlCol="0" anchor="t"/>
+          <a:lstStyle/>
+          <a:p>
+            <a:pPr indent="0" marL="0">
+              <a:buNone/>
+            </a:pPr>
+            <a:r>
+              <a:rPr lang="en-US" sz="2600" b="1" dirty="0">
                 <a:solidFill>
                   <a:schemeClr val="accent1"/>
                 </a:solidFill>
@@ -5991,250 +5247,45 @@
                 <a:ea typeface="Arial" pitchFamily="34" charset="-122"/>
                 <a:cs typeface="Arial" pitchFamily="34" charset="-120"/>
               </a:rPr>
-              <a:t>04</a:t>
-            </a:r>
-            <a:endParaRPr lang="en-US" sz="2200" dirty="0"/>
-          </a:p>
-        </p:txBody>
-      </p:sp>
-      <p:sp>
-        <p:nvSpPr>
-          <p:cNvPr id="18" name="text-60"/>
-          <p:cNvSpPr txBox="1"/>
-          <p:nvPr/>
-        </p:nvSpPr>
-        <p:spPr>
-          <a:xfrm>
-            <a:off x="7435850" y="3022600"/>
-            <a:ext cx="1600200" cy="317500"/>
-          </a:xfrm>
-          <a:prstGeom prst="rect">
-            <a:avLst/>
-          </a:prstGeom>
-          <a:noFill/>
-          <a:ln/>
-        </p:spPr>
-        <p:txBody>
-          <a:bodyPr wrap="square" lIns="0" tIns="0" rIns="0" bIns="0" rtlCol="0" anchor="t"/>
-          <a:lstStyle/>
-          <a:p>
-            <a:pPr indent="0" marL="0">
-              <a:buNone/>
-            </a:pPr>
-            <a:r>
-              <a:rPr lang="en-US" sz="1600" b="1" dirty="0">
-                <a:solidFill>
-                  <a:schemeClr val="tx1"/>
-                </a:solidFill>
-              </a:rPr>
-              <a:t>Публикация</a:t>
-            </a:r>
-            <a:endParaRPr lang="en-US" sz="1600" dirty="0"/>
-          </a:p>
-        </p:txBody>
-      </p:sp>
-      <p:sp>
-        <p:nvSpPr>
-          <p:cNvPr id="19" name="text-61"/>
-          <p:cNvSpPr txBox="1"/>
-          <p:nvPr/>
-        </p:nvSpPr>
-        <p:spPr>
-          <a:xfrm>
-            <a:off x="7435850" y="3429000"/>
-            <a:ext cx="1600200" cy="1016000"/>
-          </a:xfrm>
-          <a:prstGeom prst="rect">
-            <a:avLst/>
-          </a:prstGeom>
-          <a:noFill/>
-          <a:ln/>
-        </p:spPr>
-        <p:txBody>
-          <a:bodyPr wrap="square" lIns="0" tIns="0" rIns="0" bIns="0" rtlCol="0" anchor="t"/>
-          <a:lstStyle/>
-          <a:p>
-            <a:pPr indent="0" marL="0">
-              <a:buNone/>
-            </a:pPr>
-            <a:r>
-              <a:rPr lang="en-US" sz="1300" dirty="0">
+              <a:t>30K</a:t>
+            </a:r>
+            <a:endParaRPr lang="en-US" sz="2600" dirty="0"/>
+          </a:p>
+        </p:txBody>
+      </p:sp>
+      <p:sp>
+        <p:nvSpPr>
+          <p:cNvPr id="18" name="text-58"/>
+          <p:cNvSpPr txBox="1"/>
+          <p:nvPr/>
+        </p:nvSpPr>
+        <p:spPr>
+          <a:xfrm>
+            <a:off x="8242300" y="4000500"/>
+            <a:ext cx="2876550" cy="1270000"/>
+          </a:xfrm>
+          <a:prstGeom prst="rect">
+            <a:avLst/>
+          </a:prstGeom>
+          <a:noFill/>
+          <a:ln/>
+        </p:spPr>
+        <p:txBody>
+          <a:bodyPr wrap="square" lIns="0" tIns="0" rIns="0" bIns="0" rtlCol="0" anchor="t"/>
+          <a:lstStyle/>
+          <a:p>
+            <a:pPr indent="0" marL="0">
+              <a:buNone/>
+            </a:pPr>
+            <a:r>
+              <a:rPr lang="en-US" sz="1400" dirty="0">
                 <a:solidFill>
                   <a:schemeClr val="tx2"/>
                 </a:solidFill>
               </a:rPr>
-              <a:t>Адаптация под каждую площадку</a:t>
-            </a:r>
-            <a:endParaRPr lang="en-US" sz="1300" dirty="0"/>
-          </a:p>
-        </p:txBody>
-      </p:sp>
-      <p:sp>
-        <p:nvSpPr>
-          <p:cNvPr id="20" name="card-62"/>
-          <p:cNvSpPr/>
-          <p:nvPr/>
-        </p:nvSpPr>
-        <p:spPr>
-          <a:xfrm>
-            <a:off x="9372600" y="2286000"/>
-            <a:ext cx="2006600" cy="2286000"/>
-          </a:xfrm>
-          <a:prstGeom prst="roundRect">
-            <a:avLst>
-              <a:gd name="adj" fmla="val 7595"/>
-            </a:avLst>
-          </a:prstGeom>
-          <a:solidFill>
-            <a:schemeClr val="accent3"/>
-          </a:solidFill>
-          <a:ln/>
-        </p:spPr>
-      </p:sp>
-      <p:sp>
-        <p:nvSpPr>
-          <p:cNvPr id="21" name="text-63"/>
-          <p:cNvSpPr txBox="1"/>
-          <p:nvPr/>
-        </p:nvSpPr>
-        <p:spPr>
-          <a:xfrm>
-            <a:off x="9575800" y="2489200"/>
-            <a:ext cx="1600200" cy="406400"/>
-          </a:xfrm>
-          <a:prstGeom prst="rect">
-            <a:avLst/>
-          </a:prstGeom>
-          <a:noFill/>
-          <a:ln/>
-        </p:spPr>
-        <p:txBody>
-          <a:bodyPr wrap="square" lIns="0" tIns="0" rIns="0" bIns="0" rtlCol="0" anchor="t"/>
-          <a:lstStyle/>
-          <a:p>
-            <a:pPr indent="0" marL="0">
-              <a:buNone/>
-            </a:pPr>
-            <a:r>
-              <a:rPr lang="en-US" sz="2200" b="1" dirty="0">
-                <a:solidFill>
-                  <a:schemeClr val="accent1"/>
-                </a:solidFill>
-                <a:latin typeface="Arial" pitchFamily="34" charset="0"/>
-                <a:ea typeface="Arial" pitchFamily="34" charset="-122"/>
-                <a:cs typeface="Arial" pitchFamily="34" charset="-120"/>
-              </a:rPr>
-              <a:t>05</a:t>
-            </a:r>
-            <a:endParaRPr lang="en-US" sz="2200" dirty="0"/>
-          </a:p>
-        </p:txBody>
-      </p:sp>
-      <p:sp>
-        <p:nvSpPr>
-          <p:cNvPr id="22" name="text-64"/>
-          <p:cNvSpPr txBox="1"/>
-          <p:nvPr/>
-        </p:nvSpPr>
-        <p:spPr>
-          <a:xfrm>
-            <a:off x="9575800" y="3022600"/>
-            <a:ext cx="1600200" cy="317500"/>
-          </a:xfrm>
-          <a:prstGeom prst="rect">
-            <a:avLst/>
-          </a:prstGeom>
-          <a:noFill/>
-          <a:ln/>
-        </p:spPr>
-        <p:txBody>
-          <a:bodyPr wrap="square" lIns="0" tIns="0" rIns="0" bIns="0" rtlCol="0" anchor="t"/>
-          <a:lstStyle/>
-          <a:p>
-            <a:pPr indent="0" marL="0">
-              <a:buNone/>
-            </a:pPr>
-            <a:r>
-              <a:rPr lang="en-US" sz="1600" b="1" dirty="0">
-                <a:solidFill>
-                  <a:schemeClr val="tx1"/>
-                </a:solidFill>
-              </a:rPr>
-              <a:t>Анализ</a:t>
-            </a:r>
-            <a:endParaRPr lang="en-US" sz="1600" dirty="0"/>
-          </a:p>
-        </p:txBody>
-      </p:sp>
-      <p:sp>
-        <p:nvSpPr>
-          <p:cNvPr id="23" name="text-65"/>
-          <p:cNvSpPr txBox="1"/>
-          <p:nvPr/>
-        </p:nvSpPr>
-        <p:spPr>
-          <a:xfrm>
-            <a:off x="9575800" y="3429000"/>
-            <a:ext cx="1600200" cy="1016000"/>
-          </a:xfrm>
-          <a:prstGeom prst="rect">
-            <a:avLst/>
-          </a:prstGeom>
-          <a:noFill/>
-          <a:ln/>
-        </p:spPr>
-        <p:txBody>
-          <a:bodyPr wrap="square" lIns="0" tIns="0" rIns="0" bIns="0" rtlCol="0" anchor="t"/>
-          <a:lstStyle/>
-          <a:p>
-            <a:pPr indent="0" marL="0">
-              <a:buNone/>
-            </a:pPr>
-            <a:r>
-              <a:rPr lang="en-US" sz="1300" dirty="0">
-                <a:solidFill>
-                  <a:schemeClr val="tx2"/>
-                </a:solidFill>
-              </a:rPr>
-              <a:t>Охваты, ER, заявки и новые гипотезы</a:t>
-            </a:r>
-            <a:endParaRPr lang="en-US" sz="1300" dirty="0"/>
-          </a:p>
-        </p:txBody>
-      </p:sp>
-      <p:sp>
-        <p:nvSpPr>
-          <p:cNvPr id="24" name="text-66"/>
-          <p:cNvSpPr txBox="1"/>
-          <p:nvPr/>
-        </p:nvSpPr>
-        <p:spPr>
-          <a:xfrm>
-            <a:off x="812800" y="4953000"/>
-            <a:ext cx="10566400" cy="381000"/>
-          </a:xfrm>
-          <a:prstGeom prst="rect">
-            <a:avLst/>
-          </a:prstGeom>
-          <a:noFill/>
-          <a:ln/>
-        </p:spPr>
-        <p:txBody>
-          <a:bodyPr wrap="square" lIns="0" tIns="0" rIns="0" bIns="0" rtlCol="0" anchor="t"/>
-          <a:lstStyle/>
-          <a:p>
-            <a:pPr indent="0" marL="0">
-              <a:buNone/>
-            </a:pPr>
-            <a:r>
-              <a:rPr lang="en-US" sz="1600" dirty="0">
-                <a:solidFill>
-                  <a:schemeClr val="tx2"/>
-                </a:solidFill>
-              </a:rPr>
-              <a:t>Каждый ролик решает задачу воронки: охват, доверие к эксперту или продажа курса.</a:t>
-            </a:r>
-            <a:endParaRPr lang="en-US" sz="1600" dirty="0"/>
+              <a:t>органических просмотров Reels. Позиционирование, сторителлинг, сценарии, визуал.</a:t>
+            </a:r>
+            <a:endParaRPr lang="en-US" sz="1400" dirty="0"/>
           </a:p>
         </p:txBody>
       </p:sp>
@@ -6340,7 +5391,7 @@
                   <a:schemeClr val="accent1"/>
                 </a:solidFill>
               </a:rPr>
-              <a:t>ОПЫТ · 2024–2025 · СВЯЗКА КОНТЕНТА И ПРОДАЖ</a:t>
+              <a:t>КАК Я РАБОТАЮ</a:t>
             </a:r>
             <a:endParaRPr lang="en-US" sz="1400" dirty="0"/>
           </a:p>
@@ -6381,7 +5432,7 @@
                 <a:ea typeface="Arial" pitchFamily="34" charset="-122"/>
                 <a:cs typeface="Arial" pitchFamily="34" charset="-120"/>
               </a:rPr>
-              <a:t>MMT Group</a:t>
+              <a:t>От идеи до анализа — сама</a:t>
             </a:r>
             <a:endParaRPr lang="en-US" sz="3200" dirty="0"/>
           </a:p>
@@ -6389,346 +5440,678 @@
       </p:sp>
       <p:sp>
         <p:nvSpPr>
-          <p:cNvPr id="4" name="text-67"/>
-          <p:cNvSpPr txBox="1"/>
-          <p:nvPr/>
-        </p:nvSpPr>
-        <p:spPr>
-          <a:xfrm>
-            <a:off x="812800" y="1714500"/>
-            <a:ext cx="10566400" cy="317500"/>
-          </a:xfrm>
-          <a:prstGeom prst="rect">
-            <a:avLst/>
-          </a:prstGeom>
-          <a:noFill/>
-          <a:ln/>
-        </p:spPr>
-        <p:txBody>
-          <a:bodyPr wrap="square" lIns="0" tIns="0" rIns="0" bIns="0" rtlCol="0" anchor="t"/>
-          <a:lstStyle/>
-          <a:p>
-            <a:pPr indent="0" marL="0">
-              <a:buNone/>
-            </a:pPr>
-            <a:r>
-              <a:rPr lang="en-US" sz="1600" dirty="0">
-                <a:solidFill>
-                  <a:schemeClr val="tx2"/>
-                </a:solidFill>
-              </a:rPr>
-              <a:t>Руководитель маркетингового отдела · B2B, сувенирная продукция · Кыргызстан, Казахстан</a:t>
-            </a:r>
-            <a:endParaRPr lang="en-US" sz="1600" dirty="0"/>
-          </a:p>
-        </p:txBody>
-      </p:sp>
-      <p:sp>
-        <p:nvSpPr>
-          <p:cNvPr id="5" name="card-68"/>
+          <p:cNvPr id="4" name="card-59"/>
           <p:cNvSpPr/>
           <p:nvPr/>
         </p:nvSpPr>
         <p:spPr>
           <a:xfrm>
-            <a:off x="812800" y="2413000"/>
-            <a:ext cx="3384550" cy="2159000"/>
+            <a:off x="812800" y="2286000"/>
+            <a:ext cx="2006600" cy="2413000"/>
           </a:xfrm>
           <a:prstGeom prst="roundRect">
             <a:avLst>
-              <a:gd name="adj" fmla="val 7059"/>
+              <a:gd name="adj" fmla="val 7595"/>
             </a:avLst>
           </a:prstGeom>
           <a:solidFill>
             <a:schemeClr val="accent3"/>
           </a:solidFill>
-          <a:ln w="9525">
-            <a:solidFill>
-              <a:schemeClr val="accent4"/>
-            </a:solidFill>
-            <a:prstDash val="solid"/>
-          </a:ln>
-        </p:spPr>
-      </p:sp>
-      <p:sp>
-        <p:nvSpPr>
-          <p:cNvPr id="6" name="text-69"/>
-          <p:cNvSpPr txBox="1"/>
-          <p:nvPr/>
-        </p:nvSpPr>
-        <p:spPr>
-          <a:xfrm>
-            <a:off x="1066800" y="2667000"/>
-            <a:ext cx="2876550" cy="355600"/>
-          </a:xfrm>
-          <a:prstGeom prst="rect">
-            <a:avLst/>
-          </a:prstGeom>
-          <a:noFill/>
-          <a:ln/>
-        </p:spPr>
-        <p:txBody>
-          <a:bodyPr wrap="square" lIns="0" tIns="0" rIns="0" bIns="0" rtlCol="0" anchor="t"/>
-          <a:lstStyle/>
-          <a:p>
-            <a:pPr indent="0" marL="0">
-              <a:buNone/>
-            </a:pPr>
-            <a:r>
-              <a:rPr lang="en-US" sz="1800" b="1" dirty="0">
+          <a:ln/>
+        </p:spPr>
+      </p:sp>
+      <p:sp>
+        <p:nvSpPr>
+          <p:cNvPr id="5" name="text-60"/>
+          <p:cNvSpPr txBox="1"/>
+          <p:nvPr/>
+        </p:nvSpPr>
+        <p:spPr>
+          <a:xfrm>
+            <a:off x="1016000" y="2489200"/>
+            <a:ext cx="1600200" cy="406400"/>
+          </a:xfrm>
+          <a:prstGeom prst="rect">
+            <a:avLst/>
+          </a:prstGeom>
+          <a:noFill/>
+          <a:ln/>
+        </p:spPr>
+        <p:txBody>
+          <a:bodyPr wrap="square" lIns="0" tIns="0" rIns="0" bIns="0" rtlCol="0" anchor="t"/>
+          <a:lstStyle/>
+          <a:p>
+            <a:pPr indent="0" marL="0">
+              <a:buNone/>
+            </a:pPr>
+            <a:r>
+              <a:rPr lang="en-US" sz="2200" b="1" dirty="0">
+                <a:solidFill>
+                  <a:schemeClr val="accent1"/>
+                </a:solidFill>
+                <a:latin typeface="Arial" pitchFamily="34" charset="0"/>
+                <a:ea typeface="Arial" pitchFamily="34" charset="-122"/>
+                <a:cs typeface="Arial" pitchFamily="34" charset="-120"/>
+              </a:rPr>
+              <a:t>01</a:t>
+            </a:r>
+            <a:endParaRPr lang="en-US" sz="2200" dirty="0"/>
+          </a:p>
+        </p:txBody>
+      </p:sp>
+      <p:sp>
+        <p:nvSpPr>
+          <p:cNvPr id="6" name="text-61"/>
+          <p:cNvSpPr txBox="1"/>
+          <p:nvPr/>
+        </p:nvSpPr>
+        <p:spPr>
+          <a:xfrm>
+            <a:off x="1016000" y="3022600"/>
+            <a:ext cx="1600200" cy="317500"/>
+          </a:xfrm>
+          <a:prstGeom prst="rect">
+            <a:avLst/>
+          </a:prstGeom>
+          <a:noFill/>
+          <a:ln/>
+        </p:spPr>
+        <p:txBody>
+          <a:bodyPr wrap="square" lIns="0" tIns="0" rIns="0" bIns="0" rtlCol="0" anchor="t"/>
+          <a:lstStyle/>
+          <a:p>
+            <a:pPr indent="0" marL="0">
+              <a:buNone/>
+            </a:pPr>
+            <a:r>
+              <a:rPr lang="en-US" sz="1600" b="1" dirty="0">
                 <a:solidFill>
                   <a:schemeClr val="tx1"/>
                 </a:solidFill>
               </a:rPr>
-              <a:t>Сайт и SEO</a:t>
-            </a:r>
-            <a:endParaRPr lang="en-US" sz="1800" dirty="0"/>
-          </a:p>
-        </p:txBody>
-      </p:sp>
-      <p:sp>
-        <p:nvSpPr>
-          <p:cNvPr id="7" name="text-70"/>
-          <p:cNvSpPr txBox="1"/>
-          <p:nvPr/>
-        </p:nvSpPr>
-        <p:spPr>
-          <a:xfrm>
-            <a:off x="1066800" y="3149600"/>
-            <a:ext cx="2876550" cy="1270000"/>
-          </a:xfrm>
-          <a:prstGeom prst="rect">
-            <a:avLst/>
-          </a:prstGeom>
-          <a:noFill/>
-          <a:ln/>
-        </p:spPr>
-        <p:txBody>
-          <a:bodyPr wrap="square" lIns="0" tIns="0" rIns="0" bIns="0" rtlCol="0" anchor="t"/>
-          <a:lstStyle/>
-          <a:p>
-            <a:pPr indent="0" marL="0">
-              <a:buNone/>
-            </a:pPr>
-            <a:r>
-              <a:rPr lang="en-US" sz="1400" dirty="0">
+              <a:t>Тренды</a:t>
+            </a:r>
+            <a:endParaRPr lang="en-US" sz="1600" dirty="0"/>
+          </a:p>
+        </p:txBody>
+      </p:sp>
+      <p:sp>
+        <p:nvSpPr>
+          <p:cNvPr id="7" name="text-62"/>
+          <p:cNvSpPr txBox="1"/>
+          <p:nvPr/>
+        </p:nvSpPr>
+        <p:spPr>
+          <a:xfrm>
+            <a:off x="1016000" y="3429000"/>
+            <a:ext cx="1600200" cy="1143000"/>
+          </a:xfrm>
+          <a:prstGeom prst="rect">
+            <a:avLst/>
+          </a:prstGeom>
+          <a:noFill/>
+          <a:ln/>
+        </p:spPr>
+        <p:txBody>
+          <a:bodyPr wrap="square" lIns="0" tIns="0" rIns="0" bIns="0" rtlCol="0" anchor="t"/>
+          <a:lstStyle/>
+          <a:p>
+            <a:pPr indent="0" marL="0">
+              <a:buNone/>
+            </a:pPr>
+            <a:r>
+              <a:rPr lang="en-US" sz="1300" dirty="0">
                 <a:solidFill>
                   <a:schemeClr val="tx2"/>
                 </a:solidFill>
               </a:rPr>
-              <a:t>Запустила рекламный сайт с нуля за 2 месяца. SEO и работа с GSC: +140% органики, ×2,3 заявок с сайта.</a:t>
-            </a:r>
-            <a:endParaRPr lang="en-US" sz="1400" dirty="0"/>
-          </a:p>
-        </p:txBody>
-      </p:sp>
-      <p:sp>
-        <p:nvSpPr>
-          <p:cNvPr id="8" name="card-71"/>
+              <a:t>Темы, референсы, анализ конкурентов</a:t>
+            </a:r>
+            <a:endParaRPr lang="en-US" sz="1300" dirty="0"/>
+          </a:p>
+        </p:txBody>
+      </p:sp>
+      <p:sp>
+        <p:nvSpPr>
+          <p:cNvPr id="8" name="card-63"/>
           <p:cNvSpPr/>
           <p:nvPr/>
         </p:nvSpPr>
         <p:spPr>
           <a:xfrm>
-            <a:off x="4400550" y="2413000"/>
-            <a:ext cx="3384550" cy="2159000"/>
+            <a:off x="2952750" y="2286000"/>
+            <a:ext cx="2006600" cy="2413000"/>
           </a:xfrm>
           <a:prstGeom prst="roundRect">
             <a:avLst>
-              <a:gd name="adj" fmla="val 7059"/>
+              <a:gd name="adj" fmla="val 7595"/>
             </a:avLst>
           </a:prstGeom>
           <a:solidFill>
             <a:schemeClr val="accent3"/>
           </a:solidFill>
-          <a:ln w="9525">
-            <a:solidFill>
-              <a:schemeClr val="accent4"/>
-            </a:solidFill>
-            <a:prstDash val="solid"/>
-          </a:ln>
-        </p:spPr>
-      </p:sp>
-      <p:sp>
-        <p:nvSpPr>
-          <p:cNvPr id="9" name="text-72"/>
-          <p:cNvSpPr txBox="1"/>
-          <p:nvPr/>
-        </p:nvSpPr>
-        <p:spPr>
-          <a:xfrm>
-            <a:off x="4654550" y="2667000"/>
-            <a:ext cx="2876550" cy="355600"/>
-          </a:xfrm>
-          <a:prstGeom prst="rect">
-            <a:avLst/>
-          </a:prstGeom>
-          <a:noFill/>
-          <a:ln/>
-        </p:spPr>
-        <p:txBody>
-          <a:bodyPr wrap="square" lIns="0" tIns="0" rIns="0" bIns="0" rtlCol="0" anchor="t"/>
-          <a:lstStyle/>
-          <a:p>
-            <a:pPr indent="0" marL="0">
-              <a:buNone/>
-            </a:pPr>
-            <a:r>
-              <a:rPr lang="en-US" sz="1800" b="1" dirty="0">
+          <a:ln/>
+        </p:spPr>
+      </p:sp>
+      <p:sp>
+        <p:nvSpPr>
+          <p:cNvPr id="9" name="text-64"/>
+          <p:cNvSpPr txBox="1"/>
+          <p:nvPr/>
+        </p:nvSpPr>
+        <p:spPr>
+          <a:xfrm>
+            <a:off x="3155950" y="2489200"/>
+            <a:ext cx="1600200" cy="406400"/>
+          </a:xfrm>
+          <a:prstGeom prst="rect">
+            <a:avLst/>
+          </a:prstGeom>
+          <a:noFill/>
+          <a:ln/>
+        </p:spPr>
+        <p:txBody>
+          <a:bodyPr wrap="square" lIns="0" tIns="0" rIns="0" bIns="0" rtlCol="0" anchor="t"/>
+          <a:lstStyle/>
+          <a:p>
+            <a:pPr indent="0" marL="0">
+              <a:buNone/>
+            </a:pPr>
+            <a:r>
+              <a:rPr lang="en-US" sz="2200" b="1" dirty="0">
+                <a:solidFill>
+                  <a:schemeClr val="accent1"/>
+                </a:solidFill>
+                <a:latin typeface="Arial" pitchFamily="34" charset="0"/>
+                <a:ea typeface="Arial" pitchFamily="34" charset="-122"/>
+                <a:cs typeface="Arial" pitchFamily="34" charset="-120"/>
+              </a:rPr>
+              <a:t>02</a:t>
+            </a:r>
+            <a:endParaRPr lang="en-US" sz="2200" dirty="0"/>
+          </a:p>
+        </p:txBody>
+      </p:sp>
+      <p:sp>
+        <p:nvSpPr>
+          <p:cNvPr id="10" name="text-65"/>
+          <p:cNvSpPr txBox="1"/>
+          <p:nvPr/>
+        </p:nvSpPr>
+        <p:spPr>
+          <a:xfrm>
+            <a:off x="3155950" y="3022600"/>
+            <a:ext cx="1600200" cy="317500"/>
+          </a:xfrm>
+          <a:prstGeom prst="rect">
+            <a:avLst/>
+          </a:prstGeom>
+          <a:noFill/>
+          <a:ln/>
+        </p:spPr>
+        <p:txBody>
+          <a:bodyPr wrap="square" lIns="0" tIns="0" rIns="0" bIns="0" rtlCol="0" anchor="t"/>
+          <a:lstStyle/>
+          <a:p>
+            <a:pPr indent="0" marL="0">
+              <a:buNone/>
+            </a:pPr>
+            <a:r>
+              <a:rPr lang="en-US" sz="1600" b="1" dirty="0">
                 <a:solidFill>
                   <a:schemeClr val="tx1"/>
                 </a:solidFill>
               </a:rPr>
-              <a:t>Performance</a:t>
-            </a:r>
-            <a:endParaRPr lang="en-US" sz="1800" dirty="0"/>
-          </a:p>
-        </p:txBody>
-      </p:sp>
-      <p:sp>
-        <p:nvSpPr>
-          <p:cNvPr id="10" name="text-73"/>
-          <p:cNvSpPr txBox="1"/>
-          <p:nvPr/>
-        </p:nvSpPr>
-        <p:spPr>
-          <a:xfrm>
-            <a:off x="4654550" y="3149600"/>
-            <a:ext cx="2876550" cy="1270000"/>
-          </a:xfrm>
-          <a:prstGeom prst="rect">
-            <a:avLst/>
-          </a:prstGeom>
-          <a:noFill/>
-          <a:ln/>
-        </p:spPr>
-        <p:txBody>
-          <a:bodyPr wrap="square" lIns="0" tIns="0" rIns="0" bIns="0" rtlCol="0" anchor="t"/>
-          <a:lstStyle/>
-          <a:p>
-            <a:pPr indent="0" marL="0">
-              <a:buNone/>
-            </a:pPr>
-            <a:r>
-              <a:rPr lang="en-US" sz="1400" dirty="0">
+              <a:t>Сценарий</a:t>
+            </a:r>
+            <a:endParaRPr lang="en-US" sz="1600" dirty="0"/>
+          </a:p>
+        </p:txBody>
+      </p:sp>
+      <p:sp>
+        <p:nvSpPr>
+          <p:cNvPr id="11" name="text-66"/>
+          <p:cNvSpPr txBox="1"/>
+          <p:nvPr/>
+        </p:nvSpPr>
+        <p:spPr>
+          <a:xfrm>
+            <a:off x="3155950" y="3429000"/>
+            <a:ext cx="1600200" cy="1143000"/>
+          </a:xfrm>
+          <a:prstGeom prst="rect">
+            <a:avLst/>
+          </a:prstGeom>
+          <a:noFill/>
+          <a:ln/>
+        </p:spPr>
+        <p:txBody>
+          <a:bodyPr wrap="square" lIns="0" tIns="0" rIns="0" bIns="0" rtlCol="0" anchor="t"/>
+          <a:lstStyle/>
+          <a:p>
+            <a:pPr indent="0" marL="0">
+              <a:buNone/>
+            </a:pPr>
+            <a:r>
+              <a:rPr lang="en-US" sz="1300" dirty="0">
                 <a:solidFill>
                   <a:schemeClr val="tx2"/>
                 </a:solidFill>
               </a:rPr>
-              <a:t>Контекст, таргет, маркетплейсы, Лалафо, 2ГИС. Медиапланы и оптимизация: CPL −32%.</a:t>
-            </a:r>
-            <a:endParaRPr lang="en-US" sz="1400" dirty="0"/>
-          </a:p>
-        </p:txBody>
-      </p:sp>
-      <p:sp>
-        <p:nvSpPr>
-          <p:cNvPr id="11" name="card-74"/>
+              <a:t>Креативная концепция, хук, текст</a:t>
+            </a:r>
+            <a:endParaRPr lang="en-US" sz="1300" dirty="0"/>
+          </a:p>
+        </p:txBody>
+      </p:sp>
+      <p:sp>
+        <p:nvSpPr>
+          <p:cNvPr id="12" name="card-67"/>
           <p:cNvSpPr/>
           <p:nvPr/>
         </p:nvSpPr>
         <p:spPr>
           <a:xfrm>
-            <a:off x="7988300" y="2413000"/>
-            <a:ext cx="3384550" cy="2159000"/>
+            <a:off x="5092700" y="2286000"/>
+            <a:ext cx="2006600" cy="2413000"/>
           </a:xfrm>
           <a:prstGeom prst="roundRect">
             <a:avLst>
-              <a:gd name="adj" fmla="val 7059"/>
+              <a:gd name="adj" fmla="val 7595"/>
             </a:avLst>
           </a:prstGeom>
           <a:solidFill>
             <a:schemeClr val="accent3"/>
           </a:solidFill>
-          <a:ln w="9525">
-            <a:solidFill>
-              <a:schemeClr val="accent4"/>
-            </a:solidFill>
-            <a:prstDash val="solid"/>
-          </a:ln>
-        </p:spPr>
-      </p:sp>
-      <p:sp>
-        <p:nvSpPr>
-          <p:cNvPr id="12" name="text-75"/>
-          <p:cNvSpPr txBox="1"/>
-          <p:nvPr/>
-        </p:nvSpPr>
-        <p:spPr>
-          <a:xfrm>
-            <a:off x="8242300" y="2667000"/>
-            <a:ext cx="2876550" cy="355600"/>
-          </a:xfrm>
-          <a:prstGeom prst="rect">
-            <a:avLst/>
-          </a:prstGeom>
-          <a:noFill/>
-          <a:ln/>
-        </p:spPr>
-        <p:txBody>
-          <a:bodyPr wrap="square" lIns="0" tIns="0" rIns="0" bIns="0" rtlCol="0" anchor="t"/>
-          <a:lstStyle/>
-          <a:p>
-            <a:pPr indent="0" marL="0">
-              <a:buNone/>
-            </a:pPr>
-            <a:r>
-              <a:rPr lang="en-US" sz="1800" b="1" dirty="0">
+          <a:ln/>
+        </p:spPr>
+      </p:sp>
+      <p:sp>
+        <p:nvSpPr>
+          <p:cNvPr id="13" name="text-68"/>
+          <p:cNvSpPr txBox="1"/>
+          <p:nvPr/>
+        </p:nvSpPr>
+        <p:spPr>
+          <a:xfrm>
+            <a:off x="5295900" y="2489200"/>
+            <a:ext cx="1600200" cy="406400"/>
+          </a:xfrm>
+          <a:prstGeom prst="rect">
+            <a:avLst/>
+          </a:prstGeom>
+          <a:noFill/>
+          <a:ln/>
+        </p:spPr>
+        <p:txBody>
+          <a:bodyPr wrap="square" lIns="0" tIns="0" rIns="0" bIns="0" rtlCol="0" anchor="t"/>
+          <a:lstStyle/>
+          <a:p>
+            <a:pPr indent="0" marL="0">
+              <a:buNone/>
+            </a:pPr>
+            <a:r>
+              <a:rPr lang="en-US" sz="2200" b="1" dirty="0">
+                <a:solidFill>
+                  <a:schemeClr val="accent1"/>
+                </a:solidFill>
+                <a:latin typeface="Arial" pitchFamily="34" charset="0"/>
+                <a:ea typeface="Arial" pitchFamily="34" charset="-122"/>
+                <a:cs typeface="Arial" pitchFamily="34" charset="-120"/>
+              </a:rPr>
+              <a:t>03</a:t>
+            </a:r>
+            <a:endParaRPr lang="en-US" sz="2200" dirty="0"/>
+          </a:p>
+        </p:txBody>
+      </p:sp>
+      <p:sp>
+        <p:nvSpPr>
+          <p:cNvPr id="14" name="text-69"/>
+          <p:cNvSpPr txBox="1"/>
+          <p:nvPr/>
+        </p:nvSpPr>
+        <p:spPr>
+          <a:xfrm>
+            <a:off x="5295900" y="3022600"/>
+            <a:ext cx="1600200" cy="317500"/>
+          </a:xfrm>
+          <a:prstGeom prst="rect">
+            <a:avLst/>
+          </a:prstGeom>
+          <a:noFill/>
+          <a:ln/>
+        </p:spPr>
+        <p:txBody>
+          <a:bodyPr wrap="square" lIns="0" tIns="0" rIns="0" bIns="0" rtlCol="0" anchor="t"/>
+          <a:lstStyle/>
+          <a:p>
+            <a:pPr indent="0" marL="0">
+              <a:buNone/>
+            </a:pPr>
+            <a:r>
+              <a:rPr lang="en-US" sz="1600" b="1" dirty="0">
                 <a:solidFill>
                   <a:schemeClr val="tx1"/>
                 </a:solidFill>
               </a:rPr>
-              <a:t>Продажи и офлайн</a:t>
-            </a:r>
-            <a:endParaRPr lang="en-US" sz="1800" dirty="0"/>
-          </a:p>
-        </p:txBody>
-      </p:sp>
-      <p:sp>
-        <p:nvSpPr>
-          <p:cNvPr id="13" name="text-76"/>
-          <p:cNvSpPr txBox="1"/>
-          <p:nvPr/>
-        </p:nvSpPr>
-        <p:spPr>
-          <a:xfrm>
-            <a:off x="8242300" y="3149600"/>
-            <a:ext cx="2876550" cy="1270000"/>
-          </a:xfrm>
-          <a:prstGeom prst="rect">
-            <a:avLst/>
-          </a:prstGeom>
-          <a:noFill/>
-          <a:ln/>
-        </p:spPr>
-        <p:txBody>
-          <a:bodyPr wrap="square" lIns="0" tIns="0" rIns="0" bIns="0" rtlCol="0" anchor="t"/>
-          <a:lstStyle/>
-          <a:p>
-            <a:pPr indent="0" marL="0">
-              <a:buNone/>
-            </a:pPr>
-            <a:r>
-              <a:rPr lang="en-US" sz="1400" dirty="0">
+              <a:t>Съёмка</a:t>
+            </a:r>
+            <a:endParaRPr lang="en-US" sz="1600" dirty="0"/>
+          </a:p>
+        </p:txBody>
+      </p:sp>
+      <p:sp>
+        <p:nvSpPr>
+          <p:cNvPr id="15" name="text-70"/>
+          <p:cNvSpPr txBox="1"/>
+          <p:nvPr/>
+        </p:nvSpPr>
+        <p:spPr>
+          <a:xfrm>
+            <a:off x="5295900" y="3429000"/>
+            <a:ext cx="1600200" cy="1143000"/>
+          </a:xfrm>
+          <a:prstGeom prst="rect">
+            <a:avLst/>
+          </a:prstGeom>
+          <a:noFill/>
+          <a:ln/>
+        </p:spPr>
+        <p:txBody>
+          <a:bodyPr wrap="square" lIns="0" tIns="0" rIns="0" bIns="0" rtlCol="0" anchor="t"/>
+          <a:lstStyle/>
+          <a:p>
+            <a:pPr indent="0" marL="0">
+              <a:buNone/>
+            </a:pPr>
+            <a:r>
+              <a:rPr lang="en-US" sz="1300" dirty="0">
                 <a:solidFill>
                   <a:schemeClr val="tx2"/>
                 </a:solidFill>
               </a:rPr>
-              <a:t>Контроль отдела продаж, мероприятия, DOOH. Реферальная программа приводит 18% новых клиентов.</a:t>
-            </a:r>
-            <a:endParaRPr lang="en-US" sz="1400" dirty="0"/>
-          </a:p>
-        </p:txBody>
-      </p:sp>
-      <p:sp>
-        <p:nvSpPr>
-          <p:cNvPr id="14" name="text-77"/>
-          <p:cNvSpPr txBox="1"/>
-          <p:nvPr/>
-        </p:nvSpPr>
-        <p:spPr>
-          <a:xfrm>
-            <a:off x="812800" y="4953000"/>
+              <a:t>Reels, TikTok, Shorts, Stories — снимаю и монтирую сама</a:t>
+            </a:r>
+            <a:endParaRPr lang="en-US" sz="1300" dirty="0"/>
+          </a:p>
+        </p:txBody>
+      </p:sp>
+      <p:sp>
+        <p:nvSpPr>
+          <p:cNvPr id="16" name="card-71"/>
+          <p:cNvSpPr/>
+          <p:nvPr/>
+        </p:nvSpPr>
+        <p:spPr>
+          <a:xfrm>
+            <a:off x="7232650" y="2286000"/>
+            <a:ext cx="2006600" cy="2413000"/>
+          </a:xfrm>
+          <a:prstGeom prst="roundRect">
+            <a:avLst>
+              <a:gd name="adj" fmla="val 7595"/>
+            </a:avLst>
+          </a:prstGeom>
+          <a:solidFill>
+            <a:schemeClr val="accent3"/>
+          </a:solidFill>
+          <a:ln/>
+        </p:spPr>
+      </p:sp>
+      <p:sp>
+        <p:nvSpPr>
+          <p:cNvPr id="17" name="text-72"/>
+          <p:cNvSpPr txBox="1"/>
+          <p:nvPr/>
+        </p:nvSpPr>
+        <p:spPr>
+          <a:xfrm>
+            <a:off x="7435850" y="2489200"/>
+            <a:ext cx="1600200" cy="406400"/>
+          </a:xfrm>
+          <a:prstGeom prst="rect">
+            <a:avLst/>
+          </a:prstGeom>
+          <a:noFill/>
+          <a:ln/>
+        </p:spPr>
+        <p:txBody>
+          <a:bodyPr wrap="square" lIns="0" tIns="0" rIns="0" bIns="0" rtlCol="0" anchor="t"/>
+          <a:lstStyle/>
+          <a:p>
+            <a:pPr indent="0" marL="0">
+              <a:buNone/>
+            </a:pPr>
+            <a:r>
+              <a:rPr lang="en-US" sz="2200" b="1" dirty="0">
+                <a:solidFill>
+                  <a:schemeClr val="accent1"/>
+                </a:solidFill>
+                <a:latin typeface="Arial" pitchFamily="34" charset="0"/>
+                <a:ea typeface="Arial" pitchFamily="34" charset="-122"/>
+                <a:cs typeface="Arial" pitchFamily="34" charset="-120"/>
+              </a:rPr>
+              <a:t>04</a:t>
+            </a:r>
+            <a:endParaRPr lang="en-US" sz="2200" dirty="0"/>
+          </a:p>
+        </p:txBody>
+      </p:sp>
+      <p:sp>
+        <p:nvSpPr>
+          <p:cNvPr id="18" name="text-73"/>
+          <p:cNvSpPr txBox="1"/>
+          <p:nvPr/>
+        </p:nvSpPr>
+        <p:spPr>
+          <a:xfrm>
+            <a:off x="7435850" y="3022600"/>
+            <a:ext cx="1600200" cy="317500"/>
+          </a:xfrm>
+          <a:prstGeom prst="rect">
+            <a:avLst/>
+          </a:prstGeom>
+          <a:noFill/>
+          <a:ln/>
+        </p:spPr>
+        <p:txBody>
+          <a:bodyPr wrap="square" lIns="0" tIns="0" rIns="0" bIns="0" rtlCol="0" anchor="t"/>
+          <a:lstStyle/>
+          <a:p>
+            <a:pPr indent="0" marL="0">
+              <a:buNone/>
+            </a:pPr>
+            <a:r>
+              <a:rPr lang="en-US" sz="1600" b="1" dirty="0">
+                <a:solidFill>
+                  <a:schemeClr val="tx1"/>
+                </a:solidFill>
+              </a:rPr>
+              <a:t>Публикация</a:t>
+            </a:r>
+            <a:endParaRPr lang="en-US" sz="1600" dirty="0"/>
+          </a:p>
+        </p:txBody>
+      </p:sp>
+      <p:sp>
+        <p:nvSpPr>
+          <p:cNvPr id="19" name="text-74"/>
+          <p:cNvSpPr txBox="1"/>
+          <p:nvPr/>
+        </p:nvSpPr>
+        <p:spPr>
+          <a:xfrm>
+            <a:off x="7435850" y="3429000"/>
+            <a:ext cx="1600200" cy="1143000"/>
+          </a:xfrm>
+          <a:prstGeom prst="rect">
+            <a:avLst/>
+          </a:prstGeom>
+          <a:noFill/>
+          <a:ln/>
+        </p:spPr>
+        <p:txBody>
+          <a:bodyPr wrap="square" lIns="0" tIns="0" rIns="0" bIns="0" rtlCol="0" anchor="t"/>
+          <a:lstStyle/>
+          <a:p>
+            <a:pPr indent="0" marL="0">
+              <a:buNone/>
+            </a:pPr>
+            <a:r>
+              <a:rPr lang="en-US" sz="1300" dirty="0">
+                <a:solidFill>
+                  <a:schemeClr val="tx2"/>
+                </a:solidFill>
+              </a:rPr>
+              <a:t>Адаптация под каждую площадку</a:t>
+            </a:r>
+            <a:endParaRPr lang="en-US" sz="1300" dirty="0"/>
+          </a:p>
+        </p:txBody>
+      </p:sp>
+      <p:sp>
+        <p:nvSpPr>
+          <p:cNvPr id="20" name="card-75"/>
+          <p:cNvSpPr/>
+          <p:nvPr/>
+        </p:nvSpPr>
+        <p:spPr>
+          <a:xfrm>
+            <a:off x="9372600" y="2286000"/>
+            <a:ext cx="2006600" cy="2413000"/>
+          </a:xfrm>
+          <a:prstGeom prst="roundRect">
+            <a:avLst>
+              <a:gd name="adj" fmla="val 7595"/>
+            </a:avLst>
+          </a:prstGeom>
+          <a:solidFill>
+            <a:schemeClr val="accent3"/>
+          </a:solidFill>
+          <a:ln/>
+        </p:spPr>
+      </p:sp>
+      <p:sp>
+        <p:nvSpPr>
+          <p:cNvPr id="21" name="text-76"/>
+          <p:cNvSpPr txBox="1"/>
+          <p:nvPr/>
+        </p:nvSpPr>
+        <p:spPr>
+          <a:xfrm>
+            <a:off x="9575800" y="2489200"/>
+            <a:ext cx="1600200" cy="406400"/>
+          </a:xfrm>
+          <a:prstGeom prst="rect">
+            <a:avLst/>
+          </a:prstGeom>
+          <a:noFill/>
+          <a:ln/>
+        </p:spPr>
+        <p:txBody>
+          <a:bodyPr wrap="square" lIns="0" tIns="0" rIns="0" bIns="0" rtlCol="0" anchor="t"/>
+          <a:lstStyle/>
+          <a:p>
+            <a:pPr indent="0" marL="0">
+              <a:buNone/>
+            </a:pPr>
+            <a:r>
+              <a:rPr lang="en-US" sz="2200" b="1" dirty="0">
+                <a:solidFill>
+                  <a:schemeClr val="accent1"/>
+                </a:solidFill>
+                <a:latin typeface="Arial" pitchFamily="34" charset="0"/>
+                <a:ea typeface="Arial" pitchFamily="34" charset="-122"/>
+                <a:cs typeface="Arial" pitchFamily="34" charset="-120"/>
+              </a:rPr>
+              <a:t>05</a:t>
+            </a:r>
+            <a:endParaRPr lang="en-US" sz="2200" dirty="0"/>
+          </a:p>
+        </p:txBody>
+      </p:sp>
+      <p:sp>
+        <p:nvSpPr>
+          <p:cNvPr id="22" name="text-77"/>
+          <p:cNvSpPr txBox="1"/>
+          <p:nvPr/>
+        </p:nvSpPr>
+        <p:spPr>
+          <a:xfrm>
+            <a:off x="9575800" y="3022600"/>
+            <a:ext cx="1600200" cy="317500"/>
+          </a:xfrm>
+          <a:prstGeom prst="rect">
+            <a:avLst/>
+          </a:prstGeom>
+          <a:noFill/>
+          <a:ln/>
+        </p:spPr>
+        <p:txBody>
+          <a:bodyPr wrap="square" lIns="0" tIns="0" rIns="0" bIns="0" rtlCol="0" anchor="t"/>
+          <a:lstStyle/>
+          <a:p>
+            <a:pPr indent="0" marL="0">
+              <a:buNone/>
+            </a:pPr>
+            <a:r>
+              <a:rPr lang="en-US" sz="1600" b="1" dirty="0">
+                <a:solidFill>
+                  <a:schemeClr val="tx1"/>
+                </a:solidFill>
+              </a:rPr>
+              <a:t>Анализ</a:t>
+            </a:r>
+            <a:endParaRPr lang="en-US" sz="1600" dirty="0"/>
+          </a:p>
+        </p:txBody>
+      </p:sp>
+      <p:sp>
+        <p:nvSpPr>
+          <p:cNvPr id="23" name="text-78"/>
+          <p:cNvSpPr txBox="1"/>
+          <p:nvPr/>
+        </p:nvSpPr>
+        <p:spPr>
+          <a:xfrm>
+            <a:off x="9575800" y="3429000"/>
+            <a:ext cx="1600200" cy="1143000"/>
+          </a:xfrm>
+          <a:prstGeom prst="rect">
+            <a:avLst/>
+          </a:prstGeom>
+          <a:noFill/>
+          <a:ln/>
+        </p:spPr>
+        <p:txBody>
+          <a:bodyPr wrap="square" lIns="0" tIns="0" rIns="0" bIns="0" rtlCol="0" anchor="t"/>
+          <a:lstStyle/>
+          <a:p>
+            <a:pPr indent="0" marL="0">
+              <a:buNone/>
+            </a:pPr>
+            <a:r>
+              <a:rPr lang="en-US" sz="1300" dirty="0">
+                <a:solidFill>
+                  <a:schemeClr val="tx2"/>
+                </a:solidFill>
+              </a:rPr>
+              <a:t>Охваты, вовлечённость, тесты хуков и форматов</a:t>
+            </a:r>
+            <a:endParaRPr lang="en-US" sz="1300" dirty="0"/>
+          </a:p>
+        </p:txBody>
+      </p:sp>
+      <p:sp>
+        <p:nvSpPr>
+          <p:cNvPr id="24" name="text-79"/>
+          <p:cNvSpPr txBox="1"/>
+          <p:nvPr/>
+        </p:nvSpPr>
+        <p:spPr>
+          <a:xfrm>
+            <a:off x="812800" y="5016500"/>
             <a:ext cx="10566400" cy="381000"/>
           </a:xfrm>
           <a:prstGeom prst="rect">
@@ -6750,7 +6133,7 @@
                   <a:schemeClr val="tx2"/>
                 </a:solidFill>
               </a:rPr>
-              <a:t>Аналитика: GA, GSC, Яндекс Метрика. Ежемесячная отчётность по ключевым метрикам для руководства.</a:t>
+              <a:t>Каждый ролик работает на задачу: охват, вовлечённость, узнаваемость или конверсия.</a:t>
             </a:r>
             <a:endParaRPr lang="en-US" sz="1600" dirty="0"/>
           </a:p>
@@ -6858,7 +6241,7 @@
                   <a:schemeClr val="accent1"/>
                 </a:solidFill>
               </a:rPr>
-              <a:t>ОПЫТ · 2024–2025</a:t>
+              <a:t>КОМПЕТЕНЦИИ</a:t>
             </a:r>
             <a:endParaRPr lang="en-US" sz="1400" dirty="0"/>
           </a:p>
@@ -6899,7 +6282,7 @@
                 <a:ea typeface="Arial" pitchFamily="34" charset="-122"/>
                 <a:cs typeface="Arial" pitchFamily="34" charset="-120"/>
               </a:rPr>
-              <a:t>Международный B2C: Booking Lane</a:t>
+              <a:t>Что я умею делать хорошо</a:t>
             </a:r>
             <a:endParaRPr lang="en-US" sz="3200" dirty="0"/>
           </a:p>
@@ -6907,36 +6290,73 @@
       </p:sp>
       <p:sp>
         <p:nvSpPr>
-          <p:cNvPr id="4" name="card-78"/>
+          <p:cNvPr id="4" name="rule-80"/>
           <p:cNvSpPr/>
           <p:nvPr/>
         </p:nvSpPr>
         <p:spPr>
           <a:xfrm>
-            <a:off x="812800" y="2286000"/>
-            <a:ext cx="6248400" cy="2540000"/>
-          </a:xfrm>
-          <a:prstGeom prst="roundRect">
-            <a:avLst>
-              <a:gd name="adj" fmla="val 6000"/>
-            </a:avLst>
-          </a:prstGeom>
-          <a:solidFill>
-            <a:schemeClr val="accent3"/>
-          </a:solidFill>
-          <a:ln/>
-        </p:spPr>
-      </p:sp>
-      <p:sp>
-        <p:nvSpPr>
-          <p:cNvPr id="5" name="text-79"/>
-          <p:cNvSpPr txBox="1"/>
-          <p:nvPr/>
-        </p:nvSpPr>
-        <p:spPr>
-          <a:xfrm>
-            <a:off x="1117600" y="2590800"/>
-            <a:ext cx="5638800" cy="571500"/>
+            <a:off x="812800" y="2413000"/>
+            <a:ext cx="5181600" cy="0"/>
+          </a:xfrm>
+          <a:prstGeom prst="line">
+            <a:avLst/>
+          </a:prstGeom>
+          <a:noFill/>
+          <a:ln w="19050">
+            <a:solidFill>
+              <a:schemeClr val="tx1"/>
+            </a:solidFill>
+            <a:prstDash val="solid"/>
+          </a:ln>
+        </p:spPr>
+      </p:sp>
+      <p:sp>
+        <p:nvSpPr>
+          <p:cNvPr id="5" name="text-81"/>
+          <p:cNvSpPr txBox="1"/>
+          <p:nvPr/>
+        </p:nvSpPr>
+        <p:spPr>
+          <a:xfrm>
+            <a:off x="812800" y="2565400"/>
+            <a:ext cx="5181600" cy="330200"/>
+          </a:xfrm>
+          <a:prstGeom prst="rect">
+            <a:avLst/>
+          </a:prstGeom>
+          <a:noFill/>
+          <a:ln/>
+        </p:spPr>
+        <p:txBody>
+          <a:bodyPr wrap="square" lIns="0" tIns="0" rIns="0" bIns="0" rtlCol="0" anchor="t"/>
+          <a:lstStyle/>
+          <a:p>
+            <a:pPr indent="0" marL="0">
+              <a:buNone/>
+            </a:pPr>
+            <a:r>
+              <a:rPr lang="en-US" sz="1800" b="1" dirty="0">
+                <a:solidFill>
+                  <a:schemeClr val="tx1"/>
+                </a:solidFill>
+              </a:rPr>
+              <a:t>SMM и стратегия</a:t>
+            </a:r>
+            <a:endParaRPr lang="en-US" sz="1800" dirty="0"/>
+          </a:p>
+        </p:txBody>
+      </p:sp>
+      <p:sp>
+        <p:nvSpPr>
+          <p:cNvPr id="6" name="text-82"/>
+          <p:cNvSpPr txBox="1"/>
+          <p:nvPr/>
+        </p:nvSpPr>
+        <p:spPr>
+          <a:xfrm>
+            <a:off x="812800" y="2946400"/>
+            <a:ext cx="5181600" cy="762000"/>
           </a:xfrm>
           <a:prstGeom prst="rect">
             <a:avLst/>
@@ -6954,10 +6374,10 @@
             <a:r>
               <a:rPr lang="en-US" sz="1400" dirty="0">
                 <a:solidFill>
-                  <a:schemeClr val="accent5"/>
-                </a:solidFill>
-              </a:rPr>
-              <a:t>Маркетолог, частичная занятость · премиальный букинг, США</a:t>
+                  <a:schemeClr val="tx2"/>
+                </a:solidFill>
+              </a:rPr>
+              <a:t>SMM-стратегия, контент-план, позиционирование бренда, анализ трендов и конкурентов, рост аудитории</a:t>
             </a:r>
             <a:endParaRPr lang="en-US" sz="1400" dirty="0"/>
           </a:p>
@@ -6965,111 +6385,168 @@
       </p:sp>
       <p:sp>
         <p:nvSpPr>
-          <p:cNvPr id="6" name="text-80"/>
-          <p:cNvSpPr txBox="1"/>
-          <p:nvPr/>
-        </p:nvSpPr>
-        <p:spPr>
-          <a:xfrm>
-            <a:off x="1117600" y="3302000"/>
-            <a:ext cx="5638800" cy="1397000"/>
-          </a:xfrm>
-          <a:prstGeom prst="rect">
-            <a:avLst/>
-          </a:prstGeom>
-          <a:noFill/>
-          <a:ln/>
-        </p:spPr>
-        <p:txBody>
-          <a:bodyPr wrap="square" lIns="0" tIns="0" rIns="0" bIns="0" rtlCol="0" anchor="t"/>
-          <a:lstStyle/>
-          <a:p>
-            <a:pPr indent="0" marL="0">
-              <a:buNone/>
-            </a:pPr>
-            <a:r>
-              <a:rPr lang="en-US" sz="1600" dirty="0">
+          <p:cNvPr id="7" name="rule-83"/>
+          <p:cNvSpPr/>
+          <p:nvPr/>
+        </p:nvSpPr>
+        <p:spPr>
+          <a:xfrm>
+            <a:off x="6197600" y="2413000"/>
+            <a:ext cx="5181600" cy="0"/>
+          </a:xfrm>
+          <a:prstGeom prst="line">
+            <a:avLst/>
+          </a:prstGeom>
+          <a:noFill/>
+          <a:ln w="19050">
+            <a:solidFill>
+              <a:schemeClr val="tx1"/>
+            </a:solidFill>
+            <a:prstDash val="solid"/>
+          </a:ln>
+        </p:spPr>
+      </p:sp>
+      <p:sp>
+        <p:nvSpPr>
+          <p:cNvPr id="8" name="text-84"/>
+          <p:cNvSpPr txBox="1"/>
+          <p:nvPr/>
+        </p:nvSpPr>
+        <p:spPr>
+          <a:xfrm>
+            <a:off x="6197600" y="2565400"/>
+            <a:ext cx="5181600" cy="330200"/>
+          </a:xfrm>
+          <a:prstGeom prst="rect">
+            <a:avLst/>
+          </a:prstGeom>
+          <a:noFill/>
+          <a:ln/>
+        </p:spPr>
+        <p:txBody>
+          <a:bodyPr wrap="square" lIns="0" tIns="0" rIns="0" bIns="0" rtlCol="0" anchor="t"/>
+          <a:lstStyle/>
+          <a:p>
+            <a:pPr indent="0" marL="0">
+              <a:buNone/>
+            </a:pPr>
+            <a:r>
+              <a:rPr lang="en-US" sz="1800" b="1" dirty="0">
+                <a:solidFill>
+                  <a:schemeClr val="tx1"/>
+                </a:solidFill>
+              </a:rPr>
+              <a:t>Контент и продакшн</a:t>
+            </a:r>
+            <a:endParaRPr lang="en-US" sz="1800" dirty="0"/>
+          </a:p>
+        </p:txBody>
+      </p:sp>
+      <p:sp>
+        <p:nvSpPr>
+          <p:cNvPr id="9" name="text-85"/>
+          <p:cNvSpPr txBox="1"/>
+          <p:nvPr/>
+        </p:nvSpPr>
+        <p:spPr>
+          <a:xfrm>
+            <a:off x="6197600" y="2946400"/>
+            <a:ext cx="5181600" cy="762000"/>
+          </a:xfrm>
+          <a:prstGeom prst="rect">
+            <a:avLst/>
+          </a:prstGeom>
+          <a:noFill/>
+          <a:ln/>
+        </p:spPr>
+        <p:txBody>
+          <a:bodyPr wrap="square" lIns="0" tIns="0" rIns="0" bIns="0" rtlCol="0" anchor="t"/>
+          <a:lstStyle/>
+          <a:p>
+            <a:pPr indent="0" marL="0">
+              <a:buNone/>
+            </a:pPr>
+            <a:r>
+              <a:rPr lang="en-US" sz="1400" dirty="0">
                 <a:solidFill>
                   <a:schemeClr val="tx2"/>
                 </a:solidFill>
               </a:rPr>
-              <a:t>Англоязычный рынок: исследование аудитории, медиапланы, контекст и таргет, SEO, отчётность по Google Analytics.</a:t>
-            </a:r>
-            <a:endParaRPr lang="en-US" sz="1600" dirty="0"/>
-          </a:p>
-        </p:txBody>
-      </p:sp>
-      <p:sp>
-        <p:nvSpPr>
-          <p:cNvPr id="7" name="card-81"/>
+              <a:t>Reels, TikTok, Shorts, Stories, сценарии, копирайтинг, сторителлинг, производство коротких видео</a:t>
+            </a:r>
+            <a:endParaRPr lang="en-US" sz="1400" dirty="0"/>
+          </a:p>
+        </p:txBody>
+      </p:sp>
+      <p:sp>
+        <p:nvSpPr>
+          <p:cNvPr id="10" name="rule-86"/>
           <p:cNvSpPr/>
           <p:nvPr/>
         </p:nvSpPr>
         <p:spPr>
           <a:xfrm>
-            <a:off x="7264400" y="2286000"/>
-            <a:ext cx="2032000" cy="2540000"/>
-          </a:xfrm>
-          <a:prstGeom prst="roundRect">
-            <a:avLst>
-              <a:gd name="adj" fmla="val 7500"/>
-            </a:avLst>
-          </a:prstGeom>
-          <a:solidFill>
-            <a:schemeClr val="tx1"/>
-          </a:solidFill>
-          <a:ln/>
-        </p:spPr>
-      </p:sp>
-      <p:sp>
-        <p:nvSpPr>
-          <p:cNvPr id="8" name="text-82"/>
-          <p:cNvSpPr txBox="1"/>
-          <p:nvPr/>
-        </p:nvSpPr>
-        <p:spPr>
-          <a:xfrm>
-            <a:off x="7518400" y="2857500"/>
-            <a:ext cx="1524000" cy="635000"/>
-          </a:xfrm>
-          <a:prstGeom prst="rect">
-            <a:avLst/>
-          </a:prstGeom>
-          <a:noFill/>
-          <a:ln/>
-        </p:spPr>
-        <p:txBody>
-          <a:bodyPr wrap="square" lIns="0" tIns="0" rIns="0" bIns="0" rtlCol="0" anchor="t"/>
-          <a:lstStyle/>
-          <a:p>
-            <a:pPr indent="0" marL="0">
-              <a:buNone/>
-            </a:pPr>
-            <a:r>
-              <a:rPr lang="en-US" sz="3200" b="1" dirty="0">
-                <a:solidFill>
-                  <a:schemeClr val="accent2"/>
-                </a:solidFill>
-                <a:latin typeface="Arial" pitchFamily="34" charset="0"/>
-                <a:ea typeface="Arial" pitchFamily="34" charset="-122"/>
-                <a:cs typeface="Arial" pitchFamily="34" charset="-120"/>
-              </a:rPr>
-              <a:t>4,2</a:t>
-            </a:r>
-            <a:endParaRPr lang="en-US" sz="3200" dirty="0"/>
-          </a:p>
-        </p:txBody>
-      </p:sp>
-      <p:sp>
-        <p:nvSpPr>
-          <p:cNvPr id="9" name="text-83"/>
-          <p:cNvSpPr txBox="1"/>
-          <p:nvPr/>
-        </p:nvSpPr>
-        <p:spPr>
-          <a:xfrm>
-            <a:off x="7518400" y="3619500"/>
-            <a:ext cx="1524000" cy="635000"/>
+            <a:off x="812800" y="3937000"/>
+            <a:ext cx="5181600" cy="0"/>
+          </a:xfrm>
+          <a:prstGeom prst="line">
+            <a:avLst/>
+          </a:prstGeom>
+          <a:noFill/>
+          <a:ln w="19050">
+            <a:solidFill>
+              <a:schemeClr val="tx1"/>
+            </a:solidFill>
+            <a:prstDash val="solid"/>
+          </a:ln>
+        </p:spPr>
+      </p:sp>
+      <p:sp>
+        <p:nvSpPr>
+          <p:cNvPr id="11" name="text-87"/>
+          <p:cNvSpPr txBox="1"/>
+          <p:nvPr/>
+        </p:nvSpPr>
+        <p:spPr>
+          <a:xfrm>
+            <a:off x="812800" y="4089400"/>
+            <a:ext cx="5181600" cy="330200"/>
+          </a:xfrm>
+          <a:prstGeom prst="rect">
+            <a:avLst/>
+          </a:prstGeom>
+          <a:noFill/>
+          <a:ln/>
+        </p:spPr>
+        <p:txBody>
+          <a:bodyPr wrap="square" lIns="0" tIns="0" rIns="0" bIns="0" rtlCol="0" anchor="t"/>
+          <a:lstStyle/>
+          <a:p>
+            <a:pPr indent="0" marL="0">
+              <a:buNone/>
+            </a:pPr>
+            <a:r>
+              <a:rPr lang="en-US" sz="1800" b="1" dirty="0">
+                <a:solidFill>
+                  <a:schemeClr val="tx1"/>
+                </a:solidFill>
+              </a:rPr>
+              <a:t>Аналитика и рост</a:t>
+            </a:r>
+            <a:endParaRPr lang="en-US" sz="1800" dirty="0"/>
+          </a:p>
+        </p:txBody>
+      </p:sp>
+      <p:sp>
+        <p:nvSpPr>
+          <p:cNvPr id="12" name="text-88"/>
+          <p:cNvSpPr txBox="1"/>
+          <p:nvPr/>
+        </p:nvSpPr>
+        <p:spPr>
+          <a:xfrm>
+            <a:off x="812800" y="4470400"/>
+            <a:ext cx="5181600" cy="762000"/>
           </a:xfrm>
           <a:prstGeom prst="rect">
             <a:avLst/>
@@ -7087,10 +6564,10 @@
             <a:r>
               <a:rPr lang="en-US" sz="1400" dirty="0">
                 <a:solidFill>
-                  <a:schemeClr val="accent6"/>
-                </a:solidFill>
-              </a:rPr>
-              <a:t>ROAS кампаний</a:t>
+                  <a:schemeClr val="tx2"/>
+                </a:solidFill>
+              </a:rPr>
+              <a:t>Отслеживание KPI, A/B-тесты, контент под конверсию</a:t>
             </a:r>
             <a:endParaRPr lang="en-US" sz="1400" dirty="0"/>
           </a:p>
@@ -7098,75 +6575,73 @@
       </p:sp>
       <p:sp>
         <p:nvSpPr>
-          <p:cNvPr id="10" name="card-84"/>
+          <p:cNvPr id="13" name="rule-89"/>
           <p:cNvSpPr/>
           <p:nvPr/>
         </p:nvSpPr>
         <p:spPr>
           <a:xfrm>
-            <a:off x="9398000" y="2286000"/>
-            <a:ext cx="2032000" cy="2540000"/>
-          </a:xfrm>
-          <a:prstGeom prst="roundRect">
-            <a:avLst>
-              <a:gd name="adj" fmla="val 7500"/>
-            </a:avLst>
-          </a:prstGeom>
-          <a:solidFill>
-            <a:schemeClr val="tx1"/>
-          </a:solidFill>
-          <a:ln/>
-        </p:spPr>
-      </p:sp>
-      <p:sp>
-        <p:nvSpPr>
-          <p:cNvPr id="11" name="text-85"/>
-          <p:cNvSpPr txBox="1"/>
-          <p:nvPr/>
-        </p:nvSpPr>
-        <p:spPr>
-          <a:xfrm>
-            <a:off x="9652000" y="2857500"/>
-            <a:ext cx="1524000" cy="635000"/>
-          </a:xfrm>
-          <a:prstGeom prst="rect">
-            <a:avLst/>
-          </a:prstGeom>
-          <a:noFill/>
-          <a:ln/>
-        </p:spPr>
-        <p:txBody>
-          <a:bodyPr wrap="square" lIns="0" tIns="0" rIns="0" bIns="0" rtlCol="0" anchor="t"/>
-          <a:lstStyle/>
-          <a:p>
-            <a:pPr indent="0" marL="0">
-              <a:buNone/>
-            </a:pPr>
-            <a:r>
-              <a:rPr lang="en-US" sz="3200" b="1" dirty="0">
-                <a:solidFill>
-                  <a:schemeClr val="accent2"/>
-                </a:solidFill>
-                <a:latin typeface="Arial" pitchFamily="34" charset="0"/>
-                <a:ea typeface="Arial" pitchFamily="34" charset="-122"/>
-                <a:cs typeface="Arial" pitchFamily="34" charset="-120"/>
-              </a:rPr>
-              <a:t>+90%</a:t>
-            </a:r>
-            <a:endParaRPr lang="en-US" sz="3200" dirty="0"/>
-          </a:p>
-        </p:txBody>
-      </p:sp>
-      <p:sp>
-        <p:nvSpPr>
-          <p:cNvPr id="12" name="text-86"/>
-          <p:cNvSpPr txBox="1"/>
-          <p:nvPr/>
-        </p:nvSpPr>
-        <p:spPr>
-          <a:xfrm>
-            <a:off x="9652000" y="3619500"/>
-            <a:ext cx="1524000" cy="635000"/>
+            <a:off x="6197600" y="3937000"/>
+            <a:ext cx="5181600" cy="0"/>
+          </a:xfrm>
+          <a:prstGeom prst="line">
+            <a:avLst/>
+          </a:prstGeom>
+          <a:noFill/>
+          <a:ln w="19050">
+            <a:solidFill>
+              <a:schemeClr val="tx1"/>
+            </a:solidFill>
+            <a:prstDash val="solid"/>
+          </a:ln>
+        </p:spPr>
+      </p:sp>
+      <p:sp>
+        <p:nvSpPr>
+          <p:cNvPr id="14" name="text-90"/>
+          <p:cNvSpPr txBox="1"/>
+          <p:nvPr/>
+        </p:nvSpPr>
+        <p:spPr>
+          <a:xfrm>
+            <a:off x="6197600" y="4089400"/>
+            <a:ext cx="5181600" cy="330200"/>
+          </a:xfrm>
+          <a:prstGeom prst="rect">
+            <a:avLst/>
+          </a:prstGeom>
+          <a:noFill/>
+          <a:ln/>
+        </p:spPr>
+        <p:txBody>
+          <a:bodyPr wrap="square" lIns="0" tIns="0" rIns="0" bIns="0" rtlCol="0" anchor="t"/>
+          <a:lstStyle/>
+          <a:p>
+            <a:pPr indent="0" marL="0">
+              <a:buNone/>
+            </a:pPr>
+            <a:r>
+              <a:rPr lang="en-US" sz="1800" b="1" dirty="0">
+                <a:solidFill>
+                  <a:schemeClr val="tx1"/>
+                </a:solidFill>
+              </a:rPr>
+              <a:t>Креатив + результат</a:t>
+            </a:r>
+            <a:endParaRPr lang="en-US" sz="1800" dirty="0"/>
+          </a:p>
+        </p:txBody>
+      </p:sp>
+      <p:sp>
+        <p:nvSpPr>
+          <p:cNvPr id="15" name="text-91"/>
+          <p:cNvSpPr txBox="1"/>
+          <p:nvPr/>
+        </p:nvSpPr>
+        <p:spPr>
+          <a:xfrm>
+            <a:off x="6197600" y="4470400"/>
+            <a:ext cx="5181600" cy="762000"/>
           </a:xfrm>
           <a:prstGeom prst="rect">
             <a:avLst/>
@@ -7184,10 +6659,10 @@
             <a:r>
               <a:rPr lang="en-US" sz="1400" dirty="0">
                 <a:solidFill>
-                  <a:schemeClr val="accent6"/>
-                </a:solidFill>
-              </a:rPr>
-              <a:t>органики за 5 месяцев</a:t>
+                  <a:schemeClr val="tx2"/>
+                </a:solidFill>
+              </a:rPr>
+              <a:t>Охваты, вовлечённость, узнаваемость и контент, который поддерживает бизнес-цели</a:t>
             </a:r>
             <a:endParaRPr lang="en-US" sz="1400" dirty="0"/>
           </a:p>
@@ -7295,7 +6770,7 @@
                   <a:schemeClr val="accent1"/>
                 </a:solidFill>
               </a:rPr>
-              <a:t>КОМПЕТЕНЦИИ</a:t>
+              <a:t>ИНСТРУМЕНТЫ</a:t>
             </a:r>
             <a:endParaRPr lang="en-US" sz="1400" dirty="0"/>
           </a:p>
@@ -7336,7 +6811,7 @@
                 <a:ea typeface="Arial" pitchFamily="34" charset="-122"/>
                 <a:cs typeface="Arial" pitchFamily="34" charset="-120"/>
               </a:rPr>
-              <a:t>Что я умею делать хорошо</a:t>
+              <a:t>Рабочий стек</a:t>
             </a:r>
             <a:endParaRPr lang="en-US" sz="3200" dirty="0"/>
           </a:p>
@@ -7344,19 +6819,766 @@
       </p:sp>
       <p:sp>
         <p:nvSpPr>
-          <p:cNvPr id="4" name="rule-87"/>
+          <p:cNvPr id="4" name="text-92"/>
+          <p:cNvSpPr txBox="1"/>
+          <p:nvPr/>
+        </p:nvSpPr>
+        <p:spPr>
+          <a:xfrm>
+            <a:off x="812800" y="2489200"/>
+            <a:ext cx="2032000" cy="254000"/>
+          </a:xfrm>
+          <a:prstGeom prst="rect">
+            <a:avLst/>
+          </a:prstGeom>
+          <a:noFill/>
+          <a:ln/>
+        </p:spPr>
+        <p:txBody>
+          <a:bodyPr wrap="square" lIns="0" tIns="0" rIns="0" bIns="0" rtlCol="0" anchor="t"/>
+          <a:lstStyle/>
+          <a:p>
+            <a:pPr indent="0" marL="0">
+              <a:buNone/>
+            </a:pPr>
+            <a:r>
+              <a:rPr lang="en-US" sz="1400" b="1" dirty="0">
+                <a:solidFill>
+                  <a:schemeClr val="tx1"/>
+                </a:solidFill>
+              </a:rPr>
+              <a:t>Площадки</a:t>
+            </a:r>
+            <a:endParaRPr lang="en-US" sz="1400" dirty="0"/>
+          </a:p>
+        </p:txBody>
+      </p:sp>
+      <p:sp>
+        <p:nvSpPr>
+          <p:cNvPr id="5" name="pill-93"/>
           <p:cNvSpPr/>
           <p:nvPr/>
         </p:nvSpPr>
         <p:spPr>
           <a:xfrm>
-            <a:off x="812800" y="2413000"/>
-            <a:ext cx="3422650" cy="0"/>
-          </a:xfrm>
-          <a:prstGeom prst="line">
-            <a:avLst/>
-          </a:prstGeom>
-          <a:noFill/>
+            <a:off x="3048000" y="2413000"/>
+            <a:ext cx="1098550" cy="381000"/>
+          </a:xfrm>
+          <a:prstGeom prst="roundRect">
+            <a:avLst>
+              <a:gd name="adj" fmla="val 50000"/>
+            </a:avLst>
+          </a:prstGeom>
+          <a:solidFill>
+            <a:schemeClr val="tx1"/>
+          </a:solidFill>
+          <a:ln/>
+        </p:spPr>
+      </p:sp>
+      <p:sp>
+        <p:nvSpPr>
+          <p:cNvPr id="6" name="text-94"/>
+          <p:cNvSpPr txBox="1"/>
+          <p:nvPr/>
+        </p:nvSpPr>
+        <p:spPr>
+          <a:xfrm>
+            <a:off x="3048000" y="2413000"/>
+            <a:ext cx="1098550" cy="381000"/>
+          </a:xfrm>
+          <a:prstGeom prst="rect">
+            <a:avLst/>
+          </a:prstGeom>
+          <a:noFill/>
+          <a:ln/>
+        </p:spPr>
+        <p:txBody>
+          <a:bodyPr wrap="square" lIns="0" tIns="0" rIns="0" bIns="0" rtlCol="0" anchor="ctr"/>
+          <a:lstStyle/>
+          <a:p>
+            <a:pPr algn="ctr" indent="0" marL="0">
+              <a:buNone/>
+            </a:pPr>
+            <a:r>
+              <a:rPr lang="en-US" sz="1300" dirty="0">
+                <a:solidFill>
+                  <a:schemeClr val="bg1"/>
+                </a:solidFill>
+              </a:rPr>
+              <a:t>Instagram</a:t>
+            </a:r>
+            <a:endParaRPr lang="en-US" sz="1300" dirty="0"/>
+          </a:p>
+        </p:txBody>
+      </p:sp>
+      <p:sp>
+        <p:nvSpPr>
+          <p:cNvPr id="7" name="pill-95"/>
+          <p:cNvSpPr/>
+          <p:nvPr/>
+        </p:nvSpPr>
+        <p:spPr>
+          <a:xfrm>
+            <a:off x="4248150" y="2413000"/>
+            <a:ext cx="850900" cy="381000"/>
+          </a:xfrm>
+          <a:prstGeom prst="roundRect">
+            <a:avLst>
+              <a:gd name="adj" fmla="val 50000"/>
+            </a:avLst>
+          </a:prstGeom>
+          <a:solidFill>
+            <a:schemeClr val="tx1"/>
+          </a:solidFill>
+          <a:ln/>
+        </p:spPr>
+      </p:sp>
+      <p:sp>
+        <p:nvSpPr>
+          <p:cNvPr id="8" name="text-96"/>
+          <p:cNvSpPr txBox="1"/>
+          <p:nvPr/>
+        </p:nvSpPr>
+        <p:spPr>
+          <a:xfrm>
+            <a:off x="4248150" y="2413000"/>
+            <a:ext cx="850900" cy="381000"/>
+          </a:xfrm>
+          <a:prstGeom prst="rect">
+            <a:avLst/>
+          </a:prstGeom>
+          <a:noFill/>
+          <a:ln/>
+        </p:spPr>
+        <p:txBody>
+          <a:bodyPr wrap="square" lIns="0" tIns="0" rIns="0" bIns="0" rtlCol="0" anchor="ctr"/>
+          <a:lstStyle/>
+          <a:p>
+            <a:pPr algn="ctr" indent="0" marL="0">
+              <a:buNone/>
+            </a:pPr>
+            <a:r>
+              <a:rPr lang="en-US" sz="1300" dirty="0">
+                <a:solidFill>
+                  <a:schemeClr val="bg1"/>
+                </a:solidFill>
+              </a:rPr>
+              <a:t>TikTok</a:t>
+            </a:r>
+            <a:endParaRPr lang="en-US" sz="1300" dirty="0"/>
+          </a:p>
+        </p:txBody>
+      </p:sp>
+      <p:sp>
+        <p:nvSpPr>
+          <p:cNvPr id="9" name="pill-97"/>
+          <p:cNvSpPr/>
+          <p:nvPr/>
+        </p:nvSpPr>
+        <p:spPr>
+          <a:xfrm>
+            <a:off x="5200650" y="2413000"/>
+            <a:ext cx="1016000" cy="381000"/>
+          </a:xfrm>
+          <a:prstGeom prst="roundRect">
+            <a:avLst>
+              <a:gd name="adj" fmla="val 50000"/>
+            </a:avLst>
+          </a:prstGeom>
+          <a:solidFill>
+            <a:schemeClr val="tx1"/>
+          </a:solidFill>
+          <a:ln/>
+        </p:spPr>
+      </p:sp>
+      <p:sp>
+        <p:nvSpPr>
+          <p:cNvPr id="10" name="text-98"/>
+          <p:cNvSpPr txBox="1"/>
+          <p:nvPr/>
+        </p:nvSpPr>
+        <p:spPr>
+          <a:xfrm>
+            <a:off x="5200650" y="2413000"/>
+            <a:ext cx="1016000" cy="381000"/>
+          </a:xfrm>
+          <a:prstGeom prst="rect">
+            <a:avLst/>
+          </a:prstGeom>
+          <a:noFill/>
+          <a:ln/>
+        </p:spPr>
+        <p:txBody>
+          <a:bodyPr wrap="square" lIns="0" tIns="0" rIns="0" bIns="0" rtlCol="0" anchor="ctr"/>
+          <a:lstStyle/>
+          <a:p>
+            <a:pPr algn="ctr" indent="0" marL="0">
+              <a:buNone/>
+            </a:pPr>
+            <a:r>
+              <a:rPr lang="en-US" sz="1300" dirty="0">
+                <a:solidFill>
+                  <a:schemeClr val="bg1"/>
+                </a:solidFill>
+              </a:rPr>
+              <a:t>Telegram</a:t>
+            </a:r>
+            <a:endParaRPr lang="en-US" sz="1300" dirty="0"/>
+          </a:p>
+        </p:txBody>
+      </p:sp>
+      <p:sp>
+        <p:nvSpPr>
+          <p:cNvPr id="11" name="pill-99"/>
+          <p:cNvSpPr/>
+          <p:nvPr/>
+        </p:nvSpPr>
+        <p:spPr>
+          <a:xfrm>
+            <a:off x="6318250" y="2413000"/>
+            <a:ext cx="1016000" cy="381000"/>
+          </a:xfrm>
+          <a:prstGeom prst="roundRect">
+            <a:avLst>
+              <a:gd name="adj" fmla="val 50000"/>
+            </a:avLst>
+          </a:prstGeom>
+          <a:solidFill>
+            <a:schemeClr val="tx1"/>
+          </a:solidFill>
+          <a:ln/>
+        </p:spPr>
+      </p:sp>
+      <p:sp>
+        <p:nvSpPr>
+          <p:cNvPr id="12" name="text-100"/>
+          <p:cNvSpPr txBox="1"/>
+          <p:nvPr/>
+        </p:nvSpPr>
+        <p:spPr>
+          <a:xfrm>
+            <a:off x="6318250" y="2413000"/>
+            <a:ext cx="1016000" cy="381000"/>
+          </a:xfrm>
+          <a:prstGeom prst="rect">
+            <a:avLst/>
+          </a:prstGeom>
+          <a:noFill/>
+          <a:ln/>
+        </p:spPr>
+        <p:txBody>
+          <a:bodyPr wrap="square" lIns="0" tIns="0" rIns="0" bIns="0" rtlCol="0" anchor="ctr"/>
+          <a:lstStyle/>
+          <a:p>
+            <a:pPr algn="ctr" indent="0" marL="0">
+              <a:buNone/>
+            </a:pPr>
+            <a:r>
+              <a:rPr lang="en-US" sz="1300" dirty="0">
+                <a:solidFill>
+                  <a:schemeClr val="bg1"/>
+                </a:solidFill>
+              </a:rPr>
+              <a:t>Facebook</a:t>
+            </a:r>
+            <a:endParaRPr lang="en-US" sz="1300" dirty="0"/>
+          </a:p>
+        </p:txBody>
+      </p:sp>
+      <p:sp>
+        <p:nvSpPr>
+          <p:cNvPr id="13" name="pill-101"/>
+          <p:cNvSpPr/>
+          <p:nvPr/>
+        </p:nvSpPr>
+        <p:spPr>
+          <a:xfrm>
+            <a:off x="7435850" y="2413000"/>
+            <a:ext cx="933450" cy="381000"/>
+          </a:xfrm>
+          <a:prstGeom prst="roundRect">
+            <a:avLst>
+              <a:gd name="adj" fmla="val 50000"/>
+            </a:avLst>
+          </a:prstGeom>
+          <a:solidFill>
+            <a:schemeClr val="tx1"/>
+          </a:solidFill>
+          <a:ln/>
+        </p:spPr>
+      </p:sp>
+      <p:sp>
+        <p:nvSpPr>
+          <p:cNvPr id="14" name="text-102"/>
+          <p:cNvSpPr txBox="1"/>
+          <p:nvPr/>
+        </p:nvSpPr>
+        <p:spPr>
+          <a:xfrm>
+            <a:off x="7435850" y="2413000"/>
+            <a:ext cx="933450" cy="381000"/>
+          </a:xfrm>
+          <a:prstGeom prst="rect">
+            <a:avLst/>
+          </a:prstGeom>
+          <a:noFill/>
+          <a:ln/>
+        </p:spPr>
+        <p:txBody>
+          <a:bodyPr wrap="square" lIns="0" tIns="0" rIns="0" bIns="0" rtlCol="0" anchor="ctr"/>
+          <a:lstStyle/>
+          <a:p>
+            <a:pPr algn="ctr" indent="0" marL="0">
+              <a:buNone/>
+            </a:pPr>
+            <a:r>
+              <a:rPr lang="en-US" sz="1300" dirty="0">
+                <a:solidFill>
+                  <a:schemeClr val="bg1"/>
+                </a:solidFill>
+              </a:rPr>
+              <a:t>Threads</a:t>
+            </a:r>
+            <a:endParaRPr lang="en-US" sz="1300" dirty="0"/>
+          </a:p>
+        </p:txBody>
+      </p:sp>
+      <p:sp>
+        <p:nvSpPr>
+          <p:cNvPr id="15" name="pill-103"/>
+          <p:cNvSpPr/>
+          <p:nvPr/>
+        </p:nvSpPr>
+        <p:spPr>
+          <a:xfrm>
+            <a:off x="8470900" y="2413000"/>
+            <a:ext cx="933450" cy="381000"/>
+          </a:xfrm>
+          <a:prstGeom prst="roundRect">
+            <a:avLst>
+              <a:gd name="adj" fmla="val 50000"/>
+            </a:avLst>
+          </a:prstGeom>
+          <a:solidFill>
+            <a:schemeClr val="tx1"/>
+          </a:solidFill>
+          <a:ln/>
+        </p:spPr>
+      </p:sp>
+      <p:sp>
+        <p:nvSpPr>
+          <p:cNvPr id="16" name="text-104"/>
+          <p:cNvSpPr txBox="1"/>
+          <p:nvPr/>
+        </p:nvSpPr>
+        <p:spPr>
+          <a:xfrm>
+            <a:off x="8470900" y="2413000"/>
+            <a:ext cx="933450" cy="381000"/>
+          </a:xfrm>
+          <a:prstGeom prst="rect">
+            <a:avLst/>
+          </a:prstGeom>
+          <a:noFill/>
+          <a:ln/>
+        </p:spPr>
+        <p:txBody>
+          <a:bodyPr wrap="square" lIns="0" tIns="0" rIns="0" bIns="0" rtlCol="0" anchor="ctr"/>
+          <a:lstStyle/>
+          <a:p>
+            <a:pPr algn="ctr" indent="0" marL="0">
+              <a:buNone/>
+            </a:pPr>
+            <a:r>
+              <a:rPr lang="en-US" sz="1300" dirty="0">
+                <a:solidFill>
+                  <a:schemeClr val="bg1"/>
+                </a:solidFill>
+              </a:rPr>
+              <a:t>YouTube</a:t>
+            </a:r>
+            <a:endParaRPr lang="en-US" sz="1300" dirty="0"/>
+          </a:p>
+        </p:txBody>
+      </p:sp>
+      <p:sp>
+        <p:nvSpPr>
+          <p:cNvPr id="17" name="text-105"/>
+          <p:cNvSpPr txBox="1"/>
+          <p:nvPr/>
+        </p:nvSpPr>
+        <p:spPr>
+          <a:xfrm>
+            <a:off x="812800" y="3251200"/>
+            <a:ext cx="2032000" cy="254000"/>
+          </a:xfrm>
+          <a:prstGeom prst="rect">
+            <a:avLst/>
+          </a:prstGeom>
+          <a:noFill/>
+          <a:ln/>
+        </p:spPr>
+        <p:txBody>
+          <a:bodyPr wrap="square" lIns="0" tIns="0" rIns="0" bIns="0" rtlCol="0" anchor="t"/>
+          <a:lstStyle/>
+          <a:p>
+            <a:pPr indent="0" marL="0">
+              <a:buNone/>
+            </a:pPr>
+            <a:r>
+              <a:rPr lang="en-US" sz="1400" b="1" dirty="0">
+                <a:solidFill>
+                  <a:schemeClr val="tx1"/>
+                </a:solidFill>
+              </a:rPr>
+              <a:t>Креатив</a:t>
+            </a:r>
+            <a:endParaRPr lang="en-US" sz="1400" dirty="0"/>
+          </a:p>
+        </p:txBody>
+      </p:sp>
+      <p:sp>
+        <p:nvSpPr>
+          <p:cNvPr id="18" name="pill-106"/>
+          <p:cNvSpPr/>
+          <p:nvPr/>
+        </p:nvSpPr>
+        <p:spPr>
+          <a:xfrm>
+            <a:off x="3048000" y="3175000"/>
+            <a:ext cx="850900" cy="381000"/>
+          </a:xfrm>
+          <a:prstGeom prst="roundRect">
+            <a:avLst>
+              <a:gd name="adj" fmla="val 50000"/>
+            </a:avLst>
+          </a:prstGeom>
+          <a:solidFill>
+            <a:schemeClr val="accent1"/>
+          </a:solidFill>
+          <a:ln/>
+        </p:spPr>
+      </p:sp>
+      <p:sp>
+        <p:nvSpPr>
+          <p:cNvPr id="19" name="text-107"/>
+          <p:cNvSpPr txBox="1"/>
+          <p:nvPr/>
+        </p:nvSpPr>
+        <p:spPr>
+          <a:xfrm>
+            <a:off x="3048000" y="3175000"/>
+            <a:ext cx="850900" cy="381000"/>
+          </a:xfrm>
+          <a:prstGeom prst="rect">
+            <a:avLst/>
+          </a:prstGeom>
+          <a:noFill/>
+          <a:ln/>
+        </p:spPr>
+        <p:txBody>
+          <a:bodyPr wrap="square" lIns="0" tIns="0" rIns="0" bIns="0" rtlCol="0" anchor="ctr"/>
+          <a:lstStyle/>
+          <a:p>
+            <a:pPr algn="ctr" indent="0" marL="0">
+              <a:buNone/>
+            </a:pPr>
+            <a:r>
+              <a:rPr lang="en-US" sz="1300" dirty="0">
+                <a:solidFill>
+                  <a:schemeClr val="accent3"/>
+                </a:solidFill>
+              </a:rPr>
+              <a:t>CapCut</a:t>
+            </a:r>
+            <a:endParaRPr lang="en-US" sz="1300" dirty="0"/>
+          </a:p>
+        </p:txBody>
+      </p:sp>
+      <p:sp>
+        <p:nvSpPr>
+          <p:cNvPr id="20" name="pill-108"/>
+          <p:cNvSpPr/>
+          <p:nvPr/>
+        </p:nvSpPr>
+        <p:spPr>
+          <a:xfrm>
+            <a:off x="4000500" y="3175000"/>
+            <a:ext cx="1841500" cy="381000"/>
+          </a:xfrm>
+          <a:prstGeom prst="roundRect">
+            <a:avLst>
+              <a:gd name="adj" fmla="val 50000"/>
+            </a:avLst>
+          </a:prstGeom>
+          <a:solidFill>
+            <a:schemeClr val="accent1"/>
+          </a:solidFill>
+          <a:ln/>
+        </p:spPr>
+      </p:sp>
+      <p:sp>
+        <p:nvSpPr>
+          <p:cNvPr id="21" name="text-109"/>
+          <p:cNvSpPr txBox="1"/>
+          <p:nvPr/>
+        </p:nvSpPr>
+        <p:spPr>
+          <a:xfrm>
+            <a:off x="4000500" y="3175000"/>
+            <a:ext cx="1841500" cy="381000"/>
+          </a:xfrm>
+          <a:prstGeom prst="rect">
+            <a:avLst/>
+          </a:prstGeom>
+          <a:noFill/>
+          <a:ln/>
+        </p:spPr>
+        <p:txBody>
+          <a:bodyPr wrap="square" lIns="0" tIns="0" rIns="0" bIns="0" rtlCol="0" anchor="ctr"/>
+          <a:lstStyle/>
+          <a:p>
+            <a:pPr algn="ctr" indent="0" marL="0">
+              <a:buNone/>
+            </a:pPr>
+            <a:r>
+              <a:rPr lang="en-US" sz="1300" dirty="0">
+                <a:solidFill>
+                  <a:schemeClr val="accent3"/>
+                </a:solidFill>
+              </a:rPr>
+              <a:t>Adobe Premiere Pro</a:t>
+            </a:r>
+            <a:endParaRPr lang="en-US" sz="1300" dirty="0"/>
+          </a:p>
+        </p:txBody>
+      </p:sp>
+      <p:sp>
+        <p:nvSpPr>
+          <p:cNvPr id="22" name="pill-110"/>
+          <p:cNvSpPr/>
+          <p:nvPr/>
+        </p:nvSpPr>
+        <p:spPr>
+          <a:xfrm>
+            <a:off x="5943600" y="3175000"/>
+            <a:ext cx="768350" cy="381000"/>
+          </a:xfrm>
+          <a:prstGeom prst="roundRect">
+            <a:avLst>
+              <a:gd name="adj" fmla="val 50000"/>
+            </a:avLst>
+          </a:prstGeom>
+          <a:solidFill>
+            <a:schemeClr val="accent1"/>
+          </a:solidFill>
+          <a:ln/>
+        </p:spPr>
+      </p:sp>
+      <p:sp>
+        <p:nvSpPr>
+          <p:cNvPr id="23" name="text-111"/>
+          <p:cNvSpPr txBox="1"/>
+          <p:nvPr/>
+        </p:nvSpPr>
+        <p:spPr>
+          <a:xfrm>
+            <a:off x="5943600" y="3175000"/>
+            <a:ext cx="768350" cy="381000"/>
+          </a:xfrm>
+          <a:prstGeom prst="rect">
+            <a:avLst/>
+          </a:prstGeom>
+          <a:noFill/>
+          <a:ln/>
+        </p:spPr>
+        <p:txBody>
+          <a:bodyPr wrap="square" lIns="0" tIns="0" rIns="0" bIns="0" rtlCol="0" anchor="ctr"/>
+          <a:lstStyle/>
+          <a:p>
+            <a:pPr algn="ctr" indent="0" marL="0">
+              <a:buNone/>
+            </a:pPr>
+            <a:r>
+              <a:rPr lang="en-US" sz="1300" dirty="0">
+                <a:solidFill>
+                  <a:schemeClr val="accent3"/>
+                </a:solidFill>
+              </a:rPr>
+              <a:t>Canva</a:t>
+            </a:r>
+            <a:endParaRPr lang="en-US" sz="1300" dirty="0"/>
+          </a:p>
+        </p:txBody>
+      </p:sp>
+      <p:sp>
+        <p:nvSpPr>
+          <p:cNvPr id="24" name="pill-112"/>
+          <p:cNvSpPr/>
+          <p:nvPr/>
+        </p:nvSpPr>
+        <p:spPr>
+          <a:xfrm>
+            <a:off x="6813550" y="3175000"/>
+            <a:ext cx="768350" cy="381000"/>
+          </a:xfrm>
+          <a:prstGeom prst="roundRect">
+            <a:avLst>
+              <a:gd name="adj" fmla="val 50000"/>
+            </a:avLst>
+          </a:prstGeom>
+          <a:solidFill>
+            <a:schemeClr val="accent1"/>
+          </a:solidFill>
+          <a:ln/>
+        </p:spPr>
+      </p:sp>
+      <p:sp>
+        <p:nvSpPr>
+          <p:cNvPr id="25" name="text-113"/>
+          <p:cNvSpPr txBox="1"/>
+          <p:nvPr/>
+        </p:nvSpPr>
+        <p:spPr>
+          <a:xfrm>
+            <a:off x="6813550" y="3175000"/>
+            <a:ext cx="768350" cy="381000"/>
+          </a:xfrm>
+          <a:prstGeom prst="rect">
+            <a:avLst/>
+          </a:prstGeom>
+          <a:noFill/>
+          <a:ln/>
+        </p:spPr>
+        <p:txBody>
+          <a:bodyPr wrap="square" lIns="0" tIns="0" rIns="0" bIns="0" rtlCol="0" anchor="ctr"/>
+          <a:lstStyle/>
+          <a:p>
+            <a:pPr algn="ctr" indent="0" marL="0">
+              <a:buNone/>
+            </a:pPr>
+            <a:r>
+              <a:rPr lang="en-US" sz="1300" dirty="0">
+                <a:solidFill>
+                  <a:schemeClr val="accent3"/>
+                </a:solidFill>
+              </a:rPr>
+              <a:t>Figma</a:t>
+            </a:r>
+            <a:endParaRPr lang="en-US" sz="1300" dirty="0"/>
+          </a:p>
+        </p:txBody>
+      </p:sp>
+      <p:sp>
+        <p:nvSpPr>
+          <p:cNvPr id="26" name="pill-114"/>
+          <p:cNvSpPr/>
+          <p:nvPr/>
+        </p:nvSpPr>
+        <p:spPr>
+          <a:xfrm>
+            <a:off x="7683500" y="3175000"/>
+            <a:ext cx="1098550" cy="381000"/>
+          </a:xfrm>
+          <a:prstGeom prst="roundRect">
+            <a:avLst>
+              <a:gd name="adj" fmla="val 50000"/>
+            </a:avLst>
+          </a:prstGeom>
+          <a:solidFill>
+            <a:schemeClr val="accent1"/>
+          </a:solidFill>
+          <a:ln/>
+        </p:spPr>
+      </p:sp>
+      <p:sp>
+        <p:nvSpPr>
+          <p:cNvPr id="27" name="text-115"/>
+          <p:cNvSpPr txBox="1"/>
+          <p:nvPr/>
+        </p:nvSpPr>
+        <p:spPr>
+          <a:xfrm>
+            <a:off x="7683500" y="3175000"/>
+            <a:ext cx="1098550" cy="381000"/>
+          </a:xfrm>
+          <a:prstGeom prst="rect">
+            <a:avLst/>
+          </a:prstGeom>
+          <a:noFill/>
+          <a:ln/>
+        </p:spPr>
+        <p:txBody>
+          <a:bodyPr wrap="square" lIns="0" tIns="0" rIns="0" bIns="0" rtlCol="0" anchor="ctr"/>
+          <a:lstStyle/>
+          <a:p>
+            <a:pPr algn="ctr" indent="0" marL="0">
+              <a:buNone/>
+            </a:pPr>
+            <a:r>
+              <a:rPr lang="en-US" sz="1300" dirty="0">
+                <a:solidFill>
+                  <a:schemeClr val="accent3"/>
+                </a:solidFill>
+              </a:rPr>
+              <a:t>Lightroom</a:t>
+            </a:r>
+            <a:endParaRPr lang="en-US" sz="1300" dirty="0"/>
+          </a:p>
+        </p:txBody>
+      </p:sp>
+      <p:sp>
+        <p:nvSpPr>
+          <p:cNvPr id="28" name="text-116"/>
+          <p:cNvSpPr txBox="1"/>
+          <p:nvPr/>
+        </p:nvSpPr>
+        <p:spPr>
+          <a:xfrm>
+            <a:off x="812800" y="4013200"/>
+            <a:ext cx="2032000" cy="254000"/>
+          </a:xfrm>
+          <a:prstGeom prst="rect">
+            <a:avLst/>
+          </a:prstGeom>
+          <a:noFill/>
+          <a:ln/>
+        </p:spPr>
+        <p:txBody>
+          <a:bodyPr wrap="square" lIns="0" tIns="0" rIns="0" bIns="0" rtlCol="0" anchor="t"/>
+          <a:lstStyle/>
+          <a:p>
+            <a:pPr indent="0" marL="0">
+              <a:buNone/>
+            </a:pPr>
+            <a:r>
+              <a:rPr lang="en-US" sz="1400" b="1" dirty="0">
+                <a:solidFill>
+                  <a:schemeClr val="tx1"/>
+                </a:solidFill>
+              </a:rPr>
+              <a:t>Аналитика</a:t>
+            </a:r>
+            <a:endParaRPr lang="en-US" sz="1400" dirty="0"/>
+          </a:p>
+        </p:txBody>
+      </p:sp>
+      <p:sp>
+        <p:nvSpPr>
+          <p:cNvPr id="29" name="pill-117"/>
+          <p:cNvSpPr/>
+          <p:nvPr/>
+        </p:nvSpPr>
+        <p:spPr>
+          <a:xfrm>
+            <a:off x="3048000" y="3937000"/>
+            <a:ext cx="1924050" cy="381000"/>
+          </a:xfrm>
+          <a:prstGeom prst="roundRect">
+            <a:avLst>
+              <a:gd name="adj" fmla="val 50000"/>
+            </a:avLst>
+          </a:prstGeom>
           <a:ln w="19050">
             <a:solidFill>
               <a:schemeClr val="tx1"/>
@@ -7367,91 +7589,56 @@
       </p:sp>
       <p:sp>
         <p:nvSpPr>
-          <p:cNvPr id="5" name="text-88"/>
-          <p:cNvSpPr txBox="1"/>
-          <p:nvPr/>
-        </p:nvSpPr>
-        <p:spPr>
-          <a:xfrm>
-            <a:off x="812800" y="2565400"/>
-            <a:ext cx="3422650" cy="330200"/>
-          </a:xfrm>
-          <a:prstGeom prst="rect">
-            <a:avLst/>
-          </a:prstGeom>
-          <a:noFill/>
-          <a:ln/>
-        </p:spPr>
-        <p:txBody>
-          <a:bodyPr wrap="square" lIns="0" tIns="0" rIns="0" bIns="0" rtlCol="0" anchor="t"/>
-          <a:lstStyle/>
-          <a:p>
-            <a:pPr indent="0" marL="0">
-              <a:buNone/>
-            </a:pPr>
-            <a:r>
-              <a:rPr lang="en-US" sz="1800" b="1" dirty="0">
+          <p:cNvPr id="30" name="text-118"/>
+          <p:cNvSpPr txBox="1"/>
+          <p:nvPr/>
+        </p:nvSpPr>
+        <p:spPr>
+          <a:xfrm>
+            <a:off x="3048000" y="3937000"/>
+            <a:ext cx="1924050" cy="381000"/>
+          </a:xfrm>
+          <a:prstGeom prst="rect">
+            <a:avLst/>
+          </a:prstGeom>
+          <a:noFill/>
+          <a:ln/>
+        </p:spPr>
+        <p:txBody>
+          <a:bodyPr wrap="square" lIns="0" tIns="0" rIns="0" bIns="0" rtlCol="0" anchor="ctr"/>
+          <a:lstStyle/>
+          <a:p>
+            <a:pPr algn="ctr" indent="0" marL="0">
+              <a:buNone/>
+            </a:pPr>
+            <a:r>
+              <a:rPr lang="en-US" sz="1300" dirty="0">
                 <a:solidFill>
                   <a:schemeClr val="tx1"/>
                 </a:solidFill>
               </a:rPr>
-              <a:t>SMM-стратегия</a:t>
-            </a:r>
-            <a:endParaRPr lang="en-US" sz="1800" dirty="0"/>
-          </a:p>
-        </p:txBody>
-      </p:sp>
-      <p:sp>
-        <p:nvSpPr>
-          <p:cNvPr id="6" name="text-89"/>
-          <p:cNvSpPr txBox="1"/>
-          <p:nvPr/>
-        </p:nvSpPr>
-        <p:spPr>
-          <a:xfrm>
-            <a:off x="812800" y="2946400"/>
-            <a:ext cx="3422650" cy="762000"/>
-          </a:xfrm>
-          <a:prstGeom prst="rect">
-            <a:avLst/>
-          </a:prstGeom>
-          <a:noFill/>
-          <a:ln/>
-        </p:spPr>
-        <p:txBody>
-          <a:bodyPr wrap="square" lIns="0" tIns="0" rIns="0" bIns="0" rtlCol="0" anchor="t"/>
-          <a:lstStyle/>
-          <a:p>
-            <a:pPr indent="0" marL="0">
-              <a:buNone/>
-            </a:pPr>
-            <a:r>
-              <a:rPr lang="en-US" sz="1400" dirty="0">
-                <a:solidFill>
-                  <a:schemeClr val="tx2"/>
-                </a:solidFill>
-              </a:rPr>
-              <a:t>Позиционирование, рубрикатор, контент-план на месяц</a:t>
-            </a:r>
-            <a:endParaRPr lang="en-US" sz="1400" dirty="0"/>
-          </a:p>
-        </p:txBody>
-      </p:sp>
-      <p:sp>
-        <p:nvSpPr>
-          <p:cNvPr id="7" name="rule-90"/>
+              <a:t>Meta Business Suite</a:t>
+            </a:r>
+            <a:endParaRPr lang="en-US" sz="1300" dirty="0"/>
+          </a:p>
+        </p:txBody>
+      </p:sp>
+      <p:sp>
+        <p:nvSpPr>
+          <p:cNvPr id="31" name="pill-119"/>
           <p:cNvSpPr/>
           <p:nvPr/>
         </p:nvSpPr>
         <p:spPr>
           <a:xfrm>
-            <a:off x="4387850" y="2413000"/>
-            <a:ext cx="3422650" cy="0"/>
-          </a:xfrm>
-          <a:prstGeom prst="line">
-            <a:avLst/>
-          </a:prstGeom>
-          <a:noFill/>
+            <a:off x="5073650" y="3937000"/>
+            <a:ext cx="1676400" cy="381000"/>
+          </a:xfrm>
+          <a:prstGeom prst="roundRect">
+            <a:avLst>
+              <a:gd name="adj" fmla="val 50000"/>
+            </a:avLst>
+          </a:prstGeom>
           <a:ln w="19050">
             <a:solidFill>
               <a:schemeClr val="tx1"/>
@@ -7462,91 +7649,56 @@
       </p:sp>
       <p:sp>
         <p:nvSpPr>
-          <p:cNvPr id="8" name="text-91"/>
-          <p:cNvSpPr txBox="1"/>
-          <p:nvPr/>
-        </p:nvSpPr>
-        <p:spPr>
-          <a:xfrm>
-            <a:off x="4387850" y="2565400"/>
-            <a:ext cx="3422650" cy="330200"/>
-          </a:xfrm>
-          <a:prstGeom prst="rect">
-            <a:avLst/>
-          </a:prstGeom>
-          <a:noFill/>
-          <a:ln/>
-        </p:spPr>
-        <p:txBody>
-          <a:bodyPr wrap="square" lIns="0" tIns="0" rIns="0" bIns="0" rtlCol="0" anchor="t"/>
-          <a:lstStyle/>
-          <a:p>
-            <a:pPr indent="0" marL="0">
-              <a:buNone/>
-            </a:pPr>
-            <a:r>
-              <a:rPr lang="en-US" sz="1800" b="1" dirty="0">
+          <p:cNvPr id="32" name="text-120"/>
+          <p:cNvSpPr txBox="1"/>
+          <p:nvPr/>
+        </p:nvSpPr>
+        <p:spPr>
+          <a:xfrm>
+            <a:off x="5073650" y="3937000"/>
+            <a:ext cx="1676400" cy="381000"/>
+          </a:xfrm>
+          <a:prstGeom prst="rect">
+            <a:avLst/>
+          </a:prstGeom>
+          <a:noFill/>
+          <a:ln/>
+        </p:spPr>
+        <p:txBody>
+          <a:bodyPr wrap="square" lIns="0" tIns="0" rIns="0" bIns="0" rtlCol="0" anchor="ctr"/>
+          <a:lstStyle/>
+          <a:p>
+            <a:pPr algn="ctr" indent="0" marL="0">
+              <a:buNone/>
+            </a:pPr>
+            <a:r>
+              <a:rPr lang="en-US" sz="1300" dirty="0">
                 <a:solidFill>
                   <a:schemeClr val="tx1"/>
                 </a:solidFill>
               </a:rPr>
-              <a:t>Короткие видео</a:t>
-            </a:r>
-            <a:endParaRPr lang="en-US" sz="1800" dirty="0"/>
-          </a:p>
-        </p:txBody>
-      </p:sp>
-      <p:sp>
-        <p:nvSpPr>
-          <p:cNvPr id="9" name="text-92"/>
-          <p:cNvSpPr txBox="1"/>
-          <p:nvPr/>
-        </p:nvSpPr>
-        <p:spPr>
-          <a:xfrm>
-            <a:off x="4387850" y="2946400"/>
-            <a:ext cx="3422650" cy="762000"/>
-          </a:xfrm>
-          <a:prstGeom prst="rect">
-            <a:avLst/>
-          </a:prstGeom>
-          <a:noFill/>
-          <a:ln/>
-        </p:spPr>
-        <p:txBody>
-          <a:bodyPr wrap="square" lIns="0" tIns="0" rIns="0" bIns="0" rtlCol="0" anchor="t"/>
-          <a:lstStyle/>
-          <a:p>
-            <a:pPr indent="0" marL="0">
-              <a:buNone/>
-            </a:pPr>
-            <a:r>
-              <a:rPr lang="en-US" sz="1400" dirty="0">
-                <a:solidFill>
-                  <a:schemeClr val="tx2"/>
-                </a:solidFill>
-              </a:rPr>
-              <a:t>Сценарии, съёмка и монтаж Reels, TikTok, Shorts</a:t>
-            </a:r>
-            <a:endParaRPr lang="en-US" sz="1400" dirty="0"/>
-          </a:p>
-        </p:txBody>
-      </p:sp>
-      <p:sp>
-        <p:nvSpPr>
-          <p:cNvPr id="10" name="rule-93"/>
+              <a:t>Meta Ads Manager</a:t>
+            </a:r>
+            <a:endParaRPr lang="en-US" sz="1300" dirty="0"/>
+          </a:p>
+        </p:txBody>
+      </p:sp>
+      <p:sp>
+        <p:nvSpPr>
+          <p:cNvPr id="33" name="pill-121"/>
           <p:cNvSpPr/>
           <p:nvPr/>
         </p:nvSpPr>
         <p:spPr>
           <a:xfrm>
-            <a:off x="7962900" y="2413000"/>
-            <a:ext cx="3422650" cy="0"/>
-          </a:xfrm>
-          <a:prstGeom prst="line">
-            <a:avLst/>
-          </a:prstGeom>
-          <a:noFill/>
+            <a:off x="6851650" y="3937000"/>
+            <a:ext cx="1924050" cy="381000"/>
+          </a:xfrm>
+          <a:prstGeom prst="roundRect">
+            <a:avLst>
+              <a:gd name="adj" fmla="val 50000"/>
+            </a:avLst>
+          </a:prstGeom>
           <a:ln w="19050">
             <a:solidFill>
               <a:schemeClr val="tx1"/>
@@ -7557,91 +7709,56 @@
       </p:sp>
       <p:sp>
         <p:nvSpPr>
-          <p:cNvPr id="11" name="text-94"/>
-          <p:cNvSpPr txBox="1"/>
-          <p:nvPr/>
-        </p:nvSpPr>
-        <p:spPr>
-          <a:xfrm>
-            <a:off x="7962900" y="2565400"/>
-            <a:ext cx="3422650" cy="330200"/>
-          </a:xfrm>
-          <a:prstGeom prst="rect">
-            <a:avLst/>
-          </a:prstGeom>
-          <a:noFill/>
-          <a:ln/>
-        </p:spPr>
-        <p:txBody>
-          <a:bodyPr wrap="square" lIns="0" tIns="0" rIns="0" bIns="0" rtlCol="0" anchor="t"/>
-          <a:lstStyle/>
-          <a:p>
-            <a:pPr indent="0" marL="0">
-              <a:buNone/>
-            </a:pPr>
-            <a:r>
-              <a:rPr lang="en-US" sz="1800" b="1" dirty="0">
+          <p:cNvPr id="34" name="text-122"/>
+          <p:cNvSpPr txBox="1"/>
+          <p:nvPr/>
+        </p:nvSpPr>
+        <p:spPr>
+          <a:xfrm>
+            <a:off x="6851650" y="3937000"/>
+            <a:ext cx="1924050" cy="381000"/>
+          </a:xfrm>
+          <a:prstGeom prst="rect">
+            <a:avLst/>
+          </a:prstGeom>
+          <a:noFill/>
+          <a:ln/>
+        </p:spPr>
+        <p:txBody>
+          <a:bodyPr wrap="square" lIns="0" tIns="0" rIns="0" bIns="0" rtlCol="0" anchor="ctr"/>
+          <a:lstStyle/>
+          <a:p>
+            <a:pPr algn="ctr" indent="0" marL="0">
+              <a:buNone/>
+            </a:pPr>
+            <a:r>
+              <a:rPr lang="en-US" sz="1300" dirty="0">
                 <a:solidFill>
                   <a:schemeClr val="tx1"/>
                 </a:solidFill>
               </a:rPr>
-              <a:t>Тексты</a:t>
-            </a:r>
-            <a:endParaRPr lang="en-US" sz="1800" dirty="0"/>
-          </a:p>
-        </p:txBody>
-      </p:sp>
-      <p:sp>
-        <p:nvSpPr>
-          <p:cNvPr id="12" name="text-95"/>
-          <p:cNvSpPr txBox="1"/>
-          <p:nvPr/>
-        </p:nvSpPr>
-        <p:spPr>
-          <a:xfrm>
-            <a:off x="7962900" y="2946400"/>
-            <a:ext cx="3422650" cy="762000"/>
-          </a:xfrm>
-          <a:prstGeom prst="rect">
-            <a:avLst/>
-          </a:prstGeom>
-          <a:noFill/>
-          <a:ln/>
-        </p:spPr>
-        <p:txBody>
-          <a:bodyPr wrap="square" lIns="0" tIns="0" rIns="0" bIns="0" rtlCol="0" anchor="t"/>
-          <a:lstStyle/>
-          <a:p>
-            <a:pPr indent="0" marL="0">
-              <a:buNone/>
-            </a:pPr>
-            <a:r>
-              <a:rPr lang="en-US" sz="1400" dirty="0">
-                <a:solidFill>
-                  <a:schemeClr val="tx2"/>
-                </a:solidFill>
-              </a:rPr>
-              <a:t>Посты, карусели, Stories, Telegram, продающие тексты</a:t>
-            </a:r>
-            <a:endParaRPr lang="en-US" sz="1400" dirty="0"/>
-          </a:p>
-        </p:txBody>
-      </p:sp>
-      <p:sp>
-        <p:nvSpPr>
-          <p:cNvPr id="13" name="rule-96"/>
+              <a:t>Instagram Analytics</a:t>
+            </a:r>
+            <a:endParaRPr lang="en-US" sz="1300" dirty="0"/>
+          </a:p>
+        </p:txBody>
+      </p:sp>
+      <p:sp>
+        <p:nvSpPr>
+          <p:cNvPr id="35" name="pill-123"/>
           <p:cNvSpPr/>
           <p:nvPr/>
         </p:nvSpPr>
         <p:spPr>
           <a:xfrm>
-            <a:off x="812800" y="3937000"/>
-            <a:ext cx="3422650" cy="0"/>
-          </a:xfrm>
-          <a:prstGeom prst="line">
-            <a:avLst/>
-          </a:prstGeom>
-          <a:noFill/>
+            <a:off x="8877300" y="3937000"/>
+            <a:ext cx="1676400" cy="381000"/>
+          </a:xfrm>
+          <a:prstGeom prst="roundRect">
+            <a:avLst>
+              <a:gd name="adj" fmla="val 50000"/>
+            </a:avLst>
+          </a:prstGeom>
           <a:ln w="19050">
             <a:solidFill>
               <a:schemeClr val="tx1"/>
@@ -7652,91 +7769,56 @@
       </p:sp>
       <p:sp>
         <p:nvSpPr>
-          <p:cNvPr id="14" name="text-97"/>
-          <p:cNvSpPr txBox="1"/>
-          <p:nvPr/>
-        </p:nvSpPr>
-        <p:spPr>
-          <a:xfrm>
-            <a:off x="812800" y="4089400"/>
-            <a:ext cx="3422650" cy="330200"/>
-          </a:xfrm>
-          <a:prstGeom prst="rect">
-            <a:avLst/>
-          </a:prstGeom>
-          <a:noFill/>
-          <a:ln/>
-        </p:spPr>
-        <p:txBody>
-          <a:bodyPr wrap="square" lIns="0" tIns="0" rIns="0" bIns="0" rtlCol="0" anchor="t"/>
-          <a:lstStyle/>
-          <a:p>
-            <a:pPr indent="0" marL="0">
-              <a:buNone/>
-            </a:pPr>
-            <a:r>
-              <a:rPr lang="en-US" sz="1800" b="1" dirty="0">
+          <p:cNvPr id="36" name="text-124"/>
+          <p:cNvSpPr txBox="1"/>
+          <p:nvPr/>
+        </p:nvSpPr>
+        <p:spPr>
+          <a:xfrm>
+            <a:off x="8877300" y="3937000"/>
+            <a:ext cx="1676400" cy="381000"/>
+          </a:xfrm>
+          <a:prstGeom prst="rect">
+            <a:avLst/>
+          </a:prstGeom>
+          <a:noFill/>
+          <a:ln/>
+        </p:spPr>
+        <p:txBody>
+          <a:bodyPr wrap="square" lIns="0" tIns="0" rIns="0" bIns="0" rtlCol="0" anchor="ctr"/>
+          <a:lstStyle/>
+          <a:p>
+            <a:pPr algn="ctr" indent="0" marL="0">
+              <a:buNone/>
+            </a:pPr>
+            <a:r>
+              <a:rPr lang="en-US" sz="1300" dirty="0">
                 <a:solidFill>
                   <a:schemeClr val="tx1"/>
                 </a:solidFill>
               </a:rPr>
-              <a:t>Продвижение</a:t>
-            </a:r>
-            <a:endParaRPr lang="en-US" sz="1800" dirty="0"/>
-          </a:p>
-        </p:txBody>
-      </p:sp>
-      <p:sp>
-        <p:nvSpPr>
-          <p:cNvPr id="15" name="text-98"/>
-          <p:cNvSpPr txBox="1"/>
-          <p:nvPr/>
-        </p:nvSpPr>
-        <p:spPr>
-          <a:xfrm>
-            <a:off x="812800" y="4470400"/>
-            <a:ext cx="3422650" cy="762000"/>
-          </a:xfrm>
-          <a:prstGeom prst="rect">
-            <a:avLst/>
-          </a:prstGeom>
-          <a:noFill/>
-          <a:ln/>
-        </p:spPr>
-        <p:txBody>
-          <a:bodyPr wrap="square" lIns="0" tIns="0" rIns="0" bIns="0" rtlCol="0" anchor="t"/>
-          <a:lstStyle/>
-          <a:p>
-            <a:pPr indent="0" marL="0">
-              <a:buNone/>
-            </a:pPr>
-            <a:r>
-              <a:rPr lang="en-US" sz="1400" dirty="0">
-                <a:solidFill>
-                  <a:schemeClr val="tx2"/>
-                </a:solidFill>
-              </a:rPr>
-              <a:t>Таргет в Meta Ads, посевы, связка контента и продаж</a:t>
-            </a:r>
-            <a:endParaRPr lang="en-US" sz="1400" dirty="0"/>
-          </a:p>
-        </p:txBody>
-      </p:sp>
-      <p:sp>
-        <p:nvSpPr>
-          <p:cNvPr id="16" name="rule-99"/>
+              <a:t>TikTok Analytics</a:t>
+            </a:r>
+            <a:endParaRPr lang="en-US" sz="1300" dirty="0"/>
+          </a:p>
+        </p:txBody>
+      </p:sp>
+      <p:sp>
+        <p:nvSpPr>
+          <p:cNvPr id="37" name="pill-125"/>
           <p:cNvSpPr/>
           <p:nvPr/>
         </p:nvSpPr>
         <p:spPr>
           <a:xfrm>
-            <a:off x="4387850" y="3937000"/>
-            <a:ext cx="3422650" cy="0"/>
-          </a:xfrm>
-          <a:prstGeom prst="line">
-            <a:avLst/>
-          </a:prstGeom>
-          <a:noFill/>
+            <a:off x="3048000" y="4419600"/>
+            <a:ext cx="1511300" cy="381000"/>
+          </a:xfrm>
+          <a:prstGeom prst="roundRect">
+            <a:avLst>
+              <a:gd name="adj" fmla="val 50000"/>
+            </a:avLst>
+          </a:prstGeom>
           <a:ln w="19050">
             <a:solidFill>
               <a:schemeClr val="tx1"/>
@@ -7747,168 +7829,37 @@
       </p:sp>
       <p:sp>
         <p:nvSpPr>
-          <p:cNvPr id="17" name="text-100"/>
-          <p:cNvSpPr txBox="1"/>
-          <p:nvPr/>
-        </p:nvSpPr>
-        <p:spPr>
-          <a:xfrm>
-            <a:off x="4387850" y="4089400"/>
-            <a:ext cx="3422650" cy="330200"/>
-          </a:xfrm>
-          <a:prstGeom prst="rect">
-            <a:avLst/>
-          </a:prstGeom>
-          <a:noFill/>
-          <a:ln/>
-        </p:spPr>
-        <p:txBody>
-          <a:bodyPr wrap="square" lIns="0" tIns="0" rIns="0" bIns="0" rtlCol="0" anchor="t"/>
-          <a:lstStyle/>
-          <a:p>
-            <a:pPr indent="0" marL="0">
-              <a:buNone/>
-            </a:pPr>
-            <a:r>
-              <a:rPr lang="en-US" sz="1800" b="1" dirty="0">
+          <p:cNvPr id="38" name="text-126"/>
+          <p:cNvSpPr txBox="1"/>
+          <p:nvPr/>
+        </p:nvSpPr>
+        <p:spPr>
+          <a:xfrm>
+            <a:off x="3048000" y="4419600"/>
+            <a:ext cx="1511300" cy="381000"/>
+          </a:xfrm>
+          <a:prstGeom prst="rect">
+            <a:avLst/>
+          </a:prstGeom>
+          <a:noFill/>
+          <a:ln/>
+        </p:spPr>
+        <p:txBody>
+          <a:bodyPr wrap="square" lIns="0" tIns="0" rIns="0" bIns="0" rtlCol="0" anchor="ctr"/>
+          <a:lstStyle/>
+          <a:p>
+            <a:pPr algn="ctr" indent="0" marL="0">
+              <a:buNone/>
+            </a:pPr>
+            <a:r>
+              <a:rPr lang="en-US" sz="1300" dirty="0">
                 <a:solidFill>
                   <a:schemeClr val="tx1"/>
                 </a:solidFill>
               </a:rPr>
-              <a:t>Аналитика</a:t>
-            </a:r>
-            <a:endParaRPr lang="en-US" sz="1800" dirty="0"/>
-          </a:p>
-        </p:txBody>
-      </p:sp>
-      <p:sp>
-        <p:nvSpPr>
-          <p:cNvPr id="18" name="text-101"/>
-          <p:cNvSpPr txBox="1"/>
-          <p:nvPr/>
-        </p:nvSpPr>
-        <p:spPr>
-          <a:xfrm>
-            <a:off x="4387850" y="4470400"/>
-            <a:ext cx="3422650" cy="762000"/>
-          </a:xfrm>
-          <a:prstGeom prst="rect">
-            <a:avLst/>
-          </a:prstGeom>
-          <a:noFill/>
-          <a:ln/>
-        </p:spPr>
-        <p:txBody>
-          <a:bodyPr wrap="square" lIns="0" tIns="0" rIns="0" bIns="0" rtlCol="0" anchor="t"/>
-          <a:lstStyle/>
-          <a:p>
-            <a:pPr indent="0" marL="0">
-              <a:buNone/>
-            </a:pPr>
-            <a:r>
-              <a:rPr lang="en-US" sz="1400" dirty="0">
-                <a:solidFill>
-                  <a:schemeClr val="tx2"/>
-                </a:solidFill>
-              </a:rPr>
-              <a:t>Статистика площадок, GA, гипотезы и A/B-тесты форматов</a:t>
-            </a:r>
-            <a:endParaRPr lang="en-US" sz="1400" dirty="0"/>
-          </a:p>
-        </p:txBody>
-      </p:sp>
-      <p:sp>
-        <p:nvSpPr>
-          <p:cNvPr id="19" name="rule-102"/>
-          <p:cNvSpPr/>
-          <p:nvPr/>
-        </p:nvSpPr>
-        <p:spPr>
-          <a:xfrm>
-            <a:off x="7962900" y="3937000"/>
-            <a:ext cx="3422650" cy="0"/>
-          </a:xfrm>
-          <a:prstGeom prst="line">
-            <a:avLst/>
-          </a:prstGeom>
-          <a:noFill/>
-          <a:ln w="19050">
-            <a:solidFill>
-              <a:schemeClr val="tx1"/>
-            </a:solidFill>
-            <a:prstDash val="solid"/>
-          </a:ln>
-        </p:spPr>
-      </p:sp>
-      <p:sp>
-        <p:nvSpPr>
-          <p:cNvPr id="20" name="text-103"/>
-          <p:cNvSpPr txBox="1"/>
-          <p:nvPr/>
-        </p:nvSpPr>
-        <p:spPr>
-          <a:xfrm>
-            <a:off x="7962900" y="4089400"/>
-            <a:ext cx="3422650" cy="330200"/>
-          </a:xfrm>
-          <a:prstGeom prst="rect">
-            <a:avLst/>
-          </a:prstGeom>
-          <a:noFill/>
-          <a:ln/>
-        </p:spPr>
-        <p:txBody>
-          <a:bodyPr wrap="square" lIns="0" tIns="0" rIns="0" bIns="0" rtlCol="0" anchor="t"/>
-          <a:lstStyle/>
-          <a:p>
-            <a:pPr indent="0" marL="0">
-              <a:buNone/>
-            </a:pPr>
-            <a:r>
-              <a:rPr lang="en-US" sz="1800" b="1" dirty="0">
-                <a:solidFill>
-                  <a:schemeClr val="tx1"/>
-                </a:solidFill>
-              </a:rPr>
-              <a:t>Командная работа</a:t>
-            </a:r>
-            <a:endParaRPr lang="en-US" sz="1800" dirty="0"/>
-          </a:p>
-        </p:txBody>
-      </p:sp>
-      <p:sp>
-        <p:nvSpPr>
-          <p:cNvPr id="21" name="text-104"/>
-          <p:cNvSpPr txBox="1"/>
-          <p:nvPr/>
-        </p:nvSpPr>
-        <p:spPr>
-          <a:xfrm>
-            <a:off x="7962900" y="4470400"/>
-            <a:ext cx="3422650" cy="762000"/>
-          </a:xfrm>
-          <a:prstGeom prst="rect">
-            <a:avLst/>
-          </a:prstGeom>
-          <a:noFill/>
-          <a:ln/>
-        </p:spPr>
-        <p:txBody>
-          <a:bodyPr wrap="square" lIns="0" tIns="0" rIns="0" bIns="0" rtlCol="0" anchor="t"/>
-          <a:lstStyle/>
-          <a:p>
-            <a:pPr indent="0" marL="0">
-              <a:buNone/>
-            </a:pPr>
-            <a:r>
-              <a:rPr lang="en-US" sz="1400" dirty="0">
-                <a:solidFill>
-                  <a:schemeClr val="tx2"/>
-                </a:solidFill>
-              </a:rPr>
-              <a:t>Руководила digital-командой, работала с дизайнерами</a:t>
-            </a:r>
-            <a:endParaRPr lang="en-US" sz="1400" dirty="0"/>
+              <a:t>YouTube Studio</a:t>
+            </a:r>
+            <a:endParaRPr lang="en-US" sz="1300" dirty="0"/>
           </a:p>
         </p:txBody>
       </p:sp>
@@ -8014,7 +7965,7 @@
                   <a:schemeClr val="accent1"/>
                 </a:solidFill>
               </a:rPr>
-              <a:t>ИНСТРУМЕНТЫ</a:t>
+              <a:t>ПЛАН ДЛЯ KOVER SCHOOL</a:t>
             </a:r>
             <a:endParaRPr lang="en-US" sz="1400" dirty="0"/>
           </a:p>
@@ -8055,7 +8006,7 @@
                 <a:ea typeface="Arial" pitchFamily="34" charset="-122"/>
                 <a:cs typeface="Arial" pitchFamily="34" charset="-120"/>
               </a:rPr>
-              <a:t>Рабочий стек</a:t>
+              <a:t>Первые 60 дней в роли</a:t>
             </a:r>
             <a:endParaRPr lang="en-US" sz="3200" dirty="0"/>
           </a:p>
@@ -8063,711 +8014,26 @@
       </p:sp>
       <p:sp>
         <p:nvSpPr>
-          <p:cNvPr id="4" name="text-105"/>
-          <p:cNvSpPr txBox="1"/>
-          <p:nvPr/>
-        </p:nvSpPr>
-        <p:spPr>
-          <a:xfrm>
-            <a:off x="812800" y="2489200"/>
-            <a:ext cx="2032000" cy="254000"/>
-          </a:xfrm>
-          <a:prstGeom prst="rect">
-            <a:avLst/>
-          </a:prstGeom>
-          <a:noFill/>
-          <a:ln/>
-        </p:spPr>
-        <p:txBody>
-          <a:bodyPr wrap="square" lIns="0" tIns="0" rIns="0" bIns="0" rtlCol="0" anchor="t"/>
-          <a:lstStyle/>
-          <a:p>
-            <a:pPr indent="0" marL="0">
-              <a:buNone/>
-            </a:pPr>
-            <a:r>
-              <a:rPr lang="en-US" sz="1400" b="1" dirty="0">
-                <a:solidFill>
-                  <a:schemeClr val="tx1"/>
-                </a:solidFill>
-              </a:rPr>
-              <a:t>Площадки</a:t>
-            </a:r>
-            <a:endParaRPr lang="en-US" sz="1400" dirty="0"/>
-          </a:p>
-        </p:txBody>
-      </p:sp>
-      <p:sp>
-        <p:nvSpPr>
-          <p:cNvPr id="5" name="pill-106"/>
+          <p:cNvPr id="4" name="card-127"/>
           <p:cNvSpPr/>
           <p:nvPr/>
         </p:nvSpPr>
         <p:spPr>
           <a:xfrm>
-            <a:off x="3048000" y="2413000"/>
-            <a:ext cx="1098550" cy="381000"/>
+            <a:off x="812800" y="2286000"/>
+            <a:ext cx="3384550" cy="2476500"/>
           </a:xfrm>
           <a:prstGeom prst="roundRect">
             <a:avLst>
-              <a:gd name="adj" fmla="val 50000"/>
+              <a:gd name="adj" fmla="val 6154"/>
             </a:avLst>
           </a:prstGeom>
           <a:solidFill>
-            <a:schemeClr val="tx1"/>
+            <a:schemeClr val="accent3"/>
           </a:solidFill>
-          <a:ln/>
-        </p:spPr>
-      </p:sp>
-      <p:sp>
-        <p:nvSpPr>
-          <p:cNvPr id="6" name="text-107"/>
-          <p:cNvSpPr txBox="1"/>
-          <p:nvPr/>
-        </p:nvSpPr>
-        <p:spPr>
-          <a:xfrm>
-            <a:off x="3048000" y="2413000"/>
-            <a:ext cx="1098550" cy="381000"/>
-          </a:xfrm>
-          <a:prstGeom prst="rect">
-            <a:avLst/>
-          </a:prstGeom>
-          <a:noFill/>
-          <a:ln/>
-        </p:spPr>
-        <p:txBody>
-          <a:bodyPr wrap="square" lIns="0" tIns="0" rIns="0" bIns="0" rtlCol="0" anchor="ctr"/>
-          <a:lstStyle/>
-          <a:p>
-            <a:pPr algn="ctr" indent="0" marL="0">
-              <a:buNone/>
-            </a:pPr>
-            <a:r>
-              <a:rPr lang="en-US" sz="1300" dirty="0">
-                <a:solidFill>
-                  <a:schemeClr val="bg1"/>
-                </a:solidFill>
-              </a:rPr>
-              <a:t>Instagram</a:t>
-            </a:r>
-            <a:endParaRPr lang="en-US" sz="1300" dirty="0"/>
-          </a:p>
-        </p:txBody>
-      </p:sp>
-      <p:sp>
-        <p:nvSpPr>
-          <p:cNvPr id="7" name="pill-108"/>
-          <p:cNvSpPr/>
-          <p:nvPr/>
-        </p:nvSpPr>
-        <p:spPr>
-          <a:xfrm>
-            <a:off x="4248150" y="2413000"/>
-            <a:ext cx="850900" cy="381000"/>
-          </a:xfrm>
-          <a:prstGeom prst="roundRect">
-            <a:avLst>
-              <a:gd name="adj" fmla="val 50000"/>
-            </a:avLst>
-          </a:prstGeom>
-          <a:solidFill>
-            <a:schemeClr val="tx1"/>
-          </a:solidFill>
-          <a:ln/>
-        </p:spPr>
-      </p:sp>
-      <p:sp>
-        <p:nvSpPr>
-          <p:cNvPr id="8" name="text-109"/>
-          <p:cNvSpPr txBox="1"/>
-          <p:nvPr/>
-        </p:nvSpPr>
-        <p:spPr>
-          <a:xfrm>
-            <a:off x="4248150" y="2413000"/>
-            <a:ext cx="850900" cy="381000"/>
-          </a:xfrm>
-          <a:prstGeom prst="rect">
-            <a:avLst/>
-          </a:prstGeom>
-          <a:noFill/>
-          <a:ln/>
-        </p:spPr>
-        <p:txBody>
-          <a:bodyPr wrap="square" lIns="0" tIns="0" rIns="0" bIns="0" rtlCol="0" anchor="ctr"/>
-          <a:lstStyle/>
-          <a:p>
-            <a:pPr algn="ctr" indent="0" marL="0">
-              <a:buNone/>
-            </a:pPr>
-            <a:r>
-              <a:rPr lang="en-US" sz="1300" dirty="0">
-                <a:solidFill>
-                  <a:schemeClr val="bg1"/>
-                </a:solidFill>
-              </a:rPr>
-              <a:t>TikTok</a:t>
-            </a:r>
-            <a:endParaRPr lang="en-US" sz="1300" dirty="0"/>
-          </a:p>
-        </p:txBody>
-      </p:sp>
-      <p:sp>
-        <p:nvSpPr>
-          <p:cNvPr id="9" name="pill-110"/>
-          <p:cNvSpPr/>
-          <p:nvPr/>
-        </p:nvSpPr>
-        <p:spPr>
-          <a:xfrm>
-            <a:off x="5200650" y="2413000"/>
-            <a:ext cx="1016000" cy="381000"/>
-          </a:xfrm>
-          <a:prstGeom prst="roundRect">
-            <a:avLst>
-              <a:gd name="adj" fmla="val 50000"/>
-            </a:avLst>
-          </a:prstGeom>
-          <a:solidFill>
-            <a:schemeClr val="tx1"/>
-          </a:solidFill>
-          <a:ln/>
-        </p:spPr>
-      </p:sp>
-      <p:sp>
-        <p:nvSpPr>
-          <p:cNvPr id="10" name="text-111"/>
-          <p:cNvSpPr txBox="1"/>
-          <p:nvPr/>
-        </p:nvSpPr>
-        <p:spPr>
-          <a:xfrm>
-            <a:off x="5200650" y="2413000"/>
-            <a:ext cx="1016000" cy="381000"/>
-          </a:xfrm>
-          <a:prstGeom prst="rect">
-            <a:avLst/>
-          </a:prstGeom>
-          <a:noFill/>
-          <a:ln/>
-        </p:spPr>
-        <p:txBody>
-          <a:bodyPr wrap="square" lIns="0" tIns="0" rIns="0" bIns="0" rtlCol="0" anchor="ctr"/>
-          <a:lstStyle/>
-          <a:p>
-            <a:pPr algn="ctr" indent="0" marL="0">
-              <a:buNone/>
-            </a:pPr>
-            <a:r>
-              <a:rPr lang="en-US" sz="1300" dirty="0">
-                <a:solidFill>
-                  <a:schemeClr val="bg1"/>
-                </a:solidFill>
-              </a:rPr>
-              <a:t>Facebook</a:t>
-            </a:r>
-            <a:endParaRPr lang="en-US" sz="1300" dirty="0"/>
-          </a:p>
-        </p:txBody>
-      </p:sp>
-      <p:sp>
-        <p:nvSpPr>
-          <p:cNvPr id="11" name="pill-112"/>
-          <p:cNvSpPr/>
-          <p:nvPr/>
-        </p:nvSpPr>
-        <p:spPr>
-          <a:xfrm>
-            <a:off x="6318250" y="2413000"/>
-            <a:ext cx="1016000" cy="381000"/>
-          </a:xfrm>
-          <a:prstGeom prst="roundRect">
-            <a:avLst>
-              <a:gd name="adj" fmla="val 50000"/>
-            </a:avLst>
-          </a:prstGeom>
-          <a:solidFill>
-            <a:schemeClr val="tx1"/>
-          </a:solidFill>
-          <a:ln/>
-        </p:spPr>
-      </p:sp>
-      <p:sp>
-        <p:nvSpPr>
-          <p:cNvPr id="12" name="text-113"/>
-          <p:cNvSpPr txBox="1"/>
-          <p:nvPr/>
-        </p:nvSpPr>
-        <p:spPr>
-          <a:xfrm>
-            <a:off x="6318250" y="2413000"/>
-            <a:ext cx="1016000" cy="381000"/>
-          </a:xfrm>
-          <a:prstGeom prst="rect">
-            <a:avLst/>
-          </a:prstGeom>
-          <a:noFill/>
-          <a:ln/>
-        </p:spPr>
-        <p:txBody>
-          <a:bodyPr wrap="square" lIns="0" tIns="0" rIns="0" bIns="0" rtlCol="0" anchor="ctr"/>
-          <a:lstStyle/>
-          <a:p>
-            <a:pPr algn="ctr" indent="0" marL="0">
-              <a:buNone/>
-            </a:pPr>
-            <a:r>
-              <a:rPr lang="en-US" sz="1300" dirty="0">
-                <a:solidFill>
-                  <a:schemeClr val="bg1"/>
-                </a:solidFill>
-              </a:rPr>
-              <a:t>Telegram</a:t>
-            </a:r>
-            <a:endParaRPr lang="en-US" sz="1300" dirty="0"/>
-          </a:p>
-        </p:txBody>
-      </p:sp>
-      <p:sp>
-        <p:nvSpPr>
-          <p:cNvPr id="13" name="pill-114"/>
-          <p:cNvSpPr/>
-          <p:nvPr/>
-        </p:nvSpPr>
-        <p:spPr>
-          <a:xfrm>
-            <a:off x="7435850" y="2413000"/>
-            <a:ext cx="1511300" cy="381000"/>
-          </a:xfrm>
-          <a:prstGeom prst="roundRect">
-            <a:avLst>
-              <a:gd name="adj" fmla="val 50000"/>
-            </a:avLst>
-          </a:prstGeom>
-          <a:solidFill>
-            <a:schemeClr val="tx1"/>
-          </a:solidFill>
-          <a:ln/>
-        </p:spPr>
-      </p:sp>
-      <p:sp>
-        <p:nvSpPr>
-          <p:cNvPr id="14" name="text-115"/>
-          <p:cNvSpPr txBox="1"/>
-          <p:nvPr/>
-        </p:nvSpPr>
-        <p:spPr>
-          <a:xfrm>
-            <a:off x="7435850" y="2413000"/>
-            <a:ext cx="1511300" cy="381000"/>
-          </a:xfrm>
-          <a:prstGeom prst="rect">
-            <a:avLst/>
-          </a:prstGeom>
-          <a:noFill/>
-          <a:ln/>
-        </p:spPr>
-        <p:txBody>
-          <a:bodyPr wrap="square" lIns="0" tIns="0" rIns="0" bIns="0" rtlCol="0" anchor="ctr"/>
-          <a:lstStyle/>
-          <a:p>
-            <a:pPr algn="ctr" indent="0" marL="0">
-              <a:buNone/>
-            </a:pPr>
-            <a:r>
-              <a:rPr lang="en-US" sz="1300" dirty="0">
-                <a:solidFill>
-                  <a:schemeClr val="bg1"/>
-                </a:solidFill>
-              </a:rPr>
-              <a:t>YouTube Shorts</a:t>
-            </a:r>
-            <a:endParaRPr lang="en-US" sz="1300" dirty="0"/>
-          </a:p>
-        </p:txBody>
-      </p:sp>
-      <p:sp>
-        <p:nvSpPr>
-          <p:cNvPr id="15" name="pill-116"/>
-          <p:cNvSpPr/>
-          <p:nvPr/>
-        </p:nvSpPr>
-        <p:spPr>
-          <a:xfrm>
-            <a:off x="9048750" y="2413000"/>
-            <a:ext cx="933450" cy="381000"/>
-          </a:xfrm>
-          <a:prstGeom prst="roundRect">
-            <a:avLst>
-              <a:gd name="adj" fmla="val 50000"/>
-            </a:avLst>
-          </a:prstGeom>
-          <a:solidFill>
-            <a:schemeClr val="tx1"/>
-          </a:solidFill>
-          <a:ln/>
-        </p:spPr>
-      </p:sp>
-      <p:sp>
-        <p:nvSpPr>
-          <p:cNvPr id="16" name="text-117"/>
-          <p:cNvSpPr txBox="1"/>
-          <p:nvPr/>
-        </p:nvSpPr>
-        <p:spPr>
-          <a:xfrm>
-            <a:off x="9048750" y="2413000"/>
-            <a:ext cx="933450" cy="381000"/>
-          </a:xfrm>
-          <a:prstGeom prst="rect">
-            <a:avLst/>
-          </a:prstGeom>
-          <a:noFill/>
-          <a:ln/>
-        </p:spPr>
-        <p:txBody>
-          <a:bodyPr wrap="square" lIns="0" tIns="0" rIns="0" bIns="0" rtlCol="0" anchor="ctr"/>
-          <a:lstStyle/>
-          <a:p>
-            <a:pPr algn="ctr" indent="0" marL="0">
-              <a:buNone/>
-            </a:pPr>
-            <a:r>
-              <a:rPr lang="en-US" sz="1300" dirty="0">
-                <a:solidFill>
-                  <a:schemeClr val="bg1"/>
-                </a:solidFill>
-              </a:rPr>
-              <a:t>Threads</a:t>
-            </a:r>
-            <a:endParaRPr lang="en-US" sz="1300" dirty="0"/>
-          </a:p>
-        </p:txBody>
-      </p:sp>
-      <p:sp>
-        <p:nvSpPr>
-          <p:cNvPr id="17" name="text-118"/>
-          <p:cNvSpPr txBox="1"/>
-          <p:nvPr/>
-        </p:nvSpPr>
-        <p:spPr>
-          <a:xfrm>
-            <a:off x="812800" y="3378200"/>
-            <a:ext cx="2032000" cy="254000"/>
-          </a:xfrm>
-          <a:prstGeom prst="rect">
-            <a:avLst/>
-          </a:prstGeom>
-          <a:noFill/>
-          <a:ln/>
-        </p:spPr>
-        <p:txBody>
-          <a:bodyPr wrap="square" lIns="0" tIns="0" rIns="0" bIns="0" rtlCol="0" anchor="t"/>
-          <a:lstStyle/>
-          <a:p>
-            <a:pPr indent="0" marL="0">
-              <a:buNone/>
-            </a:pPr>
-            <a:r>
-              <a:rPr lang="en-US" sz="1400" b="1" dirty="0">
-                <a:solidFill>
-                  <a:schemeClr val="tx1"/>
-                </a:solidFill>
-              </a:rPr>
-              <a:t>Контент и видео</a:t>
-            </a:r>
-            <a:endParaRPr lang="en-US" sz="1400" dirty="0"/>
-          </a:p>
-        </p:txBody>
-      </p:sp>
-      <p:sp>
-        <p:nvSpPr>
-          <p:cNvPr id="18" name="pill-119"/>
-          <p:cNvSpPr/>
-          <p:nvPr/>
-        </p:nvSpPr>
-        <p:spPr>
-          <a:xfrm>
-            <a:off x="3048000" y="3302000"/>
-            <a:ext cx="768350" cy="381000"/>
-          </a:xfrm>
-          <a:prstGeom prst="roundRect">
-            <a:avLst>
-              <a:gd name="adj" fmla="val 50000"/>
-            </a:avLst>
-          </a:prstGeom>
-          <a:solidFill>
-            <a:schemeClr val="accent1"/>
-          </a:solidFill>
-          <a:ln/>
-        </p:spPr>
-      </p:sp>
-      <p:sp>
-        <p:nvSpPr>
-          <p:cNvPr id="19" name="text-120"/>
-          <p:cNvSpPr txBox="1"/>
-          <p:nvPr/>
-        </p:nvSpPr>
-        <p:spPr>
-          <a:xfrm>
-            <a:off x="3048000" y="3302000"/>
-            <a:ext cx="768350" cy="381000"/>
-          </a:xfrm>
-          <a:prstGeom prst="rect">
-            <a:avLst/>
-          </a:prstGeom>
-          <a:noFill/>
-          <a:ln/>
-        </p:spPr>
-        <p:txBody>
-          <a:bodyPr wrap="square" lIns="0" tIns="0" rIns="0" bIns="0" rtlCol="0" anchor="ctr"/>
-          <a:lstStyle/>
-          <a:p>
-            <a:pPr algn="ctr" indent="0" marL="0">
-              <a:buNone/>
-            </a:pPr>
-            <a:r>
-              <a:rPr lang="en-US" sz="1300" dirty="0">
-                <a:solidFill>
-                  <a:schemeClr val="accent3"/>
-                </a:solidFill>
-              </a:rPr>
-              <a:t>Figma</a:t>
-            </a:r>
-            <a:endParaRPr lang="en-US" sz="1300" dirty="0"/>
-          </a:p>
-        </p:txBody>
-      </p:sp>
-      <p:sp>
-        <p:nvSpPr>
-          <p:cNvPr id="20" name="pill-121"/>
-          <p:cNvSpPr/>
-          <p:nvPr/>
-        </p:nvSpPr>
-        <p:spPr>
-          <a:xfrm>
-            <a:off x="3917950" y="3302000"/>
-            <a:ext cx="850900" cy="381000"/>
-          </a:xfrm>
-          <a:prstGeom prst="roundRect">
-            <a:avLst>
-              <a:gd name="adj" fmla="val 50000"/>
-            </a:avLst>
-          </a:prstGeom>
-          <a:solidFill>
-            <a:schemeClr val="accent1"/>
-          </a:solidFill>
-          <a:ln/>
-        </p:spPr>
-      </p:sp>
-      <p:sp>
-        <p:nvSpPr>
-          <p:cNvPr id="21" name="text-122"/>
-          <p:cNvSpPr txBox="1"/>
-          <p:nvPr/>
-        </p:nvSpPr>
-        <p:spPr>
-          <a:xfrm>
-            <a:off x="3917950" y="3302000"/>
-            <a:ext cx="850900" cy="381000"/>
-          </a:xfrm>
-          <a:prstGeom prst="rect">
-            <a:avLst/>
-          </a:prstGeom>
-          <a:noFill/>
-          <a:ln/>
-        </p:spPr>
-        <p:txBody>
-          <a:bodyPr wrap="square" lIns="0" tIns="0" rIns="0" bIns="0" rtlCol="0" anchor="ctr"/>
-          <a:lstStyle/>
-          <a:p>
-            <a:pPr algn="ctr" indent="0" marL="0">
-              <a:buNone/>
-            </a:pPr>
-            <a:r>
-              <a:rPr lang="en-US" sz="1300" dirty="0">
-                <a:solidFill>
-                  <a:schemeClr val="accent3"/>
-                </a:solidFill>
-              </a:rPr>
-              <a:t>CapCut</a:t>
-            </a:r>
-            <a:endParaRPr lang="en-US" sz="1300" dirty="0"/>
-          </a:p>
-        </p:txBody>
-      </p:sp>
-      <p:sp>
-        <p:nvSpPr>
-          <p:cNvPr id="22" name="pill-123"/>
-          <p:cNvSpPr/>
-          <p:nvPr/>
-        </p:nvSpPr>
-        <p:spPr>
-          <a:xfrm>
-            <a:off x="4870450" y="3302000"/>
-            <a:ext cx="768350" cy="381000"/>
-          </a:xfrm>
-          <a:prstGeom prst="roundRect">
-            <a:avLst>
-              <a:gd name="adj" fmla="val 50000"/>
-            </a:avLst>
-          </a:prstGeom>
-          <a:solidFill>
-            <a:schemeClr val="accent1"/>
-          </a:solidFill>
-          <a:ln/>
-        </p:spPr>
-      </p:sp>
-      <p:sp>
-        <p:nvSpPr>
-          <p:cNvPr id="23" name="text-124"/>
-          <p:cNvSpPr txBox="1"/>
-          <p:nvPr/>
-        </p:nvSpPr>
-        <p:spPr>
-          <a:xfrm>
-            <a:off x="4870450" y="3302000"/>
-            <a:ext cx="768350" cy="381000"/>
-          </a:xfrm>
-          <a:prstGeom prst="rect">
-            <a:avLst/>
-          </a:prstGeom>
-          <a:noFill/>
-          <a:ln/>
-        </p:spPr>
-        <p:txBody>
-          <a:bodyPr wrap="square" lIns="0" tIns="0" rIns="0" bIns="0" rtlCol="0" anchor="ctr"/>
-          <a:lstStyle/>
-          <a:p>
-            <a:pPr algn="ctr" indent="0" marL="0">
-              <a:buNone/>
-            </a:pPr>
-            <a:r>
-              <a:rPr lang="en-US" sz="1300" dirty="0">
-                <a:solidFill>
-                  <a:schemeClr val="accent3"/>
-                </a:solidFill>
-              </a:rPr>
-              <a:t>Canva</a:t>
-            </a:r>
-            <a:endParaRPr lang="en-US" sz="1300" dirty="0"/>
-          </a:p>
-        </p:txBody>
-      </p:sp>
-      <p:sp>
-        <p:nvSpPr>
-          <p:cNvPr id="24" name="pill-125"/>
-          <p:cNvSpPr/>
-          <p:nvPr/>
-        </p:nvSpPr>
-        <p:spPr>
-          <a:xfrm>
-            <a:off x="5740400" y="3302000"/>
-            <a:ext cx="1758950" cy="381000"/>
-          </a:xfrm>
-          <a:prstGeom prst="roundRect">
-            <a:avLst>
-              <a:gd name="adj" fmla="val 50000"/>
-            </a:avLst>
-          </a:prstGeom>
-          <a:solidFill>
-            <a:schemeClr val="accent1"/>
-          </a:solidFill>
-          <a:ln/>
-        </p:spPr>
-      </p:sp>
-      <p:sp>
-        <p:nvSpPr>
-          <p:cNvPr id="25" name="text-126"/>
-          <p:cNvSpPr txBox="1"/>
-          <p:nvPr/>
-        </p:nvSpPr>
-        <p:spPr>
-          <a:xfrm>
-            <a:off x="5740400" y="3302000"/>
-            <a:ext cx="1758950" cy="381000"/>
-          </a:xfrm>
-          <a:prstGeom prst="rect">
-            <a:avLst/>
-          </a:prstGeom>
-          <a:noFill/>
-          <a:ln/>
-        </p:spPr>
-        <p:txBody>
-          <a:bodyPr wrap="square" lIns="0" tIns="0" rIns="0" bIns="0" rtlCol="0" anchor="ctr"/>
-          <a:lstStyle/>
-          <a:p>
-            <a:pPr algn="ctr" indent="0" marL="0">
-              <a:buNone/>
-            </a:pPr>
-            <a:r>
-              <a:rPr lang="en-US" sz="1300" dirty="0">
-                <a:solidFill>
-                  <a:schemeClr val="accent3"/>
-                </a:solidFill>
-              </a:rPr>
-              <a:t>Premiere / InShot</a:t>
-            </a:r>
-            <a:endParaRPr lang="en-US" sz="1300" dirty="0"/>
-          </a:p>
-        </p:txBody>
-      </p:sp>
-      <p:sp>
-        <p:nvSpPr>
-          <p:cNvPr id="26" name="text-127"/>
-          <p:cNvSpPr txBox="1"/>
-          <p:nvPr/>
-        </p:nvSpPr>
-        <p:spPr>
-          <a:xfrm>
-            <a:off x="812800" y="4267200"/>
-            <a:ext cx="2032000" cy="254000"/>
-          </a:xfrm>
-          <a:prstGeom prst="rect">
-            <a:avLst/>
-          </a:prstGeom>
-          <a:noFill/>
-          <a:ln/>
-        </p:spPr>
-        <p:txBody>
-          <a:bodyPr wrap="square" lIns="0" tIns="0" rIns="0" bIns="0" rtlCol="0" anchor="t"/>
-          <a:lstStyle/>
-          <a:p>
-            <a:pPr indent="0" marL="0">
-              <a:buNone/>
-            </a:pPr>
-            <a:r>
-              <a:rPr lang="en-US" sz="1400" b="1" dirty="0">
-                <a:solidFill>
-                  <a:schemeClr val="tx1"/>
-                </a:solidFill>
-              </a:rPr>
-              <a:t>Реклама и данные</a:t>
-            </a:r>
-            <a:endParaRPr lang="en-US" sz="1400" dirty="0"/>
-          </a:p>
-        </p:txBody>
-      </p:sp>
-      <p:sp>
-        <p:nvSpPr>
-          <p:cNvPr id="27" name="pill-128"/>
-          <p:cNvSpPr/>
-          <p:nvPr/>
-        </p:nvSpPr>
-        <p:spPr>
-          <a:xfrm>
-            <a:off x="3048000" y="4191000"/>
-            <a:ext cx="1016000" cy="381000"/>
-          </a:xfrm>
-          <a:prstGeom prst="roundRect">
-            <a:avLst>
-              <a:gd name="adj" fmla="val 50000"/>
-            </a:avLst>
-          </a:prstGeom>
-          <a:ln w="19050">
+          <a:ln w="9525">
             <a:solidFill>
-              <a:schemeClr val="tx1"/>
+              <a:schemeClr val="accent4"/>
             </a:solidFill>
             <a:prstDash val="solid"/>
           </a:ln>
@@ -8775,59 +8041,134 @@
       </p:sp>
       <p:sp>
         <p:nvSpPr>
-          <p:cNvPr id="28" name="text-129"/>
-          <p:cNvSpPr txBox="1"/>
-          <p:nvPr/>
-        </p:nvSpPr>
-        <p:spPr>
-          <a:xfrm>
-            <a:off x="3048000" y="4191000"/>
-            <a:ext cx="1016000" cy="381000"/>
-          </a:xfrm>
-          <a:prstGeom prst="rect">
-            <a:avLst/>
-          </a:prstGeom>
-          <a:noFill/>
-          <a:ln/>
-        </p:spPr>
-        <p:txBody>
-          <a:bodyPr wrap="square" lIns="0" tIns="0" rIns="0" bIns="0" rtlCol="0" anchor="ctr"/>
-          <a:lstStyle/>
-          <a:p>
-            <a:pPr algn="ctr" indent="0" marL="0">
-              <a:buNone/>
-            </a:pPr>
-            <a:r>
-              <a:rPr lang="en-US" sz="1300" dirty="0">
+          <p:cNvPr id="5" name="text-128"/>
+          <p:cNvSpPr txBox="1"/>
+          <p:nvPr/>
+        </p:nvSpPr>
+        <p:spPr>
+          <a:xfrm>
+            <a:off x="1066800" y="2540000"/>
+            <a:ext cx="2876550" cy="228600"/>
+          </a:xfrm>
+          <a:prstGeom prst="rect">
+            <a:avLst/>
+          </a:prstGeom>
+          <a:noFill/>
+          <a:ln/>
+        </p:spPr>
+        <p:txBody>
+          <a:bodyPr wrap="square" lIns="0" tIns="0" rIns="0" bIns="0" rtlCol="0" anchor="t"/>
+          <a:lstStyle/>
+          <a:p>
+            <a:pPr indent="0" marL="0">
+              <a:buNone/>
+            </a:pPr>
+            <a:r>
+              <a:rPr lang="en-US" sz="1200" b="1" spc="200" kern="0" dirty="0">
+                <a:solidFill>
+                  <a:schemeClr val="accent1"/>
+                </a:solidFill>
+              </a:rPr>
+              <a:t>НЕДЕЛИ 1–2</a:t>
+            </a:r>
+            <a:endParaRPr lang="en-US" sz="1200" dirty="0"/>
+          </a:p>
+        </p:txBody>
+      </p:sp>
+      <p:sp>
+        <p:nvSpPr>
+          <p:cNvPr id="6" name="text-129"/>
+          <p:cNvSpPr txBox="1"/>
+          <p:nvPr/>
+        </p:nvSpPr>
+        <p:spPr>
+          <a:xfrm>
+            <a:off x="1066800" y="2844800"/>
+            <a:ext cx="2876550" cy="355600"/>
+          </a:xfrm>
+          <a:prstGeom prst="rect">
+            <a:avLst/>
+          </a:prstGeom>
+          <a:noFill/>
+          <a:ln/>
+        </p:spPr>
+        <p:txBody>
+          <a:bodyPr wrap="square" lIns="0" tIns="0" rIns="0" bIns="0" rtlCol="0" anchor="t"/>
+          <a:lstStyle/>
+          <a:p>
+            <a:pPr indent="0" marL="0">
+              <a:buNone/>
+            </a:pPr>
+            <a:r>
+              <a:rPr lang="en-US" sz="1800" b="1" dirty="0">
                 <a:solidFill>
                   <a:schemeClr val="tx1"/>
                 </a:solidFill>
               </a:rPr>
-              <a:t>Meta Ads</a:t>
-            </a:r>
-            <a:endParaRPr lang="en-US" sz="1300" dirty="0"/>
-          </a:p>
-        </p:txBody>
-      </p:sp>
-      <p:sp>
-        <p:nvSpPr>
-          <p:cNvPr id="29" name="pill-130"/>
+              <a:t>Аудит</a:t>
+            </a:r>
+            <a:endParaRPr lang="en-US" sz="1800" dirty="0"/>
+          </a:p>
+        </p:txBody>
+      </p:sp>
+      <p:sp>
+        <p:nvSpPr>
+          <p:cNvPr id="7" name="text-130"/>
+          <p:cNvSpPr txBox="1"/>
+          <p:nvPr/>
+        </p:nvSpPr>
+        <p:spPr>
+          <a:xfrm>
+            <a:off x="1066800" y="3302000"/>
+            <a:ext cx="2876550" cy="1333500"/>
+          </a:xfrm>
+          <a:prstGeom prst="rect">
+            <a:avLst/>
+          </a:prstGeom>
+          <a:noFill/>
+          <a:ln/>
+        </p:spPr>
+        <p:txBody>
+          <a:bodyPr wrap="square" lIns="0" tIns="0" rIns="0" bIns="0" rtlCol="0" anchor="t"/>
+          <a:lstStyle/>
+          <a:p>
+            <a:pPr indent="0" marL="0">
+              <a:buNone/>
+            </a:pPr>
+            <a:r>
+              <a:rPr lang="en-US" sz="1400" dirty="0">
+                <a:solidFill>
+                  <a:schemeClr val="tx2"/>
+                </a:solidFill>
+              </a:rPr>
+              <a:t>Разбор всех площадок, аудитории и конкурентов в EdTech. Рубрикатор и контент-план.</a:t>
+            </a:r>
+            <a:endParaRPr lang="en-US" sz="1400" dirty="0"/>
+          </a:p>
+        </p:txBody>
+      </p:sp>
+      <p:sp>
+        <p:nvSpPr>
+          <p:cNvPr id="8" name="card-131"/>
           <p:cNvSpPr/>
           <p:nvPr/>
         </p:nvSpPr>
         <p:spPr>
           <a:xfrm>
-            <a:off x="4165600" y="4191000"/>
-            <a:ext cx="1181100" cy="381000"/>
+            <a:off x="4400550" y="2286000"/>
+            <a:ext cx="3384550" cy="2476500"/>
           </a:xfrm>
           <a:prstGeom prst="roundRect">
             <a:avLst>
-              <a:gd name="adj" fmla="val 50000"/>
+              <a:gd name="adj" fmla="val 6154"/>
             </a:avLst>
           </a:prstGeom>
-          <a:ln w="19050">
+          <a:solidFill>
+            <a:schemeClr val="accent3"/>
+          </a:solidFill>
+          <a:ln w="9525">
             <a:solidFill>
-              <a:schemeClr val="tx1"/>
+              <a:schemeClr val="accent4"/>
             </a:solidFill>
             <a:prstDash val="solid"/>
           </a:ln>
@@ -8835,59 +8176,134 @@
       </p:sp>
       <p:sp>
         <p:nvSpPr>
-          <p:cNvPr id="30" name="text-131"/>
-          <p:cNvSpPr txBox="1"/>
-          <p:nvPr/>
-        </p:nvSpPr>
-        <p:spPr>
-          <a:xfrm>
-            <a:off x="4165600" y="4191000"/>
-            <a:ext cx="1181100" cy="381000"/>
-          </a:xfrm>
-          <a:prstGeom prst="rect">
-            <a:avLst/>
-          </a:prstGeom>
-          <a:noFill/>
-          <a:ln/>
-        </p:spPr>
-        <p:txBody>
-          <a:bodyPr wrap="square" lIns="0" tIns="0" rIns="0" bIns="0" rtlCol="0" anchor="ctr"/>
-          <a:lstStyle/>
-          <a:p>
-            <a:pPr algn="ctr" indent="0" marL="0">
-              <a:buNone/>
-            </a:pPr>
-            <a:r>
-              <a:rPr lang="en-US" sz="1300" dirty="0">
+          <p:cNvPr id="9" name="text-132"/>
+          <p:cNvSpPr txBox="1"/>
+          <p:nvPr/>
+        </p:nvSpPr>
+        <p:spPr>
+          <a:xfrm>
+            <a:off x="4654550" y="2540000"/>
+            <a:ext cx="2876550" cy="228600"/>
+          </a:xfrm>
+          <a:prstGeom prst="rect">
+            <a:avLst/>
+          </a:prstGeom>
+          <a:noFill/>
+          <a:ln/>
+        </p:spPr>
+        <p:txBody>
+          <a:bodyPr wrap="square" lIns="0" tIns="0" rIns="0" bIns="0" rtlCol="0" anchor="t"/>
+          <a:lstStyle/>
+          <a:p>
+            <a:pPr indent="0" marL="0">
+              <a:buNone/>
+            </a:pPr>
+            <a:r>
+              <a:rPr lang="en-US" sz="1200" b="1" spc="200" kern="0" dirty="0">
+                <a:solidFill>
+                  <a:schemeClr val="accent1"/>
+                </a:solidFill>
+              </a:rPr>
+              <a:t>НЕДЕЛИ 3–6</a:t>
+            </a:r>
+            <a:endParaRPr lang="en-US" sz="1200" dirty="0"/>
+          </a:p>
+        </p:txBody>
+      </p:sp>
+      <p:sp>
+        <p:nvSpPr>
+          <p:cNvPr id="10" name="text-133"/>
+          <p:cNvSpPr txBox="1"/>
+          <p:nvPr/>
+        </p:nvSpPr>
+        <p:spPr>
+          <a:xfrm>
+            <a:off x="4654550" y="2844800"/>
+            <a:ext cx="2876550" cy="355600"/>
+          </a:xfrm>
+          <a:prstGeom prst="rect">
+            <a:avLst/>
+          </a:prstGeom>
+          <a:noFill/>
+          <a:ln/>
+        </p:spPr>
+        <p:txBody>
+          <a:bodyPr wrap="square" lIns="0" tIns="0" rIns="0" bIns="0" rtlCol="0" anchor="t"/>
+          <a:lstStyle/>
+          <a:p>
+            <a:pPr indent="0" marL="0">
+              <a:buNone/>
+            </a:pPr>
+            <a:r>
+              <a:rPr lang="en-US" sz="1800" b="1" dirty="0">
                 <a:solidFill>
                   <a:schemeClr val="tx1"/>
                 </a:solidFill>
               </a:rPr>
-              <a:t>Google Ads</a:t>
-            </a:r>
-            <a:endParaRPr lang="en-US" sz="1300" dirty="0"/>
-          </a:p>
-        </p:txBody>
-      </p:sp>
-      <p:sp>
-        <p:nvSpPr>
-          <p:cNvPr id="31" name="pill-132"/>
+              <a:t>Тест форматов</a:t>
+            </a:r>
+            <a:endParaRPr lang="en-US" sz="1800" dirty="0"/>
+          </a:p>
+        </p:txBody>
+      </p:sp>
+      <p:sp>
+        <p:nvSpPr>
+          <p:cNvPr id="11" name="text-134"/>
+          <p:cNvSpPr txBox="1"/>
+          <p:nvPr/>
+        </p:nvSpPr>
+        <p:spPr>
+          <a:xfrm>
+            <a:off x="4654550" y="3302000"/>
+            <a:ext cx="2876550" cy="1333500"/>
+          </a:xfrm>
+          <a:prstGeom prst="rect">
+            <a:avLst/>
+          </a:prstGeom>
+          <a:noFill/>
+          <a:ln/>
+        </p:spPr>
+        <p:txBody>
+          <a:bodyPr wrap="square" lIns="0" tIns="0" rIns="0" bIns="0" rtlCol="0" anchor="t"/>
+          <a:lstStyle/>
+          <a:p>
+            <a:pPr indent="0" marL="0">
+              <a:buNone/>
+            </a:pPr>
+            <a:r>
+              <a:rPr lang="en-US" sz="1400" dirty="0">
+                <a:solidFill>
+                  <a:schemeClr val="tx2"/>
+                </a:solidFill>
+              </a:rPr>
+              <a:t>Reels, TikTok и Shorts: экспертные, трендовые, отзывы учеников. Личный бренд преподавателей.</a:t>
+            </a:r>
+            <a:endParaRPr lang="en-US" sz="1400" dirty="0"/>
+          </a:p>
+        </p:txBody>
+      </p:sp>
+      <p:sp>
+        <p:nvSpPr>
+          <p:cNvPr id="12" name="card-135"/>
           <p:cNvSpPr/>
           <p:nvPr/>
         </p:nvSpPr>
         <p:spPr>
           <a:xfrm>
-            <a:off x="5448300" y="4191000"/>
-            <a:ext cx="1676400" cy="381000"/>
+            <a:off x="7988300" y="2286000"/>
+            <a:ext cx="3384550" cy="2476500"/>
           </a:xfrm>
           <a:prstGeom prst="roundRect">
             <a:avLst>
-              <a:gd name="adj" fmla="val 50000"/>
+              <a:gd name="adj" fmla="val 6154"/>
             </a:avLst>
           </a:prstGeom>
-          <a:ln w="19050">
+          <a:solidFill>
+            <a:schemeClr val="accent3"/>
+          </a:solidFill>
+          <a:ln w="9525">
             <a:solidFill>
-              <a:schemeClr val="tx1"/>
+              <a:schemeClr val="accent4"/>
             </a:solidFill>
             <a:prstDash val="solid"/>
           </a:ln>
@@ -8895,277 +8311,145 @@
       </p:sp>
       <p:sp>
         <p:nvSpPr>
-          <p:cNvPr id="32" name="text-133"/>
-          <p:cNvSpPr txBox="1"/>
-          <p:nvPr/>
-        </p:nvSpPr>
-        <p:spPr>
-          <a:xfrm>
-            <a:off x="5448300" y="4191000"/>
-            <a:ext cx="1676400" cy="381000"/>
-          </a:xfrm>
-          <a:prstGeom prst="rect">
-            <a:avLst/>
-          </a:prstGeom>
-          <a:noFill/>
-          <a:ln/>
-        </p:spPr>
-        <p:txBody>
-          <a:bodyPr wrap="square" lIns="0" tIns="0" rIns="0" bIns="0" rtlCol="0" anchor="ctr"/>
-          <a:lstStyle/>
-          <a:p>
-            <a:pPr algn="ctr" indent="0" marL="0">
-              <a:buNone/>
-            </a:pPr>
-            <a:r>
-              <a:rPr lang="en-US" sz="1300" dirty="0">
+          <p:cNvPr id="13" name="text-136"/>
+          <p:cNvSpPr txBox="1"/>
+          <p:nvPr/>
+        </p:nvSpPr>
+        <p:spPr>
+          <a:xfrm>
+            <a:off x="8242300" y="2540000"/>
+            <a:ext cx="2876550" cy="228600"/>
+          </a:xfrm>
+          <a:prstGeom prst="rect">
+            <a:avLst/>
+          </a:prstGeom>
+          <a:noFill/>
+          <a:ln/>
+        </p:spPr>
+        <p:txBody>
+          <a:bodyPr wrap="square" lIns="0" tIns="0" rIns="0" bIns="0" rtlCol="0" anchor="t"/>
+          <a:lstStyle/>
+          <a:p>
+            <a:pPr indent="0" marL="0">
+              <a:buNone/>
+            </a:pPr>
+            <a:r>
+              <a:rPr lang="en-US" sz="1200" b="1" spc="200" kern="0" dirty="0">
+                <a:solidFill>
+                  <a:schemeClr val="accent1"/>
+                </a:solidFill>
+              </a:rPr>
+              <a:t>НЕДЕЛИ 7–8</a:t>
+            </a:r>
+            <a:endParaRPr lang="en-US" sz="1200" dirty="0"/>
+          </a:p>
+        </p:txBody>
+      </p:sp>
+      <p:sp>
+        <p:nvSpPr>
+          <p:cNvPr id="14" name="text-137"/>
+          <p:cNvSpPr txBox="1"/>
+          <p:nvPr/>
+        </p:nvSpPr>
+        <p:spPr>
+          <a:xfrm>
+            <a:off x="8242300" y="2844800"/>
+            <a:ext cx="2876550" cy="355600"/>
+          </a:xfrm>
+          <a:prstGeom prst="rect">
+            <a:avLst/>
+          </a:prstGeom>
+          <a:noFill/>
+          <a:ln/>
+        </p:spPr>
+        <p:txBody>
+          <a:bodyPr wrap="square" lIns="0" tIns="0" rIns="0" bIns="0" rtlCol="0" anchor="t"/>
+          <a:lstStyle/>
+          <a:p>
+            <a:pPr indent="0" marL="0">
+              <a:buNone/>
+            </a:pPr>
+            <a:r>
+              <a:rPr lang="en-US" sz="1800" b="1" dirty="0">
                 <a:solidFill>
                   <a:schemeClr val="tx1"/>
                 </a:solidFill>
               </a:rPr>
-              <a:t>Google Analytics</a:t>
-            </a:r>
-            <a:endParaRPr lang="en-US" sz="1300" dirty="0"/>
-          </a:p>
-        </p:txBody>
-      </p:sp>
-      <p:sp>
-        <p:nvSpPr>
-          <p:cNvPr id="33" name="pill-134"/>
-          <p:cNvSpPr/>
-          <p:nvPr/>
-        </p:nvSpPr>
-        <p:spPr>
-          <a:xfrm>
-            <a:off x="7226300" y="4191000"/>
-            <a:ext cx="850900" cy="381000"/>
-          </a:xfrm>
-          <a:prstGeom prst="roundRect">
-            <a:avLst>
-              <a:gd name="adj" fmla="val 50000"/>
-            </a:avLst>
-          </a:prstGeom>
-          <a:ln w="19050">
-            <a:solidFill>
-              <a:schemeClr val="tx1"/>
-            </a:solidFill>
-            <a:prstDash val="solid"/>
-          </a:ln>
-        </p:spPr>
-      </p:sp>
-      <p:sp>
-        <p:nvSpPr>
-          <p:cNvPr id="34" name="text-135"/>
-          <p:cNvSpPr txBox="1"/>
-          <p:nvPr/>
-        </p:nvSpPr>
-        <p:spPr>
-          <a:xfrm>
-            <a:off x="7226300" y="4191000"/>
-            <a:ext cx="850900" cy="381000"/>
-          </a:xfrm>
-          <a:prstGeom prst="rect">
-            <a:avLst/>
-          </a:prstGeom>
-          <a:noFill/>
-          <a:ln/>
-        </p:spPr>
-        <p:txBody>
-          <a:bodyPr wrap="square" lIns="0" tIns="0" rIns="0" bIns="0" rtlCol="0" anchor="ctr"/>
-          <a:lstStyle/>
-          <a:p>
-            <a:pPr algn="ctr" indent="0" marL="0">
-              <a:buNone/>
-            </a:pPr>
-            <a:r>
-              <a:rPr lang="en-US" sz="1300" dirty="0">
-                <a:solidFill>
-                  <a:schemeClr val="tx1"/>
-                </a:solidFill>
-              </a:rPr>
-              <a:t>Hotjar</a:t>
-            </a:r>
-            <a:endParaRPr lang="en-US" sz="1300" dirty="0"/>
-          </a:p>
-        </p:txBody>
-      </p:sp>
-      <p:sp>
-        <p:nvSpPr>
-          <p:cNvPr id="35" name="pill-136"/>
-          <p:cNvSpPr/>
-          <p:nvPr/>
-        </p:nvSpPr>
-        <p:spPr>
-          <a:xfrm>
-            <a:off x="8178800" y="4191000"/>
-            <a:ext cx="850900" cy="381000"/>
-          </a:xfrm>
-          <a:prstGeom prst="roundRect">
-            <a:avLst>
-              <a:gd name="adj" fmla="val 50000"/>
-            </a:avLst>
-          </a:prstGeom>
-          <a:ln w="19050">
-            <a:solidFill>
-              <a:schemeClr val="tx1"/>
-            </a:solidFill>
-            <a:prstDash val="solid"/>
-          </a:ln>
-        </p:spPr>
-      </p:sp>
-      <p:sp>
-        <p:nvSpPr>
-          <p:cNvPr id="36" name="text-137"/>
-          <p:cNvSpPr txBox="1"/>
-          <p:nvPr/>
-        </p:nvSpPr>
-        <p:spPr>
-          <a:xfrm>
-            <a:off x="8178800" y="4191000"/>
-            <a:ext cx="850900" cy="381000"/>
-          </a:xfrm>
-          <a:prstGeom prst="rect">
-            <a:avLst/>
-          </a:prstGeom>
-          <a:noFill/>
-          <a:ln/>
-        </p:spPr>
-        <p:txBody>
-          <a:bodyPr wrap="square" lIns="0" tIns="0" rIns="0" bIns="0" rtlCol="0" anchor="ctr"/>
-          <a:lstStyle/>
-          <a:p>
-            <a:pPr algn="ctr" indent="0" marL="0">
-              <a:buNone/>
-            </a:pPr>
-            <a:r>
-              <a:rPr lang="en-US" sz="1300" dirty="0">
-                <a:solidFill>
-                  <a:schemeClr val="tx1"/>
-                </a:solidFill>
-              </a:rPr>
-              <a:t>Notion</a:t>
-            </a:r>
-            <a:endParaRPr lang="en-US" sz="1300" dirty="0"/>
-          </a:p>
-        </p:txBody>
-      </p:sp>
-      <p:sp>
-        <p:nvSpPr>
-          <p:cNvPr id="37" name="pill-138"/>
-          <p:cNvSpPr/>
-          <p:nvPr/>
-        </p:nvSpPr>
-        <p:spPr>
-          <a:xfrm>
-            <a:off x="9131300" y="4191000"/>
-            <a:ext cx="685800" cy="381000"/>
-          </a:xfrm>
-          <a:prstGeom prst="roundRect">
-            <a:avLst>
-              <a:gd name="adj" fmla="val 50000"/>
-            </a:avLst>
-          </a:prstGeom>
-          <a:ln w="19050">
-            <a:solidFill>
-              <a:schemeClr val="tx1"/>
-            </a:solidFill>
-            <a:prstDash val="solid"/>
-          </a:ln>
-        </p:spPr>
-      </p:sp>
-      <p:sp>
-        <p:nvSpPr>
-          <p:cNvPr id="38" name="text-139"/>
-          <p:cNvSpPr txBox="1"/>
-          <p:nvPr/>
-        </p:nvSpPr>
-        <p:spPr>
-          <a:xfrm>
-            <a:off x="9131300" y="4191000"/>
-            <a:ext cx="685800" cy="381000"/>
-          </a:xfrm>
-          <a:prstGeom prst="rect">
-            <a:avLst/>
-          </a:prstGeom>
-          <a:noFill/>
-          <a:ln/>
-        </p:spPr>
-        <p:txBody>
-          <a:bodyPr wrap="square" lIns="0" tIns="0" rIns="0" bIns="0" rtlCol="0" anchor="ctr"/>
-          <a:lstStyle/>
-          <a:p>
-            <a:pPr algn="ctr" indent="0" marL="0">
-              <a:buNone/>
-            </a:pPr>
-            <a:r>
-              <a:rPr lang="en-US" sz="1300" dirty="0">
-                <a:solidFill>
-                  <a:schemeClr val="tx1"/>
-                </a:solidFill>
-              </a:rPr>
-              <a:t>Miro</a:t>
-            </a:r>
-            <a:endParaRPr lang="en-US" sz="1300" dirty="0"/>
-          </a:p>
-        </p:txBody>
-      </p:sp>
-      <p:sp>
-        <p:nvSpPr>
-          <p:cNvPr id="39" name="pill-140"/>
-          <p:cNvSpPr/>
-          <p:nvPr/>
-        </p:nvSpPr>
-        <p:spPr>
-          <a:xfrm>
-            <a:off x="9918700" y="4191000"/>
-            <a:ext cx="850900" cy="381000"/>
-          </a:xfrm>
-          <a:prstGeom prst="roundRect">
-            <a:avLst>
-              <a:gd name="adj" fmla="val 50000"/>
-            </a:avLst>
-          </a:prstGeom>
-          <a:ln w="19050">
-            <a:solidFill>
-              <a:schemeClr val="tx1"/>
-            </a:solidFill>
-            <a:prstDash val="solid"/>
-          </a:ln>
-        </p:spPr>
-      </p:sp>
-      <p:sp>
-        <p:nvSpPr>
-          <p:cNvPr id="40" name="text-141"/>
-          <p:cNvSpPr txBox="1"/>
-          <p:nvPr/>
-        </p:nvSpPr>
-        <p:spPr>
-          <a:xfrm>
-            <a:off x="9918700" y="4191000"/>
-            <a:ext cx="850900" cy="381000"/>
-          </a:xfrm>
-          <a:prstGeom prst="rect">
-            <a:avLst/>
-          </a:prstGeom>
-          <a:noFill/>
-          <a:ln/>
-        </p:spPr>
-        <p:txBody>
-          <a:bodyPr wrap="square" lIns="0" tIns="0" rIns="0" bIns="0" rtlCol="0" anchor="ctr"/>
-          <a:lstStyle/>
-          <a:p>
-            <a:pPr algn="ctr" indent="0" marL="0">
-              <a:buNone/>
-            </a:pPr>
-            <a:r>
-              <a:rPr lang="en-US" sz="1300" dirty="0">
-                <a:solidFill>
-                  <a:schemeClr val="tx1"/>
-                </a:solidFill>
-              </a:rPr>
-              <a:t>Trello</a:t>
-            </a:r>
-            <a:endParaRPr lang="en-US" sz="1300" dirty="0"/>
+              <a:t>Масштаб</a:t>
+            </a:r>
+            <a:endParaRPr lang="en-US" sz="1800" dirty="0"/>
+          </a:p>
+        </p:txBody>
+      </p:sp>
+      <p:sp>
+        <p:nvSpPr>
+          <p:cNvPr id="15" name="text-138"/>
+          <p:cNvSpPr txBox="1"/>
+          <p:nvPr/>
+        </p:nvSpPr>
+        <p:spPr>
+          <a:xfrm>
+            <a:off x="8242300" y="3302000"/>
+            <a:ext cx="2876550" cy="1333500"/>
+          </a:xfrm>
+          <a:prstGeom prst="rect">
+            <a:avLst/>
+          </a:prstGeom>
+          <a:noFill/>
+          <a:ln/>
+        </p:spPr>
+        <p:txBody>
+          <a:bodyPr wrap="square" lIns="0" tIns="0" rIns="0" bIns="0" rtlCol="0" anchor="t"/>
+          <a:lstStyle/>
+          <a:p>
+            <a:pPr indent="0" marL="0">
+              <a:buNone/>
+            </a:pPr>
+            <a:r>
+              <a:rPr lang="en-US" sz="1400" dirty="0">
+                <a:solidFill>
+                  <a:schemeClr val="tx2"/>
+                </a:solidFill>
+              </a:rPr>
+              <a:t>Усиливаю лучшие хуки и форматы, связываю контент с продажами курсов, отчёт по KPI.</a:t>
+            </a:r>
+            <a:endParaRPr lang="en-US" sz="1400" dirty="0"/>
+          </a:p>
+        </p:txBody>
+      </p:sp>
+      <p:sp>
+        <p:nvSpPr>
+          <p:cNvPr id="16" name="text-139"/>
+          <p:cNvSpPr txBox="1"/>
+          <p:nvPr/>
+        </p:nvSpPr>
+        <p:spPr>
+          <a:xfrm>
+            <a:off x="812800" y="5016500"/>
+            <a:ext cx="10566400" cy="635000"/>
+          </a:xfrm>
+          <a:prstGeom prst="rect">
+            <a:avLst/>
+          </a:prstGeom>
+          <a:noFill/>
+          <a:ln/>
+        </p:spPr>
+        <p:txBody>
+          <a:bodyPr wrap="square" lIns="0" tIns="0" rIns="0" bIns="0" rtlCol="0" anchor="t"/>
+          <a:lstStyle/>
+          <a:p>
+            <a:pPr indent="0" marL="0">
+              <a:buNone/>
+            </a:pPr>
+            <a:r>
+              <a:rPr lang="en-US" sz="1600" dirty="0">
+                <a:solidFill>
+                  <a:schemeClr val="tx2"/>
+                </a:solidFill>
+              </a:rPr>
+              <a:t>Уже есть опыт: обучающий контент (DemirBank), личный бренд (Бакыт Ирсалиев), сложный продукт простым языком (InWork).</a:t>
+            </a:r>
+            <a:endParaRPr lang="en-US" sz="1600" dirty="0"/>
           </a:p>
         </p:txBody>
       </p:sp>
